--- a/presentations/CalCOFI_progress_Dec2025-Jun2026.pptx
+++ b/presentations/CalCOFI_progress_Dec2025-Jun2026.pptx
@@ -5,27 +5,27 @@
     <p:sldMasterId id="2147483648" r:id="rId1"/>
   </p:sldMasterIdLst>
   <p:sldIdLst>
-    <p:sldId id="256" r:id="rId8"/>
-    <p:sldId id="257" r:id="rId9"/>
-    <p:sldId id="258" r:id="rId10"/>
-    <p:sldId id="259" r:id="rId11"/>
-    <p:sldId id="260" r:id="rId12"/>
-    <p:sldId id="261" r:id="rId13"/>
-    <p:sldId id="262" r:id="rId14"/>
-    <p:sldId id="263" r:id="rId15"/>
-    <p:sldId id="264" r:id="rId16"/>
-    <p:sldId id="265" r:id="rId17"/>
-    <p:sldId id="266" r:id="rId18"/>
-    <p:sldId id="267" r:id="rId19"/>
-    <p:sldId id="268" r:id="rId20"/>
-    <p:sldId id="269" r:id="rId21"/>
-    <p:sldId id="270" r:id="rId22"/>
-    <p:sldId id="271" r:id="rId23"/>
+    <p:sldId id="256" r:id="rId2"/>
+    <p:sldId id="257" r:id="rId3"/>
+    <p:sldId id="258" r:id="rId4"/>
+    <p:sldId id="259" r:id="rId5"/>
+    <p:sldId id="260" r:id="rId6"/>
+    <p:sldId id="261" r:id="rId7"/>
+    <p:sldId id="262" r:id="rId8"/>
+    <p:sldId id="263" r:id="rId9"/>
+    <p:sldId id="264" r:id="rId10"/>
+    <p:sldId id="265" r:id="rId11"/>
+    <p:sldId id="266" r:id="rId12"/>
+    <p:sldId id="267" r:id="rId13"/>
+    <p:sldId id="268" r:id="rId14"/>
+    <p:sldId id="269" r:id="rId15"/>
+    <p:sldId id="270" r:id="rId16"/>
+    <p:sldId id="271" r:id="rId17"/>
   </p:sldIdLst>
   <p:sldSz cx="9144000" cy="6858000" type="screen4x3"/>
   <p:notesSz cx="6858000" cy="9144000"/>
   <p:custDataLst>
-    <p:tags r:id="rId3"/>
+    <p:tags r:id="rId18"/>
   </p:custDataLst>
   <p:defaultTextStyle>
     <a:defPPr>
@@ -122,6 +122,22 @@
       </a:defRPr>
     </a:lvl9pPr>
   </p:defaultTextStyle>
+  <p:extLst>
+    <p:ext uri="{EFAFB233-063F-42B5-8137-9DF3F51BA10A}">
+      <p15:sldGuideLst xmlns:p15="http://schemas.microsoft.com/office/powerpoint/2012/main">
+        <p15:guide id="1" orient="horz" pos="2160">
+          <p15:clr>
+            <a:srgbClr val="A4A3A4"/>
+          </p15:clr>
+        </p15:guide>
+        <p15:guide id="2" pos="2880">
+          <p15:clr>
+            <a:srgbClr val="A4A3A4"/>
+          </p15:clr>
+        </p15:guide>
+      </p15:sldGuideLst>
+    </p:ext>
+  </p:extLst>
 </p:presentation>
 </file>
 
@@ -163,7 +179,7 @@
           <a:lstStyle/>
           <a:p>
             <a:r>
-              <a:rPr lang="en-US" smtClean="0"/>
+              <a:rPr lang="en-US"/>
               <a:t>Click to edit Master title style</a:t>
             </a:r>
             <a:endParaRPr lang="en-GB"/>
@@ -282,7 +298,7 @@
           </a:lstStyle>
           <a:p>
             <a:r>
-              <a:rPr lang="en-US" smtClean="0"/>
+              <a:rPr lang="en-US"/>
               <a:t>Click to edit Master subtitle style</a:t>
             </a:r>
             <a:endParaRPr lang="en-GB"/>
@@ -306,7 +322,7 @@
           <a:p>
             <a:fld id="{E6744CE3-0875-4B69-89C0-6F72D8139561}" type="datetimeFigureOut">
               <a:rPr lang="en-GB" smtClean="0"/>
-              <a:t>26/05/17</a:t>
+              <a:t>08/06/2026</a:t>
             </a:fld>
             <a:endParaRPr lang="en-GB"/>
           </a:p>
@@ -400,7 +416,7 @@
           <a:lstStyle/>
           <a:p>
             <a:r>
-              <a:rPr lang="en-US" smtClean="0"/>
+              <a:rPr lang="en-US"/>
               <a:t>Click to edit Master title style</a:t>
             </a:r>
             <a:endParaRPr lang="en-GB"/>
@@ -424,35 +440,35 @@
           <a:p>
             <a:pPr lvl="0"/>
             <a:r>
-              <a:rPr lang="en-US" smtClean="0"/>
+              <a:rPr lang="en-US"/>
               <a:t>Click to edit Master text styles</a:t>
             </a:r>
           </a:p>
           <a:p>
             <a:pPr lvl="1"/>
             <a:r>
-              <a:rPr lang="en-US" smtClean="0"/>
+              <a:rPr lang="en-US"/>
               <a:t>Second level</a:t>
             </a:r>
           </a:p>
           <a:p>
             <a:pPr lvl="2"/>
             <a:r>
-              <a:rPr lang="en-US" smtClean="0"/>
+              <a:rPr lang="en-US"/>
               <a:t>Third level</a:t>
             </a:r>
           </a:p>
           <a:p>
             <a:pPr lvl="3"/>
             <a:r>
-              <a:rPr lang="en-US" smtClean="0"/>
+              <a:rPr lang="en-US"/>
               <a:t>Fourth level</a:t>
             </a:r>
           </a:p>
           <a:p>
             <a:pPr lvl="4"/>
             <a:r>
-              <a:rPr lang="en-US" smtClean="0"/>
+              <a:rPr lang="en-US"/>
               <a:t>Fifth level</a:t>
             </a:r>
             <a:endParaRPr lang="en-GB"/>
@@ -476,7 +492,7 @@
           <a:p>
             <a:fld id="{E6744CE3-0875-4B69-89C0-6F72D8139561}" type="datetimeFigureOut">
               <a:rPr lang="en-GB" smtClean="0"/>
-              <a:t>26/05/17</a:t>
+              <a:t>08/06/2026</a:t>
             </a:fld>
             <a:endParaRPr lang="en-GB"/>
           </a:p>
@@ -579,7 +595,7 @@
           </a:lstStyle>
           <a:p>
             <a:r>
-              <a:rPr lang="en-US" smtClean="0"/>
+              <a:rPr lang="en-US"/>
               <a:t>Click to edit Master title style</a:t>
             </a:r>
             <a:endParaRPr lang="en-GB"/>
@@ -699,7 +715,7 @@
           <a:p>
             <a:pPr lvl="0"/>
             <a:r>
-              <a:rPr lang="en-US" smtClean="0"/>
+              <a:rPr lang="en-US"/>
               <a:t>Click to edit Master text styles</a:t>
             </a:r>
           </a:p>
@@ -722,7 +738,7 @@
           <a:p>
             <a:fld id="{E6744CE3-0875-4B69-89C0-6F72D8139561}" type="datetimeFigureOut">
               <a:rPr lang="en-GB" smtClean="0"/>
-              <a:t>26/05/17</a:t>
+              <a:t>08/06/2026</a:t>
             </a:fld>
             <a:endParaRPr lang="en-GB"/>
           </a:p>
@@ -816,7 +832,7 @@
           <a:lstStyle/>
           <a:p>
             <a:r>
-              <a:rPr lang="en-US" smtClean="0"/>
+              <a:rPr lang="en-US"/>
               <a:t>Click to edit Master title style</a:t>
             </a:r>
             <a:endParaRPr lang="en-GB"/>
@@ -873,35 +889,35 @@
           <a:p>
             <a:pPr lvl="0"/>
             <a:r>
-              <a:rPr lang="en-US" smtClean="0"/>
+              <a:rPr lang="en-US"/>
               <a:t>Click to edit Master text styles</a:t>
             </a:r>
           </a:p>
           <a:p>
             <a:pPr lvl="1"/>
             <a:r>
-              <a:rPr lang="en-US" smtClean="0"/>
+              <a:rPr lang="en-US"/>
               <a:t>Second level</a:t>
             </a:r>
           </a:p>
           <a:p>
             <a:pPr lvl="2"/>
             <a:r>
-              <a:rPr lang="en-US" smtClean="0"/>
+              <a:rPr lang="en-US"/>
               <a:t>Third level</a:t>
             </a:r>
           </a:p>
           <a:p>
             <a:pPr lvl="3"/>
             <a:r>
-              <a:rPr lang="en-US" smtClean="0"/>
+              <a:rPr lang="en-US"/>
               <a:t>Fourth level</a:t>
             </a:r>
           </a:p>
           <a:p>
             <a:pPr lvl="4"/>
             <a:r>
-              <a:rPr lang="en-US" smtClean="0"/>
+              <a:rPr lang="en-US"/>
               <a:t>Fifth level</a:t>
             </a:r>
             <a:endParaRPr lang="en-GB"/>
@@ -958,35 +974,35 @@
           <a:p>
             <a:pPr lvl="0"/>
             <a:r>
-              <a:rPr lang="en-US" smtClean="0"/>
+              <a:rPr lang="en-US"/>
               <a:t>Click to edit Master text styles</a:t>
             </a:r>
           </a:p>
           <a:p>
             <a:pPr lvl="1"/>
             <a:r>
-              <a:rPr lang="en-US" smtClean="0"/>
+              <a:rPr lang="en-US"/>
               <a:t>Second level</a:t>
             </a:r>
           </a:p>
           <a:p>
             <a:pPr lvl="2"/>
             <a:r>
-              <a:rPr lang="en-US" smtClean="0"/>
+              <a:rPr lang="en-US"/>
               <a:t>Third level</a:t>
             </a:r>
           </a:p>
           <a:p>
             <a:pPr lvl="3"/>
             <a:r>
-              <a:rPr lang="en-US" smtClean="0"/>
+              <a:rPr lang="en-US"/>
               <a:t>Fourth level</a:t>
             </a:r>
           </a:p>
           <a:p>
             <a:pPr lvl="4"/>
             <a:r>
-              <a:rPr lang="en-US" smtClean="0"/>
+              <a:rPr lang="en-US"/>
               <a:t>Fifth level</a:t>
             </a:r>
             <a:endParaRPr lang="en-GB"/>
@@ -1010,7 +1026,7 @@
           <a:p>
             <a:fld id="{E6744CE3-0875-4B69-89C0-6F72D8139561}" type="datetimeFigureOut">
               <a:rPr lang="en-GB" smtClean="0"/>
-              <a:t>26/05/17</a:t>
+              <a:t>08/06/2026</a:t>
             </a:fld>
             <a:endParaRPr lang="en-GB"/>
           </a:p>
@@ -1108,7 +1124,7 @@
           </a:lstStyle>
           <a:p>
             <a:r>
-              <a:rPr lang="en-US" smtClean="0"/>
+              <a:rPr lang="en-US"/>
               <a:t>Click to edit Master title style</a:t>
             </a:r>
             <a:endParaRPr lang="en-GB"/>
@@ -1174,7 +1190,7 @@
           <a:p>
             <a:pPr lvl="0"/>
             <a:r>
-              <a:rPr lang="en-US" smtClean="0"/>
+              <a:rPr lang="en-US"/>
               <a:t>Click to edit Master text styles</a:t>
             </a:r>
           </a:p>
@@ -1230,35 +1246,35 @@
           <a:p>
             <a:pPr lvl="0"/>
             <a:r>
-              <a:rPr lang="en-US" smtClean="0"/>
+              <a:rPr lang="en-US"/>
               <a:t>Click to edit Master text styles</a:t>
             </a:r>
           </a:p>
           <a:p>
             <a:pPr lvl="1"/>
             <a:r>
-              <a:rPr lang="en-US" smtClean="0"/>
+              <a:rPr lang="en-US"/>
               <a:t>Second level</a:t>
             </a:r>
           </a:p>
           <a:p>
             <a:pPr lvl="2"/>
             <a:r>
-              <a:rPr lang="en-US" smtClean="0"/>
+              <a:rPr lang="en-US"/>
               <a:t>Third level</a:t>
             </a:r>
           </a:p>
           <a:p>
             <a:pPr lvl="3"/>
             <a:r>
-              <a:rPr lang="en-US" smtClean="0"/>
+              <a:rPr lang="en-US"/>
               <a:t>Fourth level</a:t>
             </a:r>
           </a:p>
           <a:p>
             <a:pPr lvl="4"/>
             <a:r>
-              <a:rPr lang="en-US" smtClean="0"/>
+              <a:rPr lang="en-US"/>
               <a:t>Fifth level</a:t>
             </a:r>
             <a:endParaRPr lang="en-GB"/>
@@ -1324,7 +1340,7 @@
           <a:p>
             <a:pPr lvl="0"/>
             <a:r>
-              <a:rPr lang="en-US" smtClean="0"/>
+              <a:rPr lang="en-US"/>
               <a:t>Click to edit Master text styles</a:t>
             </a:r>
           </a:p>
@@ -1380,35 +1396,35 @@
           <a:p>
             <a:pPr lvl="0"/>
             <a:r>
-              <a:rPr lang="en-US" smtClean="0"/>
+              <a:rPr lang="en-US"/>
               <a:t>Click to edit Master text styles</a:t>
             </a:r>
           </a:p>
           <a:p>
             <a:pPr lvl="1"/>
             <a:r>
-              <a:rPr lang="en-US" smtClean="0"/>
+              <a:rPr lang="en-US"/>
               <a:t>Second level</a:t>
             </a:r>
           </a:p>
           <a:p>
             <a:pPr lvl="2"/>
             <a:r>
-              <a:rPr lang="en-US" smtClean="0"/>
+              <a:rPr lang="en-US"/>
               <a:t>Third level</a:t>
             </a:r>
           </a:p>
           <a:p>
             <a:pPr lvl="3"/>
             <a:r>
-              <a:rPr lang="en-US" smtClean="0"/>
+              <a:rPr lang="en-US"/>
               <a:t>Fourth level</a:t>
             </a:r>
           </a:p>
           <a:p>
             <a:pPr lvl="4"/>
             <a:r>
-              <a:rPr lang="en-US" smtClean="0"/>
+              <a:rPr lang="en-US"/>
               <a:t>Fifth level</a:t>
             </a:r>
             <a:endParaRPr lang="en-GB"/>
@@ -1432,7 +1448,7 @@
           <a:p>
             <a:fld id="{E6744CE3-0875-4B69-89C0-6F72D8139561}" type="datetimeFigureOut">
               <a:rPr lang="en-GB" smtClean="0"/>
-              <a:t>26/05/17</a:t>
+              <a:t>08/06/2026</a:t>
             </a:fld>
             <a:endParaRPr lang="en-GB"/>
           </a:p>
@@ -1526,7 +1542,7 @@
           <a:lstStyle/>
           <a:p>
             <a:r>
-              <a:rPr lang="en-US" smtClean="0"/>
+              <a:rPr lang="en-US"/>
               <a:t>Click to edit Master title style</a:t>
             </a:r>
             <a:endParaRPr lang="en-GB"/>
@@ -1550,7 +1566,7 @@
           <a:p>
             <a:fld id="{E6744CE3-0875-4B69-89C0-6F72D8139561}" type="datetimeFigureOut">
               <a:rPr lang="en-GB" smtClean="0"/>
-              <a:t>26/05/17</a:t>
+              <a:t>08/06/2026</a:t>
             </a:fld>
             <a:endParaRPr lang="en-GB"/>
           </a:p>
@@ -1645,7 +1661,7 @@
           <a:p>
             <a:fld id="{E6744CE3-0875-4B69-89C0-6F72D8139561}" type="datetimeFigureOut">
               <a:rPr lang="en-GB" smtClean="0"/>
-              <a:t>26/05/17</a:t>
+              <a:t>08/06/2026</a:t>
             </a:fld>
             <a:endParaRPr lang="en-GB"/>
           </a:p>
@@ -1754,7 +1770,7 @@
           <a:lstStyle/>
           <a:p>
             <a:r>
-              <a:rPr lang="en-US" smtClean="0"/>
+              <a:rPr lang="en-US"/>
               <a:t>Click to edit Master title style</a:t>
             </a:r>
             <a:endParaRPr lang="en-GB"/>
@@ -1788,35 +1804,35 @@
           <a:p>
             <a:pPr lvl="0"/>
             <a:r>
-              <a:rPr lang="en-US" smtClean="0"/>
+              <a:rPr lang="en-US"/>
               <a:t>Click to edit Master text styles</a:t>
             </a:r>
           </a:p>
           <a:p>
             <a:pPr lvl="1"/>
             <a:r>
-              <a:rPr lang="en-US" smtClean="0"/>
+              <a:rPr lang="en-US"/>
               <a:t>Second level</a:t>
             </a:r>
           </a:p>
           <a:p>
             <a:pPr lvl="2"/>
             <a:r>
-              <a:rPr lang="en-US" smtClean="0"/>
+              <a:rPr lang="en-US"/>
               <a:t>Third level</a:t>
             </a:r>
           </a:p>
           <a:p>
             <a:pPr lvl="3"/>
             <a:r>
-              <a:rPr lang="en-US" smtClean="0"/>
+              <a:rPr lang="en-US"/>
               <a:t>Fourth level</a:t>
             </a:r>
           </a:p>
           <a:p>
             <a:pPr lvl="4"/>
             <a:r>
-              <a:rPr lang="en-US" smtClean="0"/>
+              <a:rPr lang="en-US"/>
               <a:t>Fifth level</a:t>
             </a:r>
             <a:endParaRPr lang="en-GB"/>
@@ -1858,7 +1874,7 @@
           <a:p>
             <a:fld id="{E6744CE3-0875-4B69-89C0-6F72D8139561}" type="datetimeFigureOut">
               <a:rPr lang="en-GB" smtClean="0"/>
-              <a:t>26/05/17</a:t>
+              <a:t>08/06/2026</a:t>
             </a:fld>
             <a:endParaRPr lang="en-GB"/>
           </a:p>
@@ -2249,7 +2265,7 @@
           <a:bodyPr/>
           <a:lstStyle/>
           <a:p>
-            <a:pPr algn="l" marL="0" marR="0">
+            <a:pPr marL="0" marR="0" algn="l">
               <a:lnSpc>
                 <a:spcPct val="100000"/>
               </a:lnSpc>
@@ -2262,7 +2278,7 @@
               <a:buNone/>
             </a:pPr>
             <a:r>
-              <a:rPr cap="none" sz="3400" i="0" b="1" u="none" strike="noStrike">
+              <a:rPr sz="3400" b="1" i="0" u="none" strike="noStrike" cap="none" dirty="0">
                 <a:solidFill>
                   <a:srgbClr val="0A3D62">
                     <a:alpha val="100000"/>
@@ -2270,10 +2286,9 @@
                 </a:solidFill>
                 <a:latin typeface="Arial"/>
                 <a:cs typeface="Arial"/>
-                <a:ea typeface="Arial"/>
                 <a:sym typeface="Arial"/>
               </a:rPr>
-              <a:t>CalCOFI Automation — Ocean Metrics</a:t>
+              <a:t>CalCOFI Automation</a:t>
             </a:r>
           </a:p>
         </p:txBody>
@@ -2298,7 +2313,7 @@
           <a:bodyPr/>
           <a:lstStyle/>
           <a:p>
-            <a:pPr algn="l" marL="0" marR="0">
+            <a:pPr marL="0" marR="0" algn="l">
               <a:lnSpc>
                 <a:spcPct val="100000"/>
               </a:lnSpc>
@@ -2311,7 +2326,7 @@
               <a:buNone/>
             </a:pPr>
             <a:r>
-              <a:rPr cap="none" sz="2000" i="0" b="0" u="none" strike="noStrike">
+              <a:rPr sz="2000" b="0" i="0" u="none" strike="noStrike" cap="none" dirty="0">
                 <a:solidFill>
                   <a:srgbClr val="1B7B7B">
                     <a:alpha val="100000"/>
@@ -2319,14 +2334,13 @@
                 </a:solidFill>
                 <a:latin typeface="Arial"/>
                 <a:cs typeface="Arial"/>
-                <a:ea typeface="Arial"/>
                 <a:sym typeface="Arial"/>
               </a:rPr>
               <a:t>Progress Report: December 2025 – June 2026
 </a:t>
             </a:r>
             <a:r>
-              <a:rPr cap="none" sz="1600" i="1" b="0" u="none" strike="noStrike">
+              <a:rPr sz="1600" b="0" i="1" u="none" strike="noStrike" cap="none" dirty="0">
                 <a:solidFill>
                   <a:srgbClr val="5A5A5A">
                     <a:alpha val="100000"/>
@@ -2334,17 +2348,117 @@
                 </a:solidFill>
                 <a:latin typeface="Arial"/>
                 <a:cs typeface="Arial"/>
-                <a:ea typeface="Arial"/>
                 <a:sym typeface="Arial"/>
               </a:rPr>
               <a:t>Integrating, serving &amp; visualizing America's oldest ocean-ecosystem time series</a:t>
             </a:r>
+            <a:br>
+              <a:rPr lang="en-US" sz="1600" b="0" i="1" u="none" strike="noStrike" cap="none" dirty="0">
+                <a:solidFill>
+                  <a:srgbClr val="5A5A5A">
+                    <a:alpha val="100000"/>
+                  </a:srgbClr>
+                </a:solidFill>
+                <a:latin typeface="Arial"/>
+                <a:cs typeface="Arial"/>
+                <a:sym typeface="Arial"/>
+              </a:rPr>
+            </a:br>
+            <a:br>
+              <a:rPr lang="en-US" sz="1600" b="0" i="1" u="none" strike="noStrike" cap="none" dirty="0">
+                <a:solidFill>
+                  <a:srgbClr val="5A5A5A">
+                    <a:alpha val="100000"/>
+                  </a:srgbClr>
+                </a:solidFill>
+                <a:latin typeface="Arial"/>
+                <a:cs typeface="Arial"/>
+                <a:sym typeface="Arial"/>
+              </a:rPr>
+            </a:br>
+            <a:r>
+              <a:rPr lang="en-US" sz="1600" b="0" i="1" u="none" strike="noStrike" cap="none" dirty="0">
+                <a:solidFill>
+                  <a:srgbClr val="5A5A5A">
+                    <a:alpha val="100000"/>
+                  </a:srgbClr>
+                </a:solidFill>
+                <a:latin typeface="Arial"/>
+                <a:cs typeface="Arial"/>
+                <a:sym typeface="Arial"/>
+              </a:rPr>
+              <a:t>Ben Best (</a:t>
+            </a:r>
+            <a:r>
+              <a:rPr lang="en-US" sz="1600" b="0" i="1" u="none" strike="noStrike" cap="none" dirty="0">
+                <a:solidFill>
+                  <a:srgbClr val="5A5A5A">
+                    <a:alpha val="100000"/>
+                  </a:srgbClr>
+                </a:solidFill>
+                <a:latin typeface="Arial"/>
+                <a:cs typeface="Arial"/>
+                <a:sym typeface="Arial"/>
+                <a:hlinkClick r:id="rId2"/>
+              </a:rPr>
+              <a:t>ben@oceanmetrics.io</a:t>
+            </a:r>
+            <a:r>
+              <a:rPr lang="en-US" sz="1600" b="0" i="1" u="none" strike="noStrike" cap="none" dirty="0">
+                <a:solidFill>
+                  <a:srgbClr val="5A5A5A">
+                    <a:alpha val="100000"/>
+                  </a:srgbClr>
+                </a:solidFill>
+                <a:latin typeface="Arial"/>
+                <a:cs typeface="Arial"/>
+                <a:sym typeface="Arial"/>
+              </a:rPr>
+              <a:t>)</a:t>
+            </a:r>
+          </a:p>
+          <a:p>
+            <a:pPr marL="0" marR="0" algn="l">
+              <a:lnSpc>
+                <a:spcPct val="100000"/>
+              </a:lnSpc>
+              <a:spcBef>
+                <a:spcPts val="0"/>
+              </a:spcBef>
+              <a:spcAft>
+                <a:spcPts val="0"/>
+              </a:spcAft>
+              <a:buNone/>
+            </a:pPr>
+            <a:r>
+              <a:rPr lang="en-US" sz="1600" i="1" dirty="0">
+                <a:solidFill>
+                  <a:srgbClr val="5A5A5A">
+                    <a:alpha val="100000"/>
+                  </a:srgbClr>
+                </a:solidFill>
+                <a:latin typeface="Arial"/>
+                <a:cs typeface="Arial"/>
+                <a:sym typeface="Arial"/>
+              </a:rPr>
+              <a:t>Ocean Metrics LLC</a:t>
+            </a:r>
+            <a:endParaRPr sz="1600" b="0" i="1" u="none" strike="noStrike" cap="none" dirty="0">
+              <a:solidFill>
+                <a:srgbClr val="5A5A5A">
+                  <a:alpha val="100000"/>
+                </a:srgbClr>
+              </a:solidFill>
+              <a:latin typeface="Arial"/>
+              <a:cs typeface="Arial"/>
+              <a:sym typeface="Arial"/>
+            </a:endParaRPr>
           </a:p>
         </p:txBody>
       </p:sp>
       <p:pic>
         <p:nvPicPr>
-          <p:cNvPr id="4" name="" descr=""/>
+          <p:cNvPr id="4" name="Content Placeholder 3"/>
           <p:cNvPicPr>
             <a:picLocks noGrp="1"/>
           </p:cNvPicPr>
@@ -2353,14 +2467,14 @@
           </p:nvPr>
         </p:nvPicPr>
         <p:blipFill>
-          <a:blip r:embed="rId2"/>
+          <a:blip r:embed="rId3"/>
           <a:stretch>
             <a:fillRect/>
           </a:stretch>
         </p:blipFill>
         <p:spPr>
           <a:xfrm>
-            <a:off x="7315200" y="274320"/>
+            <a:off x="5486400" y="-2821"/>
             <a:ext cx="3657600" cy="2743200"/>
           </a:xfrm>
           <a:prstGeom prst="rect">
@@ -2413,7 +2527,7 @@
           <a:bodyPr/>
           <a:lstStyle/>
           <a:p>
-            <a:pPr algn="l" marL="0" marR="0">
+            <a:pPr marL="0" marR="0" algn="l">
               <a:lnSpc>
                 <a:spcPct val="100000"/>
               </a:lnSpc>
@@ -2426,7 +2540,7 @@
               <a:buNone/>
             </a:pPr>
             <a:r>
-              <a:rPr cap="none" sz="2600" i="0" b="1" u="none" strike="noStrike">
+              <a:rPr sz="2600" b="1" i="0" u="none" strike="noStrike" cap="none">
                 <a:solidFill>
                   <a:srgbClr val="0A3D62">
                     <a:alpha val="100000"/>
@@ -2434,7 +2548,6 @@
                 </a:solidFill>
                 <a:latin typeface="Arial"/>
                 <a:cs typeface="Arial"/>
-                <a:ea typeface="Arial"/>
                 <a:sym typeface="Arial"/>
               </a:rPr>
               <a:t>Visualize — interactive products</a:t>
@@ -2462,7 +2575,7 @@
           <a:bodyPr/>
           <a:lstStyle/>
           <a:p>
-            <a:pPr algn="l" marL="0" marR="0">
+            <a:pPr marL="0" marR="0" algn="l">
               <a:lnSpc>
                 <a:spcPct val="100000"/>
               </a:lnSpc>
@@ -2475,7 +2588,7 @@
               <a:buNone/>
             </a:pPr>
             <a:r>
-              <a:rPr cap="none" sz="1600" i="0" b="0" u="none" strike="noStrike">
+              <a:rPr sz="1600" b="0" i="0" u="none" strike="noStrike" cap="none">
                 <a:solidFill>
                   <a:srgbClr val="222222">
                     <a:alpha val="100000"/>
@@ -2483,14 +2596,13 @@
                 </a:solidFill>
                 <a:latin typeface="Arial"/>
                 <a:cs typeface="Arial"/>
-                <a:ea typeface="Arial"/>
                 <a:sym typeface="Arial"/>
               </a:rPr>
               <a:t>Schema site (calcofi.io/schema): interactive ERD, table &amp; column browser, cross-dataset filter — data-driven from GCS sidecars.</a:t>
             </a:r>
           </a:p>
           <a:p>
-            <a:pPr algn="l" marL="0" marR="0">
+            <a:pPr marL="0" marR="0" algn="l">
               <a:lnSpc>
                 <a:spcPct val="100000"/>
               </a:lnSpc>
@@ -2503,7 +2615,7 @@
               <a:buNone/>
             </a:pPr>
             <a:r>
-              <a:rPr cap="none" sz="1600" i="0" b="0" u="none" strike="noStrike">
+              <a:rPr sz="1600" b="0" i="0" u="none" strike="noStrike" cap="none">
                 <a:solidFill>
                   <a:srgbClr val="222222">
                     <a:alpha val="100000"/>
@@ -2511,14 +2623,13 @@
                 </a:solidFill>
                 <a:latin typeface="Arial"/>
                 <a:cs typeface="Arial"/>
-                <a:ea typeface="Arial"/>
                 <a:sym typeface="Arial"/>
               </a:rPr>
               <a:t>ctd-viz app: ODV-style interpolated CTD transects with bathymetry, linked map/table/plot.</a:t>
             </a:r>
           </a:p>
           <a:p>
-            <a:pPr algn="l" marL="0" marR="0">
+            <a:pPr marL="0" marR="0" algn="l">
               <a:lnSpc>
                 <a:spcPct val="100000"/>
               </a:lnSpc>
@@ -2531,7 +2642,7 @@
               <a:buNone/>
             </a:pPr>
             <a:r>
-              <a:rPr cap="none" sz="1600" i="0" b="0" u="none" strike="noStrike">
+              <a:rPr sz="1600" b="0" i="0" u="none" strike="noStrike" cap="none">
                 <a:solidFill>
                   <a:srgbClr val="222222">
                     <a:alpha val="100000"/>
@@ -2539,14 +2650,13 @@
                 </a:solidFill>
                 <a:latin typeface="Arial"/>
                 <a:cs typeface="Arial"/>
-                <a:ea typeface="Arial"/>
                 <a:sym typeface="Arial"/>
               </a:rPr>
               <a:t>datacheck app (NEW): cross-dataset observations for any cruise on a map/table/plot, with deep-linkable URLs for provider questions.</a:t>
             </a:r>
           </a:p>
           <a:p>
-            <a:pPr algn="l" marL="0" marR="0">
+            <a:pPr marL="0" marR="0" algn="l">
               <a:lnSpc>
                 <a:spcPct val="100000"/>
               </a:lnSpc>
@@ -2559,7 +2669,7 @@
               <a:buNone/>
             </a:pPr>
             <a:r>
-              <a:rPr cap="none" sz="1600" i="0" b="0" u="none" strike="noStrike">
+              <a:rPr sz="1600" b="0" i="0" u="none" strike="noStrike" cap="none">
                 <a:solidFill>
                   <a:srgbClr val="222222">
                     <a:alpha val="100000"/>
@@ -2567,14 +2677,13 @@
                 </a:solidFill>
                 <a:latin typeface="Arial"/>
                 <a:cs typeface="Arial"/>
-                <a:ea typeface="Arial"/>
                 <a:sym typeface="Arial"/>
               </a:rPr>
               <a:t>Integrated app (app.calcofi.io/int): H3 hexagon summaries; new cached endpoint serves hexes on-the-fly by map extent &amp; zoom.</a:t>
             </a:r>
           </a:p>
           <a:p>
-            <a:pPr algn="l" marL="0" marR="0">
+            <a:pPr marL="0" marR="0" algn="l">
               <a:lnSpc>
                 <a:spcPct val="100000"/>
               </a:lnSpc>
@@ -2587,7 +2696,7 @@
               <a:buNone/>
             </a:pPr>
             <a:r>
-              <a:rPr cap="none" sz="1600" i="0" b="0" u="none" strike="noStrike">
+              <a:rPr sz="1600" b="0" i="0" u="none" strike="noStrike" cap="none">
                 <a:solidFill>
                   <a:srgbClr val="222222">
                     <a:alpha val="100000"/>
@@ -2595,7 +2704,6 @@
                 </a:solidFill>
                 <a:latin typeface="Arial"/>
                 <a:cs typeface="Arial"/>
-                <a:ea typeface="Arial"/>
                 <a:sym typeface="Arial"/>
               </a:rPr>
               <a:t>Management areas of interest (sanctuaries, MPAs, BOEM wind) — in progress.</a:t>
@@ -2648,7 +2756,7 @@
           <a:bodyPr/>
           <a:lstStyle/>
           <a:p>
-            <a:pPr algn="l" marL="0" marR="0">
+            <a:pPr marL="0" marR="0" algn="l">
               <a:lnSpc>
                 <a:spcPct val="100000"/>
               </a:lnSpc>
@@ -2661,7 +2769,7 @@
               <a:buNone/>
             </a:pPr>
             <a:r>
-              <a:rPr cap="none" sz="2600" i="0" b="1" u="none" strike="noStrike">
+              <a:rPr sz="2600" b="1" i="0" u="none" strike="noStrike" cap="none">
                 <a:solidFill>
                   <a:srgbClr val="0A3D62">
                     <a:alpha val="100000"/>
@@ -2669,7 +2777,6 @@
                 </a:solidFill>
                 <a:latin typeface="Arial"/>
                 <a:cs typeface="Arial"/>
-                <a:ea typeface="Arial"/>
                 <a:sym typeface="Arial"/>
               </a:rPr>
               <a:t>One integrated, referentially-intact schema</a:t>
@@ -2679,7 +2786,7 @@
       </p:sp>
       <p:pic>
         <p:nvPicPr>
-          <p:cNvPr id="3" name="" descr=""/>
+          <p:cNvPr id="3" name="Content Placeholder 2"/>
           <p:cNvPicPr>
             <a:picLocks noGrp="1"/>
           </p:cNvPicPr>
@@ -2705,7 +2812,7 @@
       </p:pic>
       <p:sp>
         <p:nvSpPr>
-          <p:cNvPr id="4" name=""/>
+          <p:cNvPr id="4" name="Content Placeholder 3"/>
           <p:cNvSpPr>
             <a:spLocks noGrp="1"/>
           </p:cNvSpPr>
@@ -2723,7 +2830,7 @@
           <a:bodyPr/>
           <a:lstStyle/>
           <a:p>
-            <a:pPr algn="l" marL="0" marR="0">
+            <a:pPr marL="0" marR="0" algn="l">
               <a:lnSpc>
                 <a:spcPct val="100000"/>
               </a:lnSpc>
@@ -2736,7 +2843,7 @@
               <a:buNone/>
             </a:pPr>
             <a:r>
-              <a:rPr cap="none" sz="1300" i="0" b="0" u="none" strike="noStrike">
+              <a:rPr sz="1300" b="0" i="0" u="none" strike="noStrike" cap="none">
                 <a:solidFill>
                   <a:srgbClr val="5A5A5A">
                     <a:alpha val="100000"/>
@@ -2744,7 +2851,6 @@
                 </a:solidFill>
                 <a:latin typeface="Arial"/>
                 <a:cs typeface="Arial"/>
-                <a:ea typeface="Arial"/>
                 <a:sym typeface="Arial"/>
               </a:rPr>
               <a:t>Entity–relationship diagram of release v2026.06.08 (44 tables across 10 datasets)</a:t>
@@ -2797,7 +2903,7 @@
           <a:bodyPr/>
           <a:lstStyle/>
           <a:p>
-            <a:pPr algn="l" marL="0" marR="0">
+            <a:pPr marL="0" marR="0" algn="l">
               <a:lnSpc>
                 <a:spcPct val="100000"/>
               </a:lnSpc>
@@ -2810,7 +2916,7 @@
               <a:buNone/>
             </a:pPr>
             <a:r>
-              <a:rPr cap="none" sz="4000" i="0" b="1" u="none" strike="noStrike">
+              <a:rPr sz="4000" b="1" i="0" u="none" strike="noStrike" cap="none">
                 <a:solidFill>
                   <a:srgbClr val="0A3D62">
                     <a:alpha val="100000"/>
@@ -2818,7 +2924,6 @@
                 </a:solidFill>
                 <a:latin typeface="Arial"/>
                 <a:cs typeface="Arial"/>
-                <a:ea typeface="Arial"/>
                 <a:sym typeface="Arial"/>
               </a:rPr>
               <a:t>③ SHARE</a:t>
@@ -2846,7 +2951,7 @@
           <a:bodyPr/>
           <a:lstStyle/>
           <a:p>
-            <a:pPr algn="l" marL="0" marR="0">
+            <a:pPr marL="0" marR="0" algn="l">
               <a:lnSpc>
                 <a:spcPct val="100000"/>
               </a:lnSpc>
@@ -2859,7 +2964,7 @@
               <a:buNone/>
             </a:pPr>
             <a:r>
-              <a:rPr cap="none" sz="1800" i="0" b="1" u="none" strike="noStrike">
+              <a:rPr sz="1800" b="1" i="0" u="none" strike="noStrike" cap="none">
                 <a:solidFill>
                   <a:srgbClr val="F58518">
                     <a:alpha val="100000"/>
@@ -2867,7 +2972,6 @@
                 </a:solidFill>
                 <a:latin typeface="Arial"/>
                 <a:cs typeface="Arial"/>
-                <a:ea typeface="Arial"/>
                 <a:sym typeface="Arial"/>
               </a:rPr>
               <a:t>Component 3 of 3</a:t>
@@ -2920,7 +3024,7 @@
           <a:bodyPr/>
           <a:lstStyle/>
           <a:p>
-            <a:pPr algn="l" marL="0" marR="0">
+            <a:pPr marL="0" marR="0" algn="l">
               <a:lnSpc>
                 <a:spcPct val="100000"/>
               </a:lnSpc>
@@ -2933,7 +3037,7 @@
               <a:buNone/>
             </a:pPr>
             <a:r>
-              <a:rPr cap="none" sz="2600" i="0" b="1" u="none" strike="noStrike">
+              <a:rPr sz="2600" b="1" i="0" u="none" strike="noStrike" cap="none">
                 <a:solidFill>
                   <a:srgbClr val="0A3D62">
                     <a:alpha val="100000"/>
@@ -2941,7 +3045,6 @@
                 </a:solidFill>
                 <a:latin typeface="Arial"/>
                 <a:cs typeface="Arial"/>
-                <a:ea typeface="Arial"/>
                 <a:sym typeface="Arial"/>
               </a:rPr>
               <a:t>Share — publishing to standards portals</a:t>
@@ -2953,22 +3056,40 @@
         <p:nvGraphicFramePr>
           <p:cNvPr id="3" name="Content Placeholder 2"/>
           <p:cNvGraphicFramePr>
-            <a:graphicFrameLocks noGrp="true"/>
+            <a:graphicFrameLocks noGrp="1"/>
           </p:cNvGraphicFramePr>
           <p:nvPr/>
         </p:nvGraphicFramePr>
-        <p:xfrm rot="0">
+        <p:xfrm>
           <a:off x="457200" y="1600200"/>
-          <a:ext cx="8229600" cy="4525963"/>
+          <a:ext cx="6480316" cy="2136635"/>
         </p:xfrm>
         <a:graphic>
           <a:graphicData uri="http://schemas.openxmlformats.org/drawingml/2006/table">
             <a:tbl>
               <a:tblPr/>
               <a:tblGrid>
-                <a:gridCol w="1468927"/>
-                <a:gridCol w="3581139"/>
-                <a:gridCol w="1430250"/>
+                <a:gridCol w="1468927">
+                  <a:extLst>
+                    <a:ext uri="{9D8B030D-6E8A-4147-A177-3AD203B41FA5}">
+                      <a16:colId xmlns:a16="http://schemas.microsoft.com/office/drawing/2014/main" val="20000"/>
+                    </a:ext>
+                  </a:extLst>
+                </a:gridCol>
+                <a:gridCol w="3581139">
+                  <a:extLst>
+                    <a:ext uri="{9D8B030D-6E8A-4147-A177-3AD203B41FA5}">
+                      <a16:colId xmlns:a16="http://schemas.microsoft.com/office/drawing/2014/main" val="20001"/>
+                    </a:ext>
+                  </a:extLst>
+                </a:gridCol>
+                <a:gridCol w="1430250">
+                  <a:extLst>
+                    <a:ext uri="{9D8B030D-6E8A-4147-A177-3AD203B41FA5}">
+                      <a16:colId xmlns:a16="http://schemas.microsoft.com/office/drawing/2014/main" val="20002"/>
+                    </a:ext>
+                  </a:extLst>
+                </a:gridCol>
               </a:tblGrid>
               <a:tr h="342621">
                 <a:tc>
@@ -2976,7 +3097,7 @@
                     <a:bodyPr/>
                     <a:lstStyle/>
                     <a:p>
-                      <a:pPr algn="l" marL="50800" marR="50800">
+                      <a:pPr marL="50800" marR="50800" algn="l">
                         <a:lnSpc>
                           <a:spcPct val="100000"/>
                         </a:lnSpc>
@@ -2989,7 +3110,7 @@
                         <a:buNone/>
                       </a:pPr>
                       <a:r>
-                        <a:rPr cap="none" sz="1200" i="0" b="1" u="none" strike="noStrike">
+                        <a:rPr sz="1200" b="1" i="0" u="none" strike="noStrike" cap="none">
                           <a:solidFill>
                             <a:srgbClr val="FFFFFF">
                               <a:alpha val="100000"/>
@@ -2997,15 +3118,14 @@
                           </a:solidFill>
                           <a:latin typeface="Helvetica"/>
                           <a:cs typeface="Helvetica"/>
-                          <a:ea typeface="Helvetica"/>
                           <a:sym typeface="Helvetica"/>
                         </a:rPr>
                         <a:t>Portal</a:t>
                       </a:r>
                     </a:p>
                   </a:txBody>
-                  <a:tcPr anchor="ctr" marB="50800" marT="50800" marR="0" marL="0">
-                    <a:lnL algn="ctr" cmpd="sng" cap="flat" w="9525">
+                  <a:tcPr marL="0" marR="0" marT="50800" marB="50800" anchor="ctr">
+                    <a:lnL w="9525" cap="flat" cmpd="sng" algn="ctr">
                       <a:solidFill>
                         <a:srgbClr val="666666">
                           <a:alpha val="100000"/>
@@ -3013,7 +3133,7 @@
                       </a:solidFill>
                       <a:prstDash val="solid"/>
                     </a:lnL>
-                    <a:lnR algn="ctr" cmpd="sng" cap="flat" w="9525">
+                    <a:lnR w="9525" cap="flat" cmpd="sng" algn="ctr">
                       <a:solidFill>
                         <a:srgbClr val="666666">
                           <a:alpha val="100000"/>
@@ -3021,7 +3141,7 @@
                       </a:solidFill>
                       <a:prstDash val="solid"/>
                     </a:lnR>
-                    <a:lnT algn="ctr" cmpd="sng" cap="flat" w="9525">
+                    <a:lnT w="9525" cap="flat" cmpd="sng" algn="ctr">
                       <a:solidFill>
                         <a:srgbClr val="666666">
                           <a:alpha val="100000"/>
@@ -3029,7 +3149,7 @@
                       </a:solidFill>
                       <a:prstDash val="solid"/>
                     </a:lnT>
-                    <a:lnB algn="ctr" cmpd="sng" cap="flat" w="9525">
+                    <a:lnB w="9525" cap="flat" cmpd="sng" algn="ctr">
                       <a:solidFill>
                         <a:srgbClr val="666666">
                           <a:alpha val="100000"/>
@@ -3049,7 +3169,7 @@
                     <a:bodyPr/>
                     <a:lstStyle/>
                     <a:p>
-                      <a:pPr algn="l" marL="50800" marR="50800">
+                      <a:pPr marL="50800" marR="50800" algn="l">
                         <a:lnSpc>
                           <a:spcPct val="100000"/>
                         </a:lnSpc>
@@ -3062,7 +3182,7 @@
                         <a:buNone/>
                       </a:pPr>
                       <a:r>
-                        <a:rPr cap="none" sz="1200" i="0" b="1" u="none" strike="noStrike">
+                        <a:rPr sz="1200" b="1" i="0" u="none" strike="noStrike" cap="none">
                           <a:solidFill>
                             <a:srgbClr val="FFFFFF">
                               <a:alpha val="100000"/>
@@ -3070,15 +3190,14 @@
                           </a:solidFill>
                           <a:latin typeface="Helvetica"/>
                           <a:cs typeface="Helvetica"/>
-                          <a:ea typeface="Helvetica"/>
                           <a:sym typeface="Helvetica"/>
                         </a:rPr>
                         <a:t>Dataset</a:t>
                       </a:r>
                     </a:p>
                   </a:txBody>
-                  <a:tcPr anchor="ctr" marB="50800" marT="50800" marR="0" marL="0">
-                    <a:lnL algn="ctr" cmpd="sng" cap="flat" w="9525">
+                  <a:tcPr marL="0" marR="0" marT="50800" marB="50800" anchor="ctr">
+                    <a:lnL w="9525" cap="flat" cmpd="sng" algn="ctr">
                       <a:solidFill>
                         <a:srgbClr val="666666">
                           <a:alpha val="100000"/>
@@ -3086,7 +3205,7 @@
                       </a:solidFill>
                       <a:prstDash val="solid"/>
                     </a:lnL>
-                    <a:lnR algn="ctr" cmpd="sng" cap="flat" w="9525">
+                    <a:lnR w="9525" cap="flat" cmpd="sng" algn="ctr">
                       <a:solidFill>
                         <a:srgbClr val="666666">
                           <a:alpha val="100000"/>
@@ -3094,7 +3213,7 @@
                       </a:solidFill>
                       <a:prstDash val="solid"/>
                     </a:lnR>
-                    <a:lnT algn="ctr" cmpd="sng" cap="flat" w="9525">
+                    <a:lnT w="9525" cap="flat" cmpd="sng" algn="ctr">
                       <a:solidFill>
                         <a:srgbClr val="666666">
                           <a:alpha val="100000"/>
@@ -3102,7 +3221,7 @@
                       </a:solidFill>
                       <a:prstDash val="solid"/>
                     </a:lnT>
-                    <a:lnB algn="ctr" cmpd="sng" cap="flat" w="9525">
+                    <a:lnB w="9525" cap="flat" cmpd="sng" algn="ctr">
                       <a:solidFill>
                         <a:srgbClr val="666666">
                           <a:alpha val="100000"/>
@@ -3122,7 +3241,7 @@
                     <a:bodyPr/>
                     <a:lstStyle/>
                     <a:p>
-                      <a:pPr algn="l" marL="50800" marR="50800">
+                      <a:pPr marL="50800" marR="50800" algn="l">
                         <a:lnSpc>
                           <a:spcPct val="100000"/>
                         </a:lnSpc>
@@ -3135,7 +3254,7 @@
                         <a:buNone/>
                       </a:pPr>
                       <a:r>
-                        <a:rPr cap="none" sz="1200" i="0" b="1" u="none" strike="noStrike">
+                        <a:rPr sz="1200" b="1" i="0" u="none" strike="noStrike" cap="none">
                           <a:solidFill>
                             <a:srgbClr val="FFFFFF">
                               <a:alpha val="100000"/>
@@ -3143,15 +3262,14 @@
                           </a:solidFill>
                           <a:latin typeface="Helvetica"/>
                           <a:cs typeface="Helvetica"/>
-                          <a:ea typeface="Helvetica"/>
                           <a:sym typeface="Helvetica"/>
                         </a:rPr>
                         <a:t>Status</a:t>
                       </a:r>
                     </a:p>
                   </a:txBody>
-                  <a:tcPr anchor="ctr" marB="50800" marT="50800" marR="0" marL="0">
-                    <a:lnL algn="ctr" cmpd="sng" cap="flat" w="9525">
+                  <a:tcPr marL="0" marR="0" marT="50800" marB="50800" anchor="ctr">
+                    <a:lnL w="9525" cap="flat" cmpd="sng" algn="ctr">
                       <a:solidFill>
                         <a:srgbClr val="666666">
                           <a:alpha val="100000"/>
@@ -3159,7 +3277,7 @@
                       </a:solidFill>
                       <a:prstDash val="solid"/>
                     </a:lnL>
-                    <a:lnR algn="ctr" cmpd="sng" cap="flat" w="9525">
+                    <a:lnR w="9525" cap="flat" cmpd="sng" algn="ctr">
                       <a:solidFill>
                         <a:srgbClr val="666666">
                           <a:alpha val="100000"/>
@@ -3167,7 +3285,7 @@
                       </a:solidFill>
                       <a:prstDash val="solid"/>
                     </a:lnR>
-                    <a:lnT algn="ctr" cmpd="sng" cap="flat" w="9525">
+                    <a:lnT w="9525" cap="flat" cmpd="sng" algn="ctr">
                       <a:solidFill>
                         <a:srgbClr val="666666">
                           <a:alpha val="100000"/>
@@ -3175,7 +3293,7 @@
                       </a:solidFill>
                       <a:prstDash val="solid"/>
                     </a:lnT>
-                    <a:lnB algn="ctr" cmpd="sng" cap="flat" w="9525">
+                    <a:lnB w="9525" cap="flat" cmpd="sng" algn="ctr">
                       <a:solidFill>
                         <a:srgbClr val="666666">
                           <a:alpha val="100000"/>
@@ -3190,6 +3308,11 @@
                     </a:solidFill>
                   </a:tcPr>
                 </a:tc>
+                <a:extLst>
+                  <a:ext uri="{0D108BD9-81ED-4DB2-BD59-A6C34878D82A}">
+                    <a16:rowId xmlns:a16="http://schemas.microsoft.com/office/drawing/2014/main" val="10000"/>
+                  </a:ext>
+                </a:extLst>
               </a:tr>
               <a:tr h="360740">
                 <a:tc>
@@ -3197,7 +3320,7 @@
                     <a:bodyPr/>
                     <a:lstStyle/>
                     <a:p>
-                      <a:pPr algn="l" marL="50800" marR="50800">
+                      <a:pPr marL="50800" marR="50800" algn="l">
                         <a:lnSpc>
                           <a:spcPct val="100000"/>
                         </a:lnSpc>
@@ -3210,7 +3333,7 @@
                         <a:buNone/>
                       </a:pPr>
                       <a:r>
-                        <a:rPr cap="none" sz="1100" i="0" b="0" u="none" strike="noStrike">
+                        <a:rPr sz="1100" b="0" i="0" u="none" strike="noStrike" cap="none">
                           <a:solidFill>
                             <a:srgbClr val="000000">
                               <a:alpha val="100000"/>
@@ -3218,15 +3341,14 @@
                           </a:solidFill>
                           <a:latin typeface="Helvetica"/>
                           <a:cs typeface="Helvetica"/>
-                          <a:ea typeface="Helvetica"/>
                           <a:sym typeface="Helvetica"/>
                         </a:rPr>
                         <a:t>ERDDAP</a:t>
                       </a:r>
                     </a:p>
                   </a:txBody>
-                  <a:tcPr anchor="ctr" marB="50800" marT="50800" marR="0" marL="0">
-                    <a:lnL algn="ctr" cmpd="sng" cap="flat" w="9525">
+                  <a:tcPr marL="0" marR="0" marT="50800" marB="50800" anchor="ctr">
+                    <a:lnL w="9525" cap="flat" cmpd="sng" algn="ctr">
                       <a:solidFill>
                         <a:srgbClr val="666666">
                           <a:alpha val="100000"/>
@@ -3234,7 +3356,7 @@
                       </a:solidFill>
                       <a:prstDash val="solid"/>
                     </a:lnL>
-                    <a:lnR algn="ctr" cmpd="sng" cap="flat" w="9525">
+                    <a:lnR w="9525" cap="flat" cmpd="sng" algn="ctr">
                       <a:solidFill>
                         <a:srgbClr val="666666">
                           <a:alpha val="100000"/>
@@ -3242,11 +3364,16 @@
                       </a:solidFill>
                       <a:prstDash val="solid"/>
                     </a:lnR>
-                    <a:lnT algn="ctr" cmpd="sng" cap="flat" w="0">
-                      <a:noFill/>
-                      <a:prstDash val="solid"/>
+                    <a:lnT w="9525" cap="flat" cmpd="sng" algn="ctr">
+                      <a:solidFill>
+                        <a:srgbClr val="666666"/>
+                      </a:solidFill>
+                      <a:prstDash val="solid"/>
+                      <a:round/>
+                      <a:headEnd type="none" w="med" len="med"/>
+                      <a:tailEnd type="none" w="med" len="med"/>
                     </a:lnT>
-                    <a:lnB algn="ctr" cmpd="sng" cap="flat" w="9525">
+                    <a:lnB w="9525" cap="flat" cmpd="sng" algn="ctr">
                       <a:solidFill>
                         <a:srgbClr val="666666">
                           <a:alpha val="100000"/>
@@ -3266,7 +3393,7 @@
                     <a:bodyPr/>
                     <a:lstStyle/>
                     <a:p>
-                      <a:pPr algn="l" marL="50800" marR="50800">
+                      <a:pPr marL="50800" marR="50800" algn="l">
                         <a:lnSpc>
                           <a:spcPct val="100000"/>
                         </a:lnSpc>
@@ -3279,7 +3406,7 @@
                         <a:buNone/>
                       </a:pPr>
                       <a:r>
-                        <a:rPr cap="none" sz="1100" i="0" b="0" u="none" strike="noStrike">
+                        <a:rPr sz="1100" b="0" i="0" u="none" strike="noStrike" cap="none">
                           <a:solidFill>
                             <a:srgbClr val="000000">
                               <a:alpha val="100000"/>
@@ -3287,15 +3414,14 @@
                           </a:solidFill>
                           <a:latin typeface="Helvetica"/>
                           <a:cs typeface="Helvetica"/>
-                          <a:ea typeface="Helvetica"/>
                           <a:sym typeface="Helvetica"/>
                         </a:rPr>
                         <a:t>CTD · Bottle · DIC · Krill · Zooplankton · Phytoplankton</a:t>
                       </a:r>
                     </a:p>
                   </a:txBody>
-                  <a:tcPr anchor="ctr" marB="50800" marT="50800" marR="0" marL="0">
-                    <a:lnL algn="ctr" cmpd="sng" cap="flat" w="9525">
+                  <a:tcPr marL="0" marR="0" marT="50800" marB="50800" anchor="ctr">
+                    <a:lnL w="9525" cap="flat" cmpd="sng" algn="ctr">
                       <a:solidFill>
                         <a:srgbClr val="666666">
                           <a:alpha val="100000"/>
@@ -3303,7 +3429,7 @@
                       </a:solidFill>
                       <a:prstDash val="solid"/>
                     </a:lnL>
-                    <a:lnR algn="ctr" cmpd="sng" cap="flat" w="9525">
+                    <a:lnR w="9525" cap="flat" cmpd="sng" algn="ctr">
                       <a:solidFill>
                         <a:srgbClr val="666666">
                           <a:alpha val="100000"/>
@@ -3311,11 +3437,16 @@
                       </a:solidFill>
                       <a:prstDash val="solid"/>
                     </a:lnR>
-                    <a:lnT algn="ctr" cmpd="sng" cap="flat" w="0">
-                      <a:noFill/>
-                      <a:prstDash val="solid"/>
+                    <a:lnT w="9525" cap="flat" cmpd="sng" algn="ctr">
+                      <a:solidFill>
+                        <a:srgbClr val="666666"/>
+                      </a:solidFill>
+                      <a:prstDash val="solid"/>
+                      <a:round/>
+                      <a:headEnd type="none" w="med" len="med"/>
+                      <a:tailEnd type="none" w="med" len="med"/>
                     </a:lnT>
-                    <a:lnB algn="ctr" cmpd="sng" cap="flat" w="9525">
+                    <a:lnB w="9525" cap="flat" cmpd="sng" algn="ctr">
                       <a:solidFill>
                         <a:srgbClr val="666666">
                           <a:alpha val="100000"/>
@@ -3335,7 +3466,7 @@
                     <a:bodyPr/>
                     <a:lstStyle/>
                     <a:p>
-                      <a:pPr algn="l" marL="50800" marR="50800">
+                      <a:pPr marL="50800" marR="50800" algn="l">
                         <a:lnSpc>
                           <a:spcPct val="100000"/>
                         </a:lnSpc>
@@ -3348,7 +3479,7 @@
                         <a:buNone/>
                       </a:pPr>
                       <a:r>
-                        <a:rPr cap="none" sz="1100" i="0" b="0" u="none" strike="noStrike">
+                        <a:rPr sz="1100" b="0" i="0" u="none" strike="noStrike" cap="none">
                           <a:solidFill>
                             <a:srgbClr val="000000">
                               <a:alpha val="100000"/>
@@ -3356,15 +3487,14 @@
                           </a:solidFill>
                           <a:latin typeface="Helvetica"/>
                           <a:cs typeface="Helvetica"/>
-                          <a:ea typeface="Helvetica"/>
                           <a:sym typeface="Helvetica"/>
                         </a:rPr>
                         <a:t>5 live, CTD syncing</a:t>
                       </a:r>
                     </a:p>
                   </a:txBody>
-                  <a:tcPr anchor="ctr" marB="50800" marT="50800" marR="0" marL="0">
-                    <a:lnL algn="ctr" cmpd="sng" cap="flat" w="9525">
+                  <a:tcPr marL="0" marR="0" marT="50800" marB="50800" anchor="ctr">
+                    <a:lnL w="9525" cap="flat" cmpd="sng" algn="ctr">
                       <a:solidFill>
                         <a:srgbClr val="666666">
                           <a:alpha val="100000"/>
@@ -3372,7 +3502,7 @@
                       </a:solidFill>
                       <a:prstDash val="solid"/>
                     </a:lnL>
-                    <a:lnR algn="ctr" cmpd="sng" cap="flat" w="9525">
+                    <a:lnR w="9525" cap="flat" cmpd="sng" algn="ctr">
                       <a:solidFill>
                         <a:srgbClr val="666666">
                           <a:alpha val="100000"/>
@@ -3380,11 +3510,16 @@
                       </a:solidFill>
                       <a:prstDash val="solid"/>
                     </a:lnR>
-                    <a:lnT algn="ctr" cmpd="sng" cap="flat" w="0">
-                      <a:noFill/>
-                      <a:prstDash val="solid"/>
+                    <a:lnT w="9525" cap="flat" cmpd="sng" algn="ctr">
+                      <a:solidFill>
+                        <a:srgbClr val="666666"/>
+                      </a:solidFill>
+                      <a:prstDash val="solid"/>
+                      <a:round/>
+                      <a:headEnd type="none" w="med" len="med"/>
+                      <a:tailEnd type="none" w="med" len="med"/>
                     </a:lnT>
-                    <a:lnB algn="ctr" cmpd="sng" cap="flat" w="9525">
+                    <a:lnB w="9525" cap="flat" cmpd="sng" algn="ctr">
                       <a:solidFill>
                         <a:srgbClr val="666666">
                           <a:alpha val="100000"/>
@@ -3399,6 +3534,11 @@
                     </a:solidFill>
                   </a:tcPr>
                 </a:tc>
+                <a:extLst>
+                  <a:ext uri="{0D108BD9-81ED-4DB2-BD59-A6C34878D82A}">
+                    <a16:rowId xmlns:a16="http://schemas.microsoft.com/office/drawing/2014/main" val="10001"/>
+                  </a:ext>
+                </a:extLst>
               </a:tr>
               <a:tr h="359649">
                 <a:tc>
@@ -3406,7 +3546,7 @@
                     <a:bodyPr/>
                     <a:lstStyle/>
                     <a:p>
-                      <a:pPr algn="l" marL="50800" marR="50800">
+                      <a:pPr marL="50800" marR="50800" algn="l">
                         <a:lnSpc>
                           <a:spcPct val="100000"/>
                         </a:lnSpc>
@@ -3419,7 +3559,7 @@
                         <a:buNone/>
                       </a:pPr>
                       <a:r>
-                        <a:rPr cap="none" sz="1100" i="0" b="0" u="none" strike="noStrike">
+                        <a:rPr sz="1100" b="0" i="0" u="none" strike="noStrike" cap="none">
                           <a:solidFill>
                             <a:srgbClr val="000000">
                               <a:alpha val="100000"/>
@@ -3427,15 +3567,14 @@
                           </a:solidFill>
                           <a:latin typeface="Helvetica"/>
                           <a:cs typeface="Helvetica"/>
-                          <a:ea typeface="Helvetica"/>
                           <a:sym typeface="Helvetica"/>
                         </a:rPr>
                         <a:t>OBIS (Darwin Core)</a:t>
                       </a:r>
                     </a:p>
                   </a:txBody>
-                  <a:tcPr anchor="ctr" marB="50800" marT="50800" marR="0" marL="0">
-                    <a:lnL algn="ctr" cmpd="sng" cap="flat" w="9525">
+                  <a:tcPr marL="0" marR="0" marT="50800" marB="50800" anchor="ctr">
+                    <a:lnL w="9525" cap="flat" cmpd="sng" algn="ctr">
                       <a:solidFill>
                         <a:srgbClr val="666666">
                           <a:alpha val="100000"/>
@@ -3443,7 +3582,7 @@
                       </a:solidFill>
                       <a:prstDash val="solid"/>
                     </a:lnL>
-                    <a:lnR algn="ctr" cmpd="sng" cap="flat" w="9525">
+                    <a:lnR w="9525" cap="flat" cmpd="sng" algn="ctr">
                       <a:solidFill>
                         <a:srgbClr val="666666">
                           <a:alpha val="100000"/>
@@ -3451,7 +3590,7 @@
                       </a:solidFill>
                       <a:prstDash val="solid"/>
                     </a:lnR>
-                    <a:lnT algn="ctr" cmpd="sng" cap="flat" w="9525">
+                    <a:lnT w="9525" cap="flat" cmpd="sng" algn="ctr">
                       <a:solidFill>
                         <a:srgbClr val="666666">
                           <a:alpha val="100000"/>
@@ -3459,7 +3598,7 @@
                       </a:solidFill>
                       <a:prstDash val="solid"/>
                     </a:lnT>
-                    <a:lnB algn="ctr" cmpd="sng" cap="flat" w="9525">
+                    <a:lnB w="9525" cap="flat" cmpd="sng" algn="ctr">
                       <a:solidFill>
                         <a:srgbClr val="666666">
                           <a:alpha val="100000"/>
@@ -3479,7 +3618,7 @@
                     <a:bodyPr/>
                     <a:lstStyle/>
                     <a:p>
-                      <a:pPr algn="l" marL="50800" marR="50800">
+                      <a:pPr marL="50800" marR="50800" algn="l">
                         <a:lnSpc>
                           <a:spcPct val="100000"/>
                         </a:lnSpc>
@@ -3492,7 +3631,7 @@
                         <a:buNone/>
                       </a:pPr>
                       <a:r>
-                        <a:rPr cap="none" sz="1100" i="0" b="0" u="none" strike="noStrike">
+                        <a:rPr sz="1100" b="0" i="0" u="none" strike="noStrike" cap="none">
                           <a:solidFill>
                             <a:srgbClr val="000000">
                               <a:alpha val="100000"/>
@@ -3500,15 +3639,14 @@
                           </a:solidFill>
                           <a:latin typeface="Helvetica"/>
                           <a:cs typeface="Helvetica"/>
-                          <a:ea typeface="Helvetica"/>
                           <a:sym typeface="Helvetica"/>
                         </a:rPr>
                         <a:t>Ichthyoplankton (eggs/larvae)</a:t>
                       </a:r>
                     </a:p>
                   </a:txBody>
-                  <a:tcPr anchor="ctr" marB="50800" marT="50800" marR="0" marL="0">
-                    <a:lnL algn="ctr" cmpd="sng" cap="flat" w="9525">
+                  <a:tcPr marL="0" marR="0" marT="50800" marB="50800" anchor="ctr">
+                    <a:lnL w="9525" cap="flat" cmpd="sng" algn="ctr">
                       <a:solidFill>
                         <a:srgbClr val="666666">
                           <a:alpha val="100000"/>
@@ -3516,7 +3654,7 @@
                       </a:solidFill>
                       <a:prstDash val="solid"/>
                     </a:lnL>
-                    <a:lnR algn="ctr" cmpd="sng" cap="flat" w="9525">
+                    <a:lnR w="9525" cap="flat" cmpd="sng" algn="ctr">
                       <a:solidFill>
                         <a:srgbClr val="666666">
                           <a:alpha val="100000"/>
@@ -3524,7 +3662,7 @@
                       </a:solidFill>
                       <a:prstDash val="solid"/>
                     </a:lnR>
-                    <a:lnT algn="ctr" cmpd="sng" cap="flat" w="9525">
+                    <a:lnT w="9525" cap="flat" cmpd="sng" algn="ctr">
                       <a:solidFill>
                         <a:srgbClr val="666666">
                           <a:alpha val="100000"/>
@@ -3532,7 +3670,7 @@
                       </a:solidFill>
                       <a:prstDash val="solid"/>
                     </a:lnT>
-                    <a:lnB algn="ctr" cmpd="sng" cap="flat" w="9525">
+                    <a:lnB w="9525" cap="flat" cmpd="sng" algn="ctr">
                       <a:solidFill>
                         <a:srgbClr val="666666">
                           <a:alpha val="100000"/>
@@ -3552,7 +3690,7 @@
                     <a:bodyPr/>
                     <a:lstStyle/>
                     <a:p>
-                      <a:pPr algn="l" marL="50800" marR="50800">
+                      <a:pPr marL="50800" marR="50800" algn="l">
                         <a:lnSpc>
                           <a:spcPct val="100000"/>
                         </a:lnSpc>
@@ -3565,7 +3703,7 @@
                         <a:buNone/>
                       </a:pPr>
                       <a:r>
-                        <a:rPr cap="none" sz="1100" i="0" b="0" u="none" strike="noStrike">
+                        <a:rPr sz="1100" b="0" i="0" u="none" strike="noStrike" cap="none">
                           <a:solidFill>
                             <a:srgbClr val="000000">
                               <a:alpha val="100000"/>
@@ -3573,15 +3711,14 @@
                           </a:solidFill>
                           <a:latin typeface="Helvetica"/>
                           <a:cs typeface="Helvetica"/>
-                          <a:ea typeface="Helvetica"/>
                           <a:sym typeface="Helvetica"/>
                         </a:rPr>
                         <a:t>done</a:t>
                       </a:r>
                     </a:p>
                   </a:txBody>
-                  <a:tcPr anchor="ctr" marB="50800" marT="50800" marR="0" marL="0">
-                    <a:lnL algn="ctr" cmpd="sng" cap="flat" w="9525">
+                  <a:tcPr marL="0" marR="0" marT="50800" marB="50800" anchor="ctr">
+                    <a:lnL w="9525" cap="flat" cmpd="sng" algn="ctr">
                       <a:solidFill>
                         <a:srgbClr val="666666">
                           <a:alpha val="100000"/>
@@ -3589,7 +3726,7 @@
                       </a:solidFill>
                       <a:prstDash val="solid"/>
                     </a:lnL>
-                    <a:lnR algn="ctr" cmpd="sng" cap="flat" w="9525">
+                    <a:lnR w="9525" cap="flat" cmpd="sng" algn="ctr">
                       <a:solidFill>
                         <a:srgbClr val="666666">
                           <a:alpha val="100000"/>
@@ -3597,7 +3734,7 @@
                       </a:solidFill>
                       <a:prstDash val="solid"/>
                     </a:lnR>
-                    <a:lnT algn="ctr" cmpd="sng" cap="flat" w="9525">
+                    <a:lnT w="9525" cap="flat" cmpd="sng" algn="ctr">
                       <a:solidFill>
                         <a:srgbClr val="666666">
                           <a:alpha val="100000"/>
@@ -3605,7 +3742,7 @@
                       </a:solidFill>
                       <a:prstDash val="solid"/>
                     </a:lnT>
-                    <a:lnB algn="ctr" cmpd="sng" cap="flat" w="9525">
+                    <a:lnB w="9525" cap="flat" cmpd="sng" algn="ctr">
                       <a:solidFill>
                         <a:srgbClr val="666666">
                           <a:alpha val="100000"/>
@@ -3620,6 +3757,11 @@
                     </a:solidFill>
                   </a:tcPr>
                 </a:tc>
+                <a:extLst>
+                  <a:ext uri="{0D108BD9-81ED-4DB2-BD59-A6C34878D82A}">
+                    <a16:rowId xmlns:a16="http://schemas.microsoft.com/office/drawing/2014/main" val="10002"/>
+                  </a:ext>
+                </a:extLst>
               </a:tr>
               <a:tr h="357875">
                 <a:tc>
@@ -3627,7 +3769,7 @@
                     <a:bodyPr/>
                     <a:lstStyle/>
                     <a:p>
-                      <a:pPr algn="l" marL="50800" marR="50800">
+                      <a:pPr marL="50800" marR="50800" algn="l">
                         <a:lnSpc>
                           <a:spcPct val="100000"/>
                         </a:lnSpc>
@@ -3640,7 +3782,7 @@
                         <a:buNone/>
                       </a:pPr>
                       <a:r>
-                        <a:rPr cap="none" sz="1100" i="0" b="0" u="none" strike="noStrike">
+                        <a:rPr sz="1100" b="0" i="0" u="none" strike="noStrike" cap="none">
                           <a:solidFill>
                             <a:srgbClr val="000000">
                               <a:alpha val="100000"/>
@@ -3648,15 +3790,14 @@
                           </a:solidFill>
                           <a:latin typeface="Helvetica"/>
                           <a:cs typeface="Helvetica"/>
-                          <a:ea typeface="Helvetica"/>
                           <a:sym typeface="Helvetica"/>
                         </a:rPr>
                         <a:t>EDI</a:t>
                       </a:r>
                     </a:p>
                   </a:txBody>
-                  <a:tcPr anchor="ctr" marB="50800" marT="50800" marR="0" marL="0">
-                    <a:lnL algn="ctr" cmpd="sng" cap="flat" w="9525">
+                  <a:tcPr marL="0" marR="0" marT="50800" marB="50800" anchor="ctr">
+                    <a:lnL w="9525" cap="flat" cmpd="sng" algn="ctr">
                       <a:solidFill>
                         <a:srgbClr val="666666">
                           <a:alpha val="100000"/>
@@ -3664,7 +3805,7 @@
                       </a:solidFill>
                       <a:prstDash val="solid"/>
                     </a:lnL>
-                    <a:lnR algn="ctr" cmpd="sng" cap="flat" w="9525">
+                    <a:lnR w="9525" cap="flat" cmpd="sng" algn="ctr">
                       <a:solidFill>
                         <a:srgbClr val="666666">
                           <a:alpha val="100000"/>
@@ -3672,7 +3813,7 @@
                       </a:solidFill>
                       <a:prstDash val="solid"/>
                     </a:lnR>
-                    <a:lnT algn="ctr" cmpd="sng" cap="flat" w="9525">
+                    <a:lnT w="9525" cap="flat" cmpd="sng" algn="ctr">
                       <a:solidFill>
                         <a:srgbClr val="666666">
                           <a:alpha val="100000"/>
@@ -3680,7 +3821,7 @@
                       </a:solidFill>
                       <a:prstDash val="solid"/>
                     </a:lnT>
-                    <a:lnB algn="ctr" cmpd="sng" cap="flat" w="9525">
+                    <a:lnB w="9525" cap="flat" cmpd="sng" algn="ctr">
                       <a:solidFill>
                         <a:srgbClr val="666666">
                           <a:alpha val="100000"/>
@@ -3700,7 +3841,7 @@
                     <a:bodyPr/>
                     <a:lstStyle/>
                     <a:p>
-                      <a:pPr algn="l" marL="50800" marR="50800">
+                      <a:pPr marL="50800" marR="50800" algn="l">
                         <a:lnSpc>
                           <a:spcPct val="100000"/>
                         </a:lnSpc>
@@ -3713,7 +3854,7 @@
                         <a:buNone/>
                       </a:pPr>
                       <a:r>
-                        <a:rPr cap="none" sz="1100" i="0" b="0" u="none" strike="noStrike">
+                        <a:rPr sz="1100" b="0" i="0" u="none" strike="noStrike" cap="none">
                           <a:solidFill>
                             <a:srgbClr val="000000">
                               <a:alpha val="100000"/>
@@ -3721,15 +3862,14 @@
                           </a:solidFill>
                           <a:latin typeface="Helvetica"/>
                           <a:cs typeface="Helvetica"/>
-                          <a:ea typeface="Helvetica"/>
                           <a:sym typeface="Helvetica"/>
                         </a:rPr>
                         <a:t>Zooplankton</a:t>
                       </a:r>
                     </a:p>
                   </a:txBody>
-                  <a:tcPr anchor="ctr" marB="50800" marT="50800" marR="0" marL="0">
-                    <a:lnL algn="ctr" cmpd="sng" cap="flat" w="9525">
+                  <a:tcPr marL="0" marR="0" marT="50800" marB="50800" anchor="ctr">
+                    <a:lnL w="9525" cap="flat" cmpd="sng" algn="ctr">
                       <a:solidFill>
                         <a:srgbClr val="666666">
                           <a:alpha val="100000"/>
@@ -3737,7 +3877,7 @@
                       </a:solidFill>
                       <a:prstDash val="solid"/>
                     </a:lnL>
-                    <a:lnR algn="ctr" cmpd="sng" cap="flat" w="9525">
+                    <a:lnR w="9525" cap="flat" cmpd="sng" algn="ctr">
                       <a:solidFill>
                         <a:srgbClr val="666666">
                           <a:alpha val="100000"/>
@@ -3745,7 +3885,7 @@
                       </a:solidFill>
                       <a:prstDash val="solid"/>
                     </a:lnR>
-                    <a:lnT algn="ctr" cmpd="sng" cap="flat" w="9525">
+                    <a:lnT w="9525" cap="flat" cmpd="sng" algn="ctr">
                       <a:solidFill>
                         <a:srgbClr val="666666">
                           <a:alpha val="100000"/>
@@ -3753,7 +3893,7 @@
                       </a:solidFill>
                       <a:prstDash val="solid"/>
                     </a:lnT>
-                    <a:lnB algn="ctr" cmpd="sng" cap="flat" w="9525">
+                    <a:lnB w="9525" cap="flat" cmpd="sng" algn="ctr">
                       <a:solidFill>
                         <a:srgbClr val="666666">
                           <a:alpha val="100000"/>
@@ -3773,7 +3913,7 @@
                     <a:bodyPr/>
                     <a:lstStyle/>
                     <a:p>
-                      <a:pPr algn="l" marL="50800" marR="50800">
+                      <a:pPr marL="50800" marR="50800" algn="l">
                         <a:lnSpc>
                           <a:spcPct val="100000"/>
                         </a:lnSpc>
@@ -3786,7 +3926,7 @@
                         <a:buNone/>
                       </a:pPr>
                       <a:r>
-                        <a:rPr cap="none" sz="1100" i="0" b="0" u="none" strike="noStrike">
+                        <a:rPr sz="1100" b="0" i="0" u="none" strike="noStrike" cap="none">
                           <a:solidFill>
                             <a:srgbClr val="000000">
                               <a:alpha val="100000"/>
@@ -3794,15 +3934,14 @@
                           </a:solidFill>
                           <a:latin typeface="Helvetica"/>
                           <a:cs typeface="Helvetica"/>
-                          <a:ea typeface="Helvetica"/>
                           <a:sym typeface="Helvetica"/>
                         </a:rPr>
                         <a:t>planned (#42)</a:t>
                       </a:r>
                     </a:p>
                   </a:txBody>
-                  <a:tcPr anchor="ctr" marB="50800" marT="50800" marR="0" marL="0">
-                    <a:lnL algn="ctr" cmpd="sng" cap="flat" w="9525">
+                  <a:tcPr marL="0" marR="0" marT="50800" marB="50800" anchor="ctr">
+                    <a:lnL w="9525" cap="flat" cmpd="sng" algn="ctr">
                       <a:solidFill>
                         <a:srgbClr val="666666">
                           <a:alpha val="100000"/>
@@ -3810,7 +3949,7 @@
                       </a:solidFill>
                       <a:prstDash val="solid"/>
                     </a:lnL>
-                    <a:lnR algn="ctr" cmpd="sng" cap="flat" w="9525">
+                    <a:lnR w="9525" cap="flat" cmpd="sng" algn="ctr">
                       <a:solidFill>
                         <a:srgbClr val="666666">
                           <a:alpha val="100000"/>
@@ -3818,7 +3957,7 @@
                       </a:solidFill>
                       <a:prstDash val="solid"/>
                     </a:lnR>
-                    <a:lnT algn="ctr" cmpd="sng" cap="flat" w="9525">
+                    <a:lnT w="9525" cap="flat" cmpd="sng" algn="ctr">
                       <a:solidFill>
                         <a:srgbClr val="666666">
                           <a:alpha val="100000"/>
@@ -3826,7 +3965,7 @@
                       </a:solidFill>
                       <a:prstDash val="solid"/>
                     </a:lnT>
-                    <a:lnB algn="ctr" cmpd="sng" cap="flat" w="9525">
+                    <a:lnB w="9525" cap="flat" cmpd="sng" algn="ctr">
                       <a:solidFill>
                         <a:srgbClr val="666666">
                           <a:alpha val="100000"/>
@@ -3841,6 +3980,11 @@
                     </a:solidFill>
                   </a:tcPr>
                 </a:tc>
+                <a:extLst>
+                  <a:ext uri="{0D108BD9-81ED-4DB2-BD59-A6C34878D82A}">
+                    <a16:rowId xmlns:a16="http://schemas.microsoft.com/office/drawing/2014/main" val="10003"/>
+                  </a:ext>
+                </a:extLst>
               </a:tr>
               <a:tr h="357875">
                 <a:tc>
@@ -3848,7 +3992,7 @@
                     <a:bodyPr/>
                     <a:lstStyle/>
                     <a:p>
-                      <a:pPr algn="l" marL="50800" marR="50800">
+                      <a:pPr marL="50800" marR="50800" algn="l">
                         <a:lnSpc>
                           <a:spcPct val="100000"/>
                         </a:lnSpc>
@@ -3861,7 +4005,7 @@
                         <a:buNone/>
                       </a:pPr>
                       <a:r>
-                        <a:rPr cap="none" sz="1100" i="0" b="0" u="none" strike="noStrike">
+                        <a:rPr sz="1100" b="0" i="0" u="none" strike="noStrike" cap="none">
                           <a:solidFill>
                             <a:srgbClr val="000000">
                               <a:alpha val="100000"/>
@@ -3869,15 +4013,14 @@
                           </a:solidFill>
                           <a:latin typeface="Helvetica"/>
                           <a:cs typeface="Helvetica"/>
-                          <a:ea typeface="Helvetica"/>
                           <a:sym typeface="Helvetica"/>
                         </a:rPr>
                         <a:t>EDI</a:t>
                       </a:r>
                     </a:p>
                   </a:txBody>
-                  <a:tcPr anchor="ctr" marB="50800" marT="50800" marR="0" marL="0">
-                    <a:lnL algn="ctr" cmpd="sng" cap="flat" w="9525">
+                  <a:tcPr marL="0" marR="0" marT="50800" marB="50800" anchor="ctr">
+                    <a:lnL w="9525" cap="flat" cmpd="sng" algn="ctr">
                       <a:solidFill>
                         <a:srgbClr val="666666">
                           <a:alpha val="100000"/>
@@ -3885,7 +4028,7 @@
                       </a:solidFill>
                       <a:prstDash val="solid"/>
                     </a:lnL>
-                    <a:lnR algn="ctr" cmpd="sng" cap="flat" w="9525">
+                    <a:lnR w="9525" cap="flat" cmpd="sng" algn="ctr">
                       <a:solidFill>
                         <a:srgbClr val="666666">
                           <a:alpha val="100000"/>
@@ -3893,7 +4036,7 @@
                       </a:solidFill>
                       <a:prstDash val="solid"/>
                     </a:lnR>
-                    <a:lnT algn="ctr" cmpd="sng" cap="flat" w="9525">
+                    <a:lnT w="9525" cap="flat" cmpd="sng" algn="ctr">
                       <a:solidFill>
                         <a:srgbClr val="666666">
                           <a:alpha val="100000"/>
@@ -3901,7 +4044,7 @@
                       </a:solidFill>
                       <a:prstDash val="solid"/>
                     </a:lnT>
-                    <a:lnB algn="ctr" cmpd="sng" cap="flat" w="9525">
+                    <a:lnB w="9525" cap="flat" cmpd="sng" algn="ctr">
                       <a:solidFill>
                         <a:srgbClr val="666666">
                           <a:alpha val="100000"/>
@@ -3921,7 +4064,7 @@
                     <a:bodyPr/>
                     <a:lstStyle/>
                     <a:p>
-                      <a:pPr algn="l" marL="50800" marR="50800">
+                      <a:pPr marL="50800" marR="50800" algn="l">
                         <a:lnSpc>
                           <a:spcPct val="100000"/>
                         </a:lnSpc>
@@ -3934,7 +4077,7 @@
                         <a:buNone/>
                       </a:pPr>
                       <a:r>
-                        <a:rPr cap="none" sz="1100" i="0" b="0" u="none" strike="noStrike">
+                        <a:rPr sz="1100" b="0" i="0" u="none" strike="noStrike" cap="none">
                           <a:solidFill>
                             <a:srgbClr val="000000">
                               <a:alpha val="100000"/>
@@ -3942,15 +4085,14 @@
                           </a:solidFill>
                           <a:latin typeface="Helvetica"/>
                           <a:cs typeface="Helvetica"/>
-                          <a:ea typeface="Helvetica"/>
                           <a:sym typeface="Helvetica"/>
                         </a:rPr>
                         <a:t>Phytoplankton</a:t>
                       </a:r>
                     </a:p>
                   </a:txBody>
-                  <a:tcPr anchor="ctr" marB="50800" marT="50800" marR="0" marL="0">
-                    <a:lnL algn="ctr" cmpd="sng" cap="flat" w="9525">
+                  <a:tcPr marL="0" marR="0" marT="50800" marB="50800" anchor="ctr">
+                    <a:lnL w="9525" cap="flat" cmpd="sng" algn="ctr">
                       <a:solidFill>
                         <a:srgbClr val="666666">
                           <a:alpha val="100000"/>
@@ -3958,7 +4100,7 @@
                       </a:solidFill>
                       <a:prstDash val="solid"/>
                     </a:lnL>
-                    <a:lnR algn="ctr" cmpd="sng" cap="flat" w="9525">
+                    <a:lnR w="9525" cap="flat" cmpd="sng" algn="ctr">
                       <a:solidFill>
                         <a:srgbClr val="666666">
                           <a:alpha val="100000"/>
@@ -3966,7 +4108,7 @@
                       </a:solidFill>
                       <a:prstDash val="solid"/>
                     </a:lnR>
-                    <a:lnT algn="ctr" cmpd="sng" cap="flat" w="9525">
+                    <a:lnT w="9525" cap="flat" cmpd="sng" algn="ctr">
                       <a:solidFill>
                         <a:srgbClr val="666666">
                           <a:alpha val="100000"/>
@@ -3974,7 +4116,7 @@
                       </a:solidFill>
                       <a:prstDash val="solid"/>
                     </a:lnT>
-                    <a:lnB algn="ctr" cmpd="sng" cap="flat" w="9525">
+                    <a:lnB w="9525" cap="flat" cmpd="sng" algn="ctr">
                       <a:solidFill>
                         <a:srgbClr val="666666">
                           <a:alpha val="100000"/>
@@ -3994,7 +4136,7 @@
                     <a:bodyPr/>
                     <a:lstStyle/>
                     <a:p>
-                      <a:pPr algn="l" marL="50800" marR="50800">
+                      <a:pPr marL="50800" marR="50800" algn="l">
                         <a:lnSpc>
                           <a:spcPct val="100000"/>
                         </a:lnSpc>
@@ -4007,7 +4149,7 @@
                         <a:buNone/>
                       </a:pPr>
                       <a:r>
-                        <a:rPr cap="none" sz="1100" i="0" b="0" u="none" strike="noStrike">
+                        <a:rPr sz="1100" b="0" i="0" u="none" strike="noStrike" cap="none">
                           <a:solidFill>
                             <a:srgbClr val="000000">
                               <a:alpha val="100000"/>
@@ -4015,15 +4157,14 @@
                           </a:solidFill>
                           <a:latin typeface="Helvetica"/>
                           <a:cs typeface="Helvetica"/>
-                          <a:ea typeface="Helvetica"/>
                           <a:sym typeface="Helvetica"/>
                         </a:rPr>
                         <a:t>planned (#62)</a:t>
                       </a:r>
                     </a:p>
                   </a:txBody>
-                  <a:tcPr anchor="ctr" marB="50800" marT="50800" marR="0" marL="0">
-                    <a:lnL algn="ctr" cmpd="sng" cap="flat" w="9525">
+                  <a:tcPr marL="0" marR="0" marT="50800" marB="50800" anchor="ctr">
+                    <a:lnL w="9525" cap="flat" cmpd="sng" algn="ctr">
                       <a:solidFill>
                         <a:srgbClr val="666666">
                           <a:alpha val="100000"/>
@@ -4031,7 +4172,7 @@
                       </a:solidFill>
                       <a:prstDash val="solid"/>
                     </a:lnL>
-                    <a:lnR algn="ctr" cmpd="sng" cap="flat" w="9525">
+                    <a:lnR w="9525" cap="flat" cmpd="sng" algn="ctr">
                       <a:solidFill>
                         <a:srgbClr val="666666">
                           <a:alpha val="100000"/>
@@ -4039,7 +4180,7 @@
                       </a:solidFill>
                       <a:prstDash val="solid"/>
                     </a:lnR>
-                    <a:lnT algn="ctr" cmpd="sng" cap="flat" w="9525">
+                    <a:lnT w="9525" cap="flat" cmpd="sng" algn="ctr">
                       <a:solidFill>
                         <a:srgbClr val="666666">
                           <a:alpha val="100000"/>
@@ -4047,7 +4188,7 @@
                       </a:solidFill>
                       <a:prstDash val="solid"/>
                     </a:lnT>
-                    <a:lnB algn="ctr" cmpd="sng" cap="flat" w="9525">
+                    <a:lnB w="9525" cap="flat" cmpd="sng" algn="ctr">
                       <a:solidFill>
                         <a:srgbClr val="666666">
                           <a:alpha val="100000"/>
@@ -4062,6 +4203,11 @@
                     </a:solidFill>
                   </a:tcPr>
                 </a:tc>
+                <a:extLst>
+                  <a:ext uri="{0D108BD9-81ED-4DB2-BD59-A6C34878D82A}">
+                    <a16:rowId xmlns:a16="http://schemas.microsoft.com/office/drawing/2014/main" val="10004"/>
+                  </a:ext>
+                </a:extLst>
               </a:tr>
               <a:tr h="357875">
                 <a:tc>
@@ -4069,7 +4215,7 @@
                     <a:bodyPr/>
                     <a:lstStyle/>
                     <a:p>
-                      <a:pPr algn="l" marL="50800" marR="50800">
+                      <a:pPr marL="50800" marR="50800" algn="l">
                         <a:lnSpc>
                           <a:spcPct val="100000"/>
                         </a:lnSpc>
@@ -4082,7 +4228,7 @@
                         <a:buNone/>
                       </a:pPr>
                       <a:r>
-                        <a:rPr cap="none" sz="1100" i="0" b="0" u="none" strike="noStrike">
+                        <a:rPr sz="1100" b="0" i="0" u="none" strike="noStrike" cap="none">
                           <a:solidFill>
                             <a:srgbClr val="000000">
                               <a:alpha val="100000"/>
@@ -4090,15 +4236,14 @@
                           </a:solidFill>
                           <a:latin typeface="Helvetica"/>
                           <a:cs typeface="Helvetica"/>
-                          <a:ea typeface="Helvetica"/>
                           <a:sym typeface="Helvetica"/>
                         </a:rPr>
                         <a:t>OBIS</a:t>
                       </a:r>
                     </a:p>
                   </a:txBody>
-                  <a:tcPr anchor="ctr" marB="50800" marT="50800" marR="0" marL="0">
-                    <a:lnL algn="ctr" cmpd="sng" cap="flat" w="9525">
+                  <a:tcPr marL="0" marR="0" marT="50800" marB="50800" anchor="ctr">
+                    <a:lnL w="9525" cap="flat" cmpd="sng" algn="ctr">
                       <a:solidFill>
                         <a:srgbClr val="666666">
                           <a:alpha val="100000"/>
@@ -4106,7 +4251,7 @@
                       </a:solidFill>
                       <a:prstDash val="solid"/>
                     </a:lnL>
-                    <a:lnR algn="ctr" cmpd="sng" cap="flat" w="9525">
+                    <a:lnR w="9525" cap="flat" cmpd="sng" algn="ctr">
                       <a:solidFill>
                         <a:srgbClr val="666666">
                           <a:alpha val="100000"/>
@@ -4114,7 +4259,7 @@
                       </a:solidFill>
                       <a:prstDash val="solid"/>
                     </a:lnR>
-                    <a:lnT algn="ctr" cmpd="sng" cap="flat" w="9525">
+                    <a:lnT w="9525" cap="flat" cmpd="sng" algn="ctr">
                       <a:solidFill>
                         <a:srgbClr val="666666">
                           <a:alpha val="100000"/>
@@ -4122,7 +4267,7 @@
                       </a:solidFill>
                       <a:prstDash val="solid"/>
                     </a:lnT>
-                    <a:lnB algn="ctr" cmpd="sng" cap="flat" w="9525">
+                    <a:lnB w="9525" cap="flat" cmpd="sng" algn="ctr">
                       <a:solidFill>
                         <a:srgbClr val="666666">
                           <a:alpha val="100000"/>
@@ -4142,7 +4287,7 @@
                     <a:bodyPr/>
                     <a:lstStyle/>
                     <a:p>
-                      <a:pPr algn="l" marL="50800" marR="50800">
+                      <a:pPr marL="50800" marR="50800" algn="l">
                         <a:lnSpc>
                           <a:spcPct val="100000"/>
                         </a:lnSpc>
@@ -4155,7 +4300,7 @@
                         <a:buNone/>
                       </a:pPr>
                       <a:r>
-                        <a:rPr cap="none" sz="1100" i="0" b="0" u="none" strike="noStrike">
+                        <a:rPr sz="1100" b="0" i="0" u="none" strike="noStrike" cap="none">
                           <a:solidFill>
                             <a:srgbClr val="000000">
                               <a:alpha val="100000"/>
@@ -4163,15 +4308,14 @@
                           </a:solidFill>
                           <a:latin typeface="Helvetica"/>
                           <a:cs typeface="Helvetica"/>
-                          <a:ea typeface="Helvetica"/>
                           <a:sym typeface="Helvetica"/>
                         </a:rPr>
                         <a:t>Seabirds &amp; Marine mammals</a:t>
                       </a:r>
                     </a:p>
                   </a:txBody>
-                  <a:tcPr anchor="ctr" marB="50800" marT="50800" marR="0" marL="0">
-                    <a:lnL algn="ctr" cmpd="sng" cap="flat" w="9525">
+                  <a:tcPr marL="0" marR="0" marT="50800" marB="50800" anchor="ctr">
+                    <a:lnL w="9525" cap="flat" cmpd="sng" algn="ctr">
                       <a:solidFill>
                         <a:srgbClr val="666666">
                           <a:alpha val="100000"/>
@@ -4179,7 +4323,7 @@
                       </a:solidFill>
                       <a:prstDash val="solid"/>
                     </a:lnL>
-                    <a:lnR algn="ctr" cmpd="sng" cap="flat" w="9525">
+                    <a:lnR w="9525" cap="flat" cmpd="sng" algn="ctr">
                       <a:solidFill>
                         <a:srgbClr val="666666">
                           <a:alpha val="100000"/>
@@ -4187,7 +4331,7 @@
                       </a:solidFill>
                       <a:prstDash val="solid"/>
                     </a:lnR>
-                    <a:lnT algn="ctr" cmpd="sng" cap="flat" w="9525">
+                    <a:lnT w="9525" cap="flat" cmpd="sng" algn="ctr">
                       <a:solidFill>
                         <a:srgbClr val="666666">
                           <a:alpha val="100000"/>
@@ -4195,7 +4339,7 @@
                       </a:solidFill>
                       <a:prstDash val="solid"/>
                     </a:lnT>
-                    <a:lnB algn="ctr" cmpd="sng" cap="flat" w="9525">
+                    <a:lnB w="9525" cap="flat" cmpd="sng" algn="ctr">
                       <a:solidFill>
                         <a:srgbClr val="666666">
                           <a:alpha val="100000"/>
@@ -4215,7 +4359,7 @@
                     <a:bodyPr/>
                     <a:lstStyle/>
                     <a:p>
-                      <a:pPr algn="l" marL="50800" marR="50800">
+                      <a:pPr marL="50800" marR="50800" algn="l">
                         <a:lnSpc>
                           <a:spcPct val="100000"/>
                         </a:lnSpc>
@@ -4228,7 +4372,7 @@
                         <a:buNone/>
                       </a:pPr>
                       <a:r>
-                        <a:rPr cap="none" sz="1100" i="0" b="0" u="none" strike="noStrike">
+                        <a:rPr sz="1100" b="0" i="0" u="none" strike="noStrike" cap="none">
                           <a:solidFill>
                             <a:srgbClr val="000000">
                               <a:alpha val="100000"/>
@@ -4236,15 +4380,14 @@
                           </a:solidFill>
                           <a:latin typeface="Helvetica"/>
                           <a:cs typeface="Helvetica"/>
-                          <a:ea typeface="Helvetica"/>
                           <a:sym typeface="Helvetica"/>
                         </a:rPr>
                         <a:t>planned (#43/#44)</a:t>
                       </a:r>
                     </a:p>
                   </a:txBody>
-                  <a:tcPr anchor="ctr" marB="50800" marT="50800" marR="0" marL="0">
-                    <a:lnL algn="ctr" cmpd="sng" cap="flat" w="9525">
+                  <a:tcPr marL="0" marR="0" marT="50800" marB="50800" anchor="ctr">
+                    <a:lnL w="9525" cap="flat" cmpd="sng" algn="ctr">
                       <a:solidFill>
                         <a:srgbClr val="666666">
                           <a:alpha val="100000"/>
@@ -4252,7 +4395,7 @@
                       </a:solidFill>
                       <a:prstDash val="solid"/>
                     </a:lnL>
-                    <a:lnR algn="ctr" cmpd="sng" cap="flat" w="9525">
+                    <a:lnR w="9525" cap="flat" cmpd="sng" algn="ctr">
                       <a:solidFill>
                         <a:srgbClr val="666666">
                           <a:alpha val="100000"/>
@@ -4260,7 +4403,7 @@
                       </a:solidFill>
                       <a:prstDash val="solid"/>
                     </a:lnR>
-                    <a:lnT algn="ctr" cmpd="sng" cap="flat" w="9525">
+                    <a:lnT w="9525" cap="flat" cmpd="sng" algn="ctr">
                       <a:solidFill>
                         <a:srgbClr val="666666">
                           <a:alpha val="100000"/>
@@ -4268,7 +4411,7 @@
                       </a:solidFill>
                       <a:prstDash val="solid"/>
                     </a:lnT>
-                    <a:lnB algn="ctr" cmpd="sng" cap="flat" w="9525">
+                    <a:lnB w="9525" cap="flat" cmpd="sng" algn="ctr">
                       <a:solidFill>
                         <a:srgbClr val="666666">
                           <a:alpha val="100000"/>
@@ -4283,6 +4426,11 @@
                     </a:solidFill>
                   </a:tcPr>
                 </a:tc>
+                <a:extLst>
+                  <a:ext uri="{0D108BD9-81ED-4DB2-BD59-A6C34878D82A}">
+                    <a16:rowId xmlns:a16="http://schemas.microsoft.com/office/drawing/2014/main" val="10005"/>
+                  </a:ext>
+                </a:extLst>
               </a:tr>
             </a:tbl>
           </a:graphicData>
@@ -4333,7 +4481,7 @@
           <a:bodyPr/>
           <a:lstStyle/>
           <a:p>
-            <a:pPr algn="l" marL="0" marR="0">
+            <a:pPr marL="0" marR="0" algn="l">
               <a:lnSpc>
                 <a:spcPct val="100000"/>
               </a:lnSpc>
@@ -4346,7 +4494,7 @@
               <a:buNone/>
             </a:pPr>
             <a:r>
-              <a:rPr cap="none" sz="2600" i="0" b="1" u="none" strike="noStrike">
+              <a:rPr sz="2600" b="1" i="0" u="none" strike="noStrike" cap="none">
                 <a:solidFill>
                   <a:srgbClr val="0A3D62">
                     <a:alpha val="100000"/>
@@ -4354,7 +4502,6 @@
                 </a:solidFill>
                 <a:latin typeface="Arial"/>
                 <a:cs typeface="Arial"/>
-                <a:ea typeface="Arial"/>
                 <a:sym typeface="Arial"/>
               </a:rPr>
               <a:t>Status vs. Statement of Work</a:t>
@@ -4382,7 +4529,7 @@
           <a:bodyPr/>
           <a:lstStyle/>
           <a:p>
-            <a:pPr algn="l" marL="0" marR="0">
+            <a:pPr marL="0" marR="0" algn="l">
               <a:lnSpc>
                 <a:spcPct val="100000"/>
               </a:lnSpc>
@@ -4395,7 +4542,7 @@
               <a:buNone/>
             </a:pPr>
             <a:r>
-              <a:rPr cap="none" sz="1600" i="0" b="0" u="none" strike="noStrike">
+              <a:rPr sz="1600" b="0" i="0" u="none" strike="noStrike" cap="none">
                 <a:solidFill>
                   <a:srgbClr val="222222">
                     <a:alpha val="100000"/>
@@ -4403,14 +4550,13 @@
                 </a:solidFill>
                 <a:latin typeface="Arial"/>
                 <a:cs typeface="Arial"/>
-                <a:ea typeface="Arial"/>
                 <a:sym typeface="Arial"/>
               </a:rPr>
               <a:t>✓ ALL must-complete INGESTS delivered: Bottle, Fish eggs &amp; larvae, Krill, CTD, Cephalopods, Phytoplankton, DIC, Phyllosoma.</a:t>
             </a:r>
           </a:p>
           <a:p>
-            <a:pPr algn="l" marL="0" marR="0">
+            <a:pPr marL="0" marR="0" algn="l">
               <a:lnSpc>
                 <a:spcPct val="100000"/>
               </a:lnSpc>
@@ -4423,7 +4569,7 @@
               <a:buNone/>
             </a:pPr>
             <a:r>
-              <a:rPr cap="none" sz="1600" i="0" b="0" u="none" strike="noStrike">
+              <a:rPr sz="1600" b="0" i="0" u="none" strike="noStrike" cap="none">
                 <a:solidFill>
                   <a:srgbClr val="222222">
                     <a:alpha val="100000"/>
@@ -4431,14 +4577,13 @@
                 </a:solidFill>
                 <a:latin typeface="Arial"/>
                 <a:cs typeface="Arial"/>
-                <a:ea typeface="Arial"/>
                 <a:sym typeface="Arial"/>
               </a:rPr>
               <a:t>✓ Must-complete SHARE delivered: CTD &amp; Bottle → ERDDAP, Fish eggs &amp; larvae → OBIS, DIC → ERDDAP.</a:t>
             </a:r>
           </a:p>
           <a:p>
-            <a:pPr algn="l" marL="0" marR="0">
+            <a:pPr marL="0" marR="0" algn="l">
               <a:lnSpc>
                 <a:spcPct val="100000"/>
               </a:lnSpc>
@@ -4451,7 +4596,7 @@
               <a:buNone/>
             </a:pPr>
             <a:r>
-              <a:rPr cap="none" sz="1600" i="0" b="0" u="none" strike="noStrike">
+              <a:rPr sz="1600" b="0" i="0" u="none" strike="noStrike" cap="none">
                 <a:solidFill>
                   <a:srgbClr val="222222">
                     <a:alpha val="100000"/>
@@ -4459,14 +4604,13 @@
                 </a:solidFill>
                 <a:latin typeface="Arial"/>
                 <a:cs typeface="Arial"/>
-                <a:ea typeface="Arial"/>
                 <a:sym typeface="Arial"/>
               </a:rPr>
               <a:t>✓ Integrated database versioned &amp; reproducible (frozen DuckLake, v2026.06.08).</a:t>
             </a:r>
           </a:p>
           <a:p>
-            <a:pPr algn="l" marL="0" marR="0">
+            <a:pPr marL="0" marR="0" algn="l">
               <a:lnSpc>
                 <a:spcPct val="100000"/>
               </a:lnSpc>
@@ -4479,7 +4623,7 @@
               <a:buNone/>
             </a:pPr>
             <a:r>
-              <a:rPr cap="none" sz="1600" i="0" b="0" u="none" strike="noStrike">
+              <a:rPr sz="1600" b="0" i="0" u="none" strike="noStrike" cap="none">
                 <a:solidFill>
                   <a:srgbClr val="222222">
                     <a:alpha val="100000"/>
@@ -4487,14 +4631,13 @@
                 </a:solidFill>
                 <a:latin typeface="Arial"/>
                 <a:cs typeface="Arial"/>
-                <a:ea typeface="Arial"/>
                 <a:sym typeface="Arial"/>
               </a:rPr>
               <a:t>◑ Remaining ingest: ZooDb &amp; ZooScan (blocked on Ohman/DataZoo portal export), PRODO, acoustic mammals.</a:t>
             </a:r>
           </a:p>
           <a:p>
-            <a:pPr algn="l" marL="0" marR="0">
+            <a:pPr marL="0" marR="0" algn="l">
               <a:lnSpc>
                 <a:spcPct val="100000"/>
               </a:lnSpc>
@@ -4507,7 +4650,7 @@
               <a:buNone/>
             </a:pPr>
             <a:r>
-              <a:rPr cap="none" sz="1600" i="0" b="0" u="none" strike="noStrike">
+              <a:rPr sz="1600" b="0" i="0" u="none" strike="noStrike" cap="none">
                 <a:solidFill>
                   <a:srgbClr val="222222">
                     <a:alpha val="100000"/>
@@ -4515,7 +4658,6 @@
                 </a:solidFill>
                 <a:latin typeface="Arial"/>
                 <a:cs typeface="Arial"/>
-                <a:ea typeface="Arial"/>
                 <a:sym typeface="Arial"/>
               </a:rPr>
               <a:t>◑ Remaining share: seabirds/mammals → OBIS, zooplankton/phytoplankton → EDI, underway MET → ERDDAP.</a:t>
@@ -4568,7 +4710,7 @@
           <a:bodyPr/>
           <a:lstStyle/>
           <a:p>
-            <a:pPr algn="l" marL="0" marR="0">
+            <a:pPr marL="0" marR="0" algn="l">
               <a:lnSpc>
                 <a:spcPct val="100000"/>
               </a:lnSpc>
@@ -4581,7 +4723,7 @@
               <a:buNone/>
             </a:pPr>
             <a:r>
-              <a:rPr cap="none" sz="2600" i="0" b="1" u="none" strike="noStrike">
+              <a:rPr sz="2600" b="1" i="0" u="none" strike="noStrike" cap="none">
                 <a:solidFill>
                   <a:srgbClr val="0A3D62">
                     <a:alpha val="100000"/>
@@ -4589,7 +4731,6 @@
                 </a:solidFill>
                 <a:latin typeface="Arial"/>
                 <a:cs typeface="Arial"/>
-                <a:ea typeface="Arial"/>
                 <a:sym typeface="Arial"/>
               </a:rPr>
               <a:t>What's next</a:t>
@@ -4617,7 +4758,7 @@
           <a:bodyPr/>
           <a:lstStyle/>
           <a:p>
-            <a:pPr algn="l" marL="0" marR="0">
+            <a:pPr marL="0" marR="0" algn="l">
               <a:lnSpc>
                 <a:spcPct val="100000"/>
               </a:lnSpc>
@@ -4630,7 +4771,7 @@
               <a:buNone/>
             </a:pPr>
             <a:r>
-              <a:rPr cap="none" sz="1600" i="0" b="0" u="none" strike="noStrike">
+              <a:rPr sz="1600" b="0" i="0" u="none" strike="noStrike" cap="none">
                 <a:solidFill>
                   <a:srgbClr val="222222">
                     <a:alpha val="100000"/>
@@ -4638,14 +4779,13 @@
                 </a:solidFill>
                 <a:latin typeface="Arial"/>
                 <a:cs typeface="Arial"/>
-                <a:ea typeface="Arial"/>
                 <a:sym typeface="Arial"/>
               </a:rPr>
               <a:t>Unblock ZooDb / ZooScan via an Ohman-lab / DataZoo data export (the one external dependency).</a:t>
             </a:r>
           </a:p>
           <a:p>
-            <a:pPr algn="l" marL="0" marR="0">
+            <a:pPr marL="0" marR="0" algn="l">
               <a:lnSpc>
                 <a:spcPct val="100000"/>
               </a:lnSpc>
@@ -4658,7 +4798,7 @@
               <a:buNone/>
             </a:pPr>
             <a:r>
-              <a:rPr cap="none" sz="1600" i="0" b="0" u="none" strike="noStrike">
+              <a:rPr sz="1600" b="0" i="0" u="none" strike="noStrike" cap="none">
                 <a:solidFill>
                   <a:srgbClr val="222222">
                     <a:alpha val="100000"/>
@@ -4666,14 +4806,13 @@
                 </a:solidFill>
                 <a:latin typeface="Arial"/>
                 <a:cs typeface="Arial"/>
-                <a:ea typeface="Arial"/>
                 <a:sym typeface="Arial"/>
               </a:rPr>
               <a:t>Finish the publish side: seabird &amp; mammal → OBIS, zooplankton &amp; phytoplankton → EDI, underway MET → ERDDAP.</a:t>
             </a:r>
           </a:p>
           <a:p>
-            <a:pPr algn="l" marL="0" marR="0">
+            <a:pPr marL="0" marR="0" algn="l">
               <a:lnSpc>
                 <a:spcPct val="100000"/>
               </a:lnSpc>
@@ -4686,7 +4825,7 @@
               <a:buNone/>
             </a:pPr>
             <a:r>
-              <a:rPr cap="none" sz="1600" i="0" b="0" u="none" strike="noStrike">
+              <a:rPr sz="1600" b="0" i="0" u="none" strike="noStrike" cap="none">
                 <a:solidFill>
                   <a:srgbClr val="222222">
                     <a:alpha val="100000"/>
@@ -4694,14 +4833,13 @@
                 </a:solidFill>
                 <a:latin typeface="Arial"/>
                 <a:cs typeface="Arial"/>
-                <a:ea typeface="Arial"/>
                 <a:sym typeface="Arial"/>
               </a:rPr>
               <a:t>Bring calcofi_ctd fully live on ERDDAP (944 MB ctd_wide).</a:t>
             </a:r>
           </a:p>
           <a:p>
-            <a:pPr algn="l" marL="0" marR="0">
+            <a:pPr marL="0" marR="0" algn="l">
               <a:lnSpc>
                 <a:spcPct val="100000"/>
               </a:lnSpc>
@@ -4714,7 +4852,7 @@
               <a:buNone/>
             </a:pPr>
             <a:r>
-              <a:rPr cap="none" sz="1600" i="0" b="0" u="none" strike="noStrike">
+              <a:rPr sz="1600" b="0" i="0" u="none" strike="noStrike" cap="none">
                 <a:solidFill>
                   <a:srgbClr val="222222">
                     <a:alpha val="100000"/>
@@ -4722,14 +4860,13 @@
                 </a:solidFill>
                 <a:latin typeface="Arial"/>
                 <a:cs typeface="Arial"/>
-                <a:ea typeface="Arial"/>
                 <a:sym typeface="Arial"/>
               </a:rPr>
               <a:t>Expand H3 hexagon summaries across the newly ingested datasets in the integrated app.</a:t>
             </a:r>
           </a:p>
           <a:p>
-            <a:pPr algn="l" marL="0" marR="0">
+            <a:pPr marL="0" marR="0" algn="l">
               <a:lnSpc>
                 <a:spcPct val="100000"/>
               </a:lnSpc>
@@ -4742,7 +4879,7 @@
               <a:buNone/>
             </a:pPr>
             <a:r>
-              <a:rPr cap="none" sz="1600" i="0" b="0" u="none" strike="noStrike">
+              <a:rPr sz="1600" b="0" i="0" u="none" strike="noStrike" cap="none">
                 <a:solidFill>
                   <a:srgbClr val="222222">
                     <a:alpha val="100000"/>
@@ -4750,7 +4887,6 @@
                 </a:solidFill>
                 <a:latin typeface="Arial"/>
                 <a:cs typeface="Arial"/>
-                <a:ea typeface="Arial"/>
                 <a:sym typeface="Arial"/>
               </a:rPr>
               <a:t>Deliver the live, recorded webinar series — a CalCOFI.io product showcase (this deck is the starting point).</a:t>
@@ -4803,7 +4939,7 @@
           <a:bodyPr/>
           <a:lstStyle/>
           <a:p>
-            <a:pPr algn="l" marL="0" marR="0">
+            <a:pPr marL="0" marR="0" algn="l">
               <a:lnSpc>
                 <a:spcPct val="100000"/>
               </a:lnSpc>
@@ -4816,7 +4952,7 @@
               <a:buNone/>
             </a:pPr>
             <a:r>
-              <a:rPr cap="none" sz="2800" i="0" b="1" u="none" strike="noStrike">
+              <a:rPr sz="2800" b="1" i="0" u="none" strike="noStrike" cap="none">
                 <a:solidFill>
                   <a:srgbClr val="0A3D62">
                     <a:alpha val="100000"/>
@@ -4824,7 +4960,6 @@
                 </a:solidFill>
                 <a:latin typeface="Arial"/>
                 <a:cs typeface="Arial"/>
-                <a:ea typeface="Arial"/>
                 <a:sym typeface="Arial"/>
               </a:rPr>
               <a:t>From 11 raw sources to one living, versioned, served database.</a:t>
@@ -4852,7 +4987,7 @@
           <a:bodyPr/>
           <a:lstStyle/>
           <a:p>
-            <a:pPr algn="l" marL="0" marR="0">
+            <a:pPr marL="0" marR="0" algn="l">
               <a:lnSpc>
                 <a:spcPct val="100000"/>
               </a:lnSpc>
@@ -4865,7 +5000,7 @@
               <a:buNone/>
             </a:pPr>
             <a:r>
-              <a:rPr cap="none" sz="1500" i="0" b="0" u="none" strike="noStrike">
+              <a:rPr sz="1500" b="0" i="0" u="none" strike="noStrike" cap="none">
                 <a:solidFill>
                   <a:srgbClr val="1B7B7B">
                     <a:alpha val="100000"/>
@@ -4873,7 +5008,6 @@
                 </a:solidFill>
                 <a:latin typeface="Arial"/>
                 <a:cs typeface="Arial"/>
-                <a:ea typeface="Arial"/>
                 <a:sym typeface="Arial"/>
               </a:rPr>
               <a:t>Ben Best · Ocean Metrics LLC · ben@oceanmetrics.io · calcofi.io</a:t>
@@ -4926,7 +5060,7 @@
           <a:bodyPr/>
           <a:lstStyle/>
           <a:p>
-            <a:pPr algn="l" marL="0" marR="0">
+            <a:pPr marL="0" marR="0" algn="l">
               <a:lnSpc>
                 <a:spcPct val="100000"/>
               </a:lnSpc>
@@ -4939,7 +5073,7 @@
               <a:buNone/>
             </a:pPr>
             <a:r>
-              <a:rPr cap="none" sz="2600" i="0" b="1" u="none" strike="noStrike">
+              <a:rPr sz="2600" b="1" i="0" u="none" strike="noStrike" cap="none">
                 <a:solidFill>
                   <a:srgbClr val="0A3D62">
                     <a:alpha val="100000"/>
@@ -4947,7 +5081,6 @@
                 </a:solidFill>
                 <a:latin typeface="Arial"/>
                 <a:cs typeface="Arial"/>
-                <a:ea typeface="Arial"/>
                 <a:sym typeface="Arial"/>
               </a:rPr>
               <a:t>The Vision</a:t>
@@ -4975,7 +5108,7 @@
           <a:bodyPr/>
           <a:lstStyle/>
           <a:p>
-            <a:pPr algn="l" marL="0" marR="0">
+            <a:pPr marL="0" marR="0" algn="l">
               <a:lnSpc>
                 <a:spcPct val="100000"/>
               </a:lnSpc>
@@ -4988,7 +5121,7 @@
               <a:buNone/>
             </a:pPr>
             <a:r>
-              <a:rPr cap="none" sz="1600" i="0" b="0" u="none" strike="noStrike">
+              <a:rPr sz="1600" b="0" i="0" u="none" strike="noStrike" cap="none">
                 <a:solidFill>
                   <a:srgbClr val="222222">
                     <a:alpha val="100000"/>
@@ -4996,14 +5129,13 @@
                 </a:solidFill>
                 <a:latin typeface="Arial"/>
                 <a:cs typeface="Arial"/>
-                <a:ea typeface="Arial"/>
                 <a:sym typeface="Arial"/>
               </a:rPr>
               <a:t>Maximize the value of CalCOFI data within the SCCOOS / IOOS ocean-observing ecosystem.</a:t>
             </a:r>
           </a:p>
           <a:p>
-            <a:pPr algn="l" marL="0" marR="0">
+            <a:pPr marL="0" marR="0" algn="l">
               <a:lnSpc>
                 <a:spcPct val="100000"/>
               </a:lnSpc>
@@ -5016,7 +5148,7 @@
               <a:buNone/>
             </a:pPr>
             <a:r>
-              <a:rPr cap="none" sz="1600" i="0" b="0" u="none" strike="noStrike">
+              <a:rPr sz="1600" b="0" i="0" u="none" strike="noStrike" cap="none">
                 <a:solidFill>
                   <a:srgbClr val="222222">
                     <a:alpha val="100000"/>
@@ -5024,14 +5156,13 @@
                 </a:solidFill>
                 <a:latin typeface="Arial"/>
                 <a:cs typeface="Arial"/>
-                <a:ea typeface="Arial"/>
                 <a:sym typeface="Arial"/>
               </a:rPr>
               <a:t>1)  Increase accessibility &amp; transparency across CalCOFI data constituents.</a:t>
             </a:r>
           </a:p>
           <a:p>
-            <a:pPr algn="l" marL="0" marR="0">
+            <a:pPr marL="0" marR="0" algn="l">
               <a:lnSpc>
                 <a:spcPct val="100000"/>
               </a:lnSpc>
@@ -5044,7 +5175,7 @@
               <a:buNone/>
             </a:pPr>
             <a:r>
-              <a:rPr cap="none" sz="1600" i="0" b="0" u="none" strike="noStrike">
+              <a:rPr sz="1600" b="0" i="0" u="none" strike="noStrike" cap="none">
                 <a:solidFill>
                   <a:srgbClr val="222222">
                     <a:alpha val="100000"/>
@@ -5052,14 +5183,13 @@
                 </a:solidFill>
                 <a:latin typeface="Arial"/>
                 <a:cs typeface="Arial"/>
-                <a:ea typeface="Arial"/>
                 <a:sym typeface="Arial"/>
               </a:rPr>
               <a:t>2)  Accelerate adoption across California ocean-management entities.</a:t>
             </a:r>
           </a:p>
           <a:p>
-            <a:pPr algn="l" marL="0" marR="0">
+            <a:pPr marL="0" marR="0" algn="l">
               <a:lnSpc>
                 <a:spcPct val="100000"/>
               </a:lnSpc>
@@ -5072,7 +5202,7 @@
               <a:buNone/>
             </a:pPr>
             <a:r>
-              <a:rPr cap="none" sz="1600" i="0" b="0" u="none" strike="noStrike">
+              <a:rPr sz="1600" b="0" i="0" u="none" strike="noStrike" cap="none">
                 <a:solidFill>
                   <a:srgbClr val="222222">
                     <a:alpha val="100000"/>
@@ -5080,14 +5210,13 @@
                 </a:solidFill>
                 <a:latin typeface="Arial"/>
                 <a:cs typeface="Arial"/>
-                <a:ea typeface="Arial"/>
                 <a:sym typeface="Arial"/>
               </a:rPr>
               <a:t>3)  Strengthen integration with the network of CA ocean-observation programs.</a:t>
             </a:r>
           </a:p>
           <a:p>
-            <a:pPr algn="l" marL="0" marR="0">
+            <a:pPr marL="0" marR="0" algn="l">
               <a:lnSpc>
                 <a:spcPct val="100000"/>
               </a:lnSpc>
@@ -5100,7 +5229,7 @@
               <a:buNone/>
             </a:pPr>
             <a:r>
-              <a:rPr cap="none" sz="1600" i="0" b="0" u="none" strike="noStrike">
+              <a:rPr sz="1600" b="0" i="0" u="none" strike="noStrike" cap="none">
                 <a:solidFill>
                   <a:srgbClr val="222222">
                     <a:alpha val="100000"/>
@@ -5108,14 +5237,13 @@
                 </a:solidFill>
                 <a:latin typeface="Arial"/>
                 <a:cs typeface="Arial"/>
-                <a:ea typeface="Arial"/>
                 <a:sym typeface="Arial"/>
               </a:rPr>
               <a:t>Three components of work:  ① INGEST  →  ② VISUALIZE  →  ③ SHARE.</a:t>
             </a:r>
           </a:p>
           <a:p>
-            <a:pPr algn="l" marL="0" marR="0">
+            <a:pPr marL="0" marR="0" algn="l">
               <a:lnSpc>
                 <a:spcPct val="100000"/>
               </a:lnSpc>
@@ -5128,7 +5256,7 @@
               <a:buNone/>
             </a:pPr>
             <a:r>
-              <a:rPr cap="none" sz="1600" i="0" b="0" u="none" strike="noStrike">
+              <a:rPr sz="1600" b="0" i="0" u="none" strike="noStrike" cap="none">
                 <a:solidFill>
                   <a:srgbClr val="222222">
                     <a:alpha val="100000"/>
@@ -5136,7 +5264,6 @@
                 </a:solidFill>
                 <a:latin typeface="Arial"/>
                 <a:cs typeface="Arial"/>
-                <a:ea typeface="Arial"/>
                 <a:sym typeface="Arial"/>
               </a:rPr>
               <a:t>Built on open standards: Parquet + DuckDB + reproducible notebooks — the same stack as GBIF &amp; OBIS.</a:t>
@@ -5189,7 +5316,7 @@
           <a:bodyPr/>
           <a:lstStyle/>
           <a:p>
-            <a:pPr algn="l" marL="0" marR="0">
+            <a:pPr marL="0" marR="0" algn="l">
               <a:lnSpc>
                 <a:spcPct val="100000"/>
               </a:lnSpc>
@@ -5202,7 +5329,7 @@
               <a:buNone/>
             </a:pPr>
             <a:r>
-              <a:rPr cap="none" sz="2600" i="0" b="1" u="none" strike="noStrike">
+              <a:rPr sz="2600" b="1" i="0" u="none" strike="noStrike" cap="none">
                 <a:solidFill>
                   <a:srgbClr val="0A3D62">
                     <a:alpha val="100000"/>
@@ -5210,7 +5337,6 @@
                 </a:solidFill>
                 <a:latin typeface="Arial"/>
                 <a:cs typeface="Arial"/>
-                <a:ea typeface="Arial"/>
                 <a:sym typeface="Arial"/>
               </a:rPr>
               <a:t>Pipeline &amp; Architecture</a:t>
@@ -5238,7 +5364,7 @@
           <a:bodyPr/>
           <a:lstStyle/>
           <a:p>
-            <a:pPr algn="l" marL="0" marR="0">
+            <a:pPr marL="0" marR="0" algn="l">
               <a:lnSpc>
                 <a:spcPct val="100000"/>
               </a:lnSpc>
@@ -5251,7 +5377,7 @@
               <a:buNone/>
             </a:pPr>
             <a:r>
-              <a:rPr cap="none" sz="1600" i="0" b="0" u="none" strike="noStrike">
+              <a:rPr sz="1600" b="0" i="0" u="none" strike="noStrike" cap="none">
                 <a:solidFill>
                   <a:srgbClr val="222222">
                     <a:alpha val="100000"/>
@@ -5259,14 +5385,13 @@
                 </a:solidFill>
                 <a:latin typeface="Arial"/>
                 <a:cs typeface="Arial"/>
-                <a:ea typeface="Arial"/>
                 <a:sym typeface="Arial"/>
               </a:rPr>
               <a:t>Source files (CSV/XLSX) curated in Google Drive  →  long-term archive in Google Cloud Storage (rclone).</a:t>
             </a:r>
           </a:p>
           <a:p>
-            <a:pPr algn="l" marL="0" marR="0">
+            <a:pPr marL="0" marR="0" algn="l">
               <a:lnSpc>
                 <a:spcPct val="100000"/>
               </a:lnSpc>
@@ -5279,7 +5404,7 @@
               <a:buNone/>
             </a:pPr>
             <a:r>
-              <a:rPr cap="none" sz="1600" i="0" b="0" u="none" strike="noStrike">
+              <a:rPr sz="1600" b="0" i="0" u="none" strike="noStrike" cap="none">
                 <a:solidFill>
                   <a:srgbClr val="222222">
                     <a:alpha val="100000"/>
@@ -5287,14 +5412,13 @@
                 </a:solidFill>
                 <a:latin typeface="Arial"/>
                 <a:cs typeface="Arial"/>
-                <a:ea typeface="Arial"/>
                 <a:sym typeface="Arial"/>
               </a:rPr>
               <a:t>calcofi4db ingest notebooks (Quarto) normalize each dataset to a shared schema with referential integrity.</a:t>
             </a:r>
           </a:p>
           <a:p>
-            <a:pPr algn="l" marL="0" marR="0">
+            <a:pPr marL="0" marR="0" algn="l">
               <a:lnSpc>
                 <a:spcPct val="100000"/>
               </a:lnSpc>
@@ -5307,7 +5431,7 @@
               <a:buNone/>
             </a:pPr>
             <a:r>
-              <a:rPr cap="none" sz="1600" i="0" b="0" u="none" strike="noStrike">
+              <a:rPr sz="1600" b="0" i="0" u="none" strike="noStrike" cap="none">
                 <a:solidFill>
                   <a:srgbClr val="222222">
                     <a:alpha val="100000"/>
@@ -5315,14 +5439,13 @@
                 </a:solidFill>
                 <a:latin typeface="Arial"/>
                 <a:cs typeface="Arial"/>
-                <a:ea typeface="Arial"/>
                 <a:sym typeface="Arial"/>
               </a:rPr>
               <a:t>Versioned, frozen DuckLake: Parquet on GCS + reproducible recreation from source + a changelog.</a:t>
             </a:r>
           </a:p>
           <a:p>
-            <a:pPr algn="l" marL="0" marR="0">
+            <a:pPr marL="0" marR="0" algn="l">
               <a:lnSpc>
                 <a:spcPct val="100000"/>
               </a:lnSpc>
@@ -5335,7 +5458,7 @@
               <a:buNone/>
             </a:pPr>
             <a:r>
-              <a:rPr cap="none" sz="1600" i="0" b="0" u="none" strike="noStrike">
+              <a:rPr sz="1600" b="0" i="0" u="none" strike="noStrike" cap="none">
                 <a:solidFill>
                   <a:srgbClr val="222222">
                     <a:alpha val="100000"/>
@@ -5343,14 +5466,13 @@
                 </a:solidFill>
                 <a:latin typeface="Arial"/>
                 <a:cs typeface="Arial"/>
-                <a:ea typeface="Arial"/>
                 <a:sym typeface="Arial"/>
               </a:rPr>
               <a:t>One release fans out to portals — ERDDAP, OBIS, EDI — and to apps + an interactive schema site.</a:t>
             </a:r>
           </a:p>
           <a:p>
-            <a:pPr algn="l" marL="0" marR="0">
+            <a:pPr marL="0" marR="0" algn="l">
               <a:lnSpc>
                 <a:spcPct val="100000"/>
               </a:lnSpc>
@@ -5363,7 +5485,7 @@
               <a:buNone/>
             </a:pPr>
             <a:r>
-              <a:rPr cap="none" sz="1600" i="0" b="0" u="none" strike="noStrike">
+              <a:rPr sz="1600" b="0" i="0" u="none" strike="noStrike" cap="none">
                 <a:solidFill>
                   <a:srgbClr val="222222">
                     <a:alpha val="100000"/>
@@ -5371,7 +5493,6 @@
                 </a:solidFill>
                 <a:latin typeface="Arial"/>
                 <a:cs typeface="Arial"/>
-                <a:ea typeface="Arial"/>
                 <a:sym typeface="Arial"/>
               </a:rPr>
               <a:t>Self-tracking, AI-assisted loop: explore → generate-metadata → ingest → validate → publish (Claude Code skills).</a:t>
@@ -5424,7 +5545,7 @@
           <a:bodyPr/>
           <a:lstStyle/>
           <a:p>
-            <a:pPr algn="l" marL="0" marR="0">
+            <a:pPr marL="0" marR="0" algn="l">
               <a:lnSpc>
                 <a:spcPct val="100000"/>
               </a:lnSpc>
@@ -5437,7 +5558,7 @@
               <a:buNone/>
             </a:pPr>
             <a:r>
-              <a:rPr cap="none" sz="2600" i="0" b="1" u="none" strike="noStrike">
+              <a:rPr sz="2600" b="1" i="0" u="none" strike="noStrike" cap="none">
                 <a:solidFill>
                   <a:srgbClr val="0A3D62">
                     <a:alpha val="100000"/>
@@ -5445,7 +5566,6 @@
                 </a:solidFill>
                 <a:latin typeface="Arial"/>
                 <a:cs typeface="Arial"/>
-                <a:ea typeface="Arial"/>
                 <a:sym typeface="Arial"/>
               </a:rPr>
               <a:t>Release v2026.06.08 — by the numbers</a:t>
@@ -5457,21 +5577,33 @@
         <p:nvGraphicFramePr>
           <p:cNvPr id="3" name="Content Placeholder 2"/>
           <p:cNvGraphicFramePr>
-            <a:graphicFrameLocks noGrp="true"/>
+            <a:graphicFrameLocks noGrp="1"/>
           </p:cNvGraphicFramePr>
           <p:nvPr/>
         </p:nvGraphicFramePr>
-        <p:xfrm rot="0">
+        <p:xfrm>
           <a:off x="457200" y="1600200"/>
-          <a:ext cx="8229600" cy="4525963"/>
+          <a:ext cx="4607433" cy="2781575"/>
         </p:xfrm>
         <a:graphic>
           <a:graphicData uri="http://schemas.openxmlformats.org/drawingml/2006/table">
             <a:tbl>
               <a:tblPr/>
               <a:tblGrid>
-                <a:gridCol w="2361834"/>
-                <a:gridCol w="2245599"/>
+                <a:gridCol w="2361834">
+                  <a:extLst>
+                    <a:ext uri="{9D8B030D-6E8A-4147-A177-3AD203B41FA5}">
+                      <a16:colId xmlns:a16="http://schemas.microsoft.com/office/drawing/2014/main" val="20000"/>
+                    </a:ext>
+                  </a:extLst>
+                </a:gridCol>
+                <a:gridCol w="2245599">
+                  <a:extLst>
+                    <a:ext uri="{9D8B030D-6E8A-4147-A177-3AD203B41FA5}">
+                      <a16:colId xmlns:a16="http://schemas.microsoft.com/office/drawing/2014/main" val="20001"/>
+                    </a:ext>
+                  </a:extLst>
+                </a:gridCol>
               </a:tblGrid>
               <a:tr h="340090">
                 <a:tc>
@@ -5479,7 +5611,7 @@
                     <a:bodyPr/>
                     <a:lstStyle/>
                     <a:p>
-                      <a:pPr algn="l" marL="50800" marR="50800">
+                      <a:pPr marL="50800" marR="50800" algn="l">
                         <a:lnSpc>
                           <a:spcPct val="100000"/>
                         </a:lnSpc>
@@ -5492,7 +5624,7 @@
                         <a:buNone/>
                       </a:pPr>
                       <a:r>
-                        <a:rPr cap="none" sz="1200" i="0" b="1" u="none" strike="noStrike">
+                        <a:rPr sz="1200" b="1" i="0" u="none" strike="noStrike" cap="none">
                           <a:solidFill>
                             <a:srgbClr val="FFFFFF">
                               <a:alpha val="100000"/>
@@ -5500,15 +5632,14 @@
                           </a:solidFill>
                           <a:latin typeface="Helvetica"/>
                           <a:cs typeface="Helvetica"/>
-                          <a:ea typeface="Helvetica"/>
                           <a:sym typeface="Helvetica"/>
                         </a:rPr>
                         <a:t>Metric</a:t>
                       </a:r>
                     </a:p>
                   </a:txBody>
-                  <a:tcPr anchor="ctr" marB="50800" marT="50800" marR="0" marL="0">
-                    <a:lnL algn="ctr" cmpd="sng" cap="flat" w="9525">
+                  <a:tcPr marL="0" marR="0" marT="50800" marB="50800" anchor="ctr">
+                    <a:lnL w="9525" cap="flat" cmpd="sng" algn="ctr">
                       <a:solidFill>
                         <a:srgbClr val="666666">
                           <a:alpha val="100000"/>
@@ -5516,7 +5647,7 @@
                       </a:solidFill>
                       <a:prstDash val="solid"/>
                     </a:lnL>
-                    <a:lnR algn="ctr" cmpd="sng" cap="flat" w="9525">
+                    <a:lnR w="9525" cap="flat" cmpd="sng" algn="ctr">
                       <a:solidFill>
                         <a:srgbClr val="666666">
                           <a:alpha val="100000"/>
@@ -5524,7 +5655,7 @@
                       </a:solidFill>
                       <a:prstDash val="solid"/>
                     </a:lnR>
-                    <a:lnT algn="ctr" cmpd="sng" cap="flat" w="9525">
+                    <a:lnT w="9525" cap="flat" cmpd="sng" algn="ctr">
                       <a:solidFill>
                         <a:srgbClr val="666666">
                           <a:alpha val="100000"/>
@@ -5532,7 +5663,7 @@
                       </a:solidFill>
                       <a:prstDash val="solid"/>
                     </a:lnT>
-                    <a:lnB algn="ctr" cmpd="sng" cap="flat" w="9525">
+                    <a:lnB w="9525" cap="flat" cmpd="sng" algn="ctr">
                       <a:solidFill>
                         <a:srgbClr val="666666">
                           <a:alpha val="100000"/>
@@ -5552,7 +5683,7 @@
                     <a:bodyPr/>
                     <a:lstStyle/>
                     <a:p>
-                      <a:pPr algn="l" marL="50800" marR="50800">
+                      <a:pPr marL="50800" marR="50800" algn="l">
                         <a:lnSpc>
                           <a:spcPct val="100000"/>
                         </a:lnSpc>
@@ -5565,7 +5696,7 @@
                         <a:buNone/>
                       </a:pPr>
                       <a:r>
-                        <a:rPr cap="none" sz="1200" i="0" b="1" u="none" strike="noStrike">
+                        <a:rPr sz="1200" b="1" i="0" u="none" strike="noStrike" cap="none">
                           <a:solidFill>
                             <a:srgbClr val="FFFFFF">
                               <a:alpha val="100000"/>
@@ -5573,15 +5704,14 @@
                           </a:solidFill>
                           <a:latin typeface="Helvetica"/>
                           <a:cs typeface="Helvetica"/>
-                          <a:ea typeface="Helvetica"/>
                           <a:sym typeface="Helvetica"/>
                         </a:rPr>
                         <a:t>Value</a:t>
                       </a:r>
                     </a:p>
                   </a:txBody>
-                  <a:tcPr anchor="ctr" marB="50800" marT="50800" marR="0" marL="0">
-                    <a:lnL algn="ctr" cmpd="sng" cap="flat" w="9525">
+                  <a:tcPr marL="0" marR="0" marT="50800" marB="50800" anchor="ctr">
+                    <a:lnL w="9525" cap="flat" cmpd="sng" algn="ctr">
                       <a:solidFill>
                         <a:srgbClr val="666666">
                           <a:alpha val="100000"/>
@@ -5589,7 +5719,7 @@
                       </a:solidFill>
                       <a:prstDash val="solid"/>
                     </a:lnL>
-                    <a:lnR algn="ctr" cmpd="sng" cap="flat" w="9525">
+                    <a:lnR w="9525" cap="flat" cmpd="sng" algn="ctr">
                       <a:solidFill>
                         <a:srgbClr val="666666">
                           <a:alpha val="100000"/>
@@ -5597,7 +5727,7 @@
                       </a:solidFill>
                       <a:prstDash val="solid"/>
                     </a:lnR>
-                    <a:lnT algn="ctr" cmpd="sng" cap="flat" w="9525">
+                    <a:lnT w="9525" cap="flat" cmpd="sng" algn="ctr">
                       <a:solidFill>
                         <a:srgbClr val="666666">
                           <a:alpha val="100000"/>
@@ -5605,7 +5735,7 @@
                       </a:solidFill>
                       <a:prstDash val="solid"/>
                     </a:lnT>
-                    <a:lnB algn="ctr" cmpd="sng" cap="flat" w="9525">
+                    <a:lnB w="9525" cap="flat" cmpd="sng" algn="ctr">
                       <a:solidFill>
                         <a:srgbClr val="666666">
                           <a:alpha val="100000"/>
@@ -5620,6 +5750,11 @@
                     </a:solidFill>
                   </a:tcPr>
                 </a:tc>
+                <a:extLst>
+                  <a:ext uri="{0D108BD9-81ED-4DB2-BD59-A6C34878D82A}">
+                    <a16:rowId xmlns:a16="http://schemas.microsoft.com/office/drawing/2014/main" val="10000"/>
+                  </a:ext>
+                </a:extLst>
               </a:tr>
               <a:tr h="358353">
                 <a:tc>
@@ -5627,7 +5762,7 @@
                     <a:bodyPr/>
                     <a:lstStyle/>
                     <a:p>
-                      <a:pPr algn="l" marL="50800" marR="50800">
+                      <a:pPr marL="50800" marR="50800" algn="l">
                         <a:lnSpc>
                           <a:spcPct val="100000"/>
                         </a:lnSpc>
@@ -5640,7 +5775,7 @@
                         <a:buNone/>
                       </a:pPr>
                       <a:r>
-                        <a:rPr cap="none" sz="1100" i="0" b="0" u="none" strike="noStrike">
+                        <a:rPr sz="1100" b="0" i="0" u="none" strike="noStrike" cap="none">
                           <a:solidFill>
                             <a:srgbClr val="000000">
                               <a:alpha val="100000"/>
@@ -5648,15 +5783,14 @@
                           </a:solidFill>
                           <a:latin typeface="Helvetica"/>
                           <a:cs typeface="Helvetica"/>
-                          <a:ea typeface="Helvetica"/>
                           <a:sym typeface="Helvetica"/>
                         </a:rPr>
                         <a:t>Datasets integrated</a:t>
                       </a:r>
                     </a:p>
                   </a:txBody>
-                  <a:tcPr anchor="ctr" marB="50800" marT="50800" marR="0" marL="0">
-                    <a:lnL algn="ctr" cmpd="sng" cap="flat" w="9525">
+                  <a:tcPr marL="0" marR="0" marT="50800" marB="50800" anchor="ctr">
+                    <a:lnL w="9525" cap="flat" cmpd="sng" algn="ctr">
                       <a:solidFill>
                         <a:srgbClr val="666666">
                           <a:alpha val="100000"/>
@@ -5664,7 +5798,7 @@
                       </a:solidFill>
                       <a:prstDash val="solid"/>
                     </a:lnL>
-                    <a:lnR algn="ctr" cmpd="sng" cap="flat" w="9525">
+                    <a:lnR w="9525" cap="flat" cmpd="sng" algn="ctr">
                       <a:solidFill>
                         <a:srgbClr val="666666">
                           <a:alpha val="100000"/>
@@ -5672,11 +5806,16 @@
                       </a:solidFill>
                       <a:prstDash val="solid"/>
                     </a:lnR>
-                    <a:lnT algn="ctr" cmpd="sng" cap="flat" w="0">
-                      <a:noFill/>
-                      <a:prstDash val="solid"/>
+                    <a:lnT w="9525" cap="flat" cmpd="sng" algn="ctr">
+                      <a:solidFill>
+                        <a:srgbClr val="666666"/>
+                      </a:solidFill>
+                      <a:prstDash val="solid"/>
+                      <a:round/>
+                      <a:headEnd type="none" w="med" len="med"/>
+                      <a:tailEnd type="none" w="med" len="med"/>
                     </a:lnT>
-                    <a:lnB algn="ctr" cmpd="sng" cap="flat" w="9525">
+                    <a:lnB w="9525" cap="flat" cmpd="sng" algn="ctr">
                       <a:solidFill>
                         <a:srgbClr val="666666">
                           <a:alpha val="100000"/>
@@ -5696,7 +5835,7 @@
                     <a:bodyPr/>
                     <a:lstStyle/>
                     <a:p>
-                      <a:pPr algn="l" marL="50800" marR="50800">
+                      <a:pPr marL="50800" marR="50800" algn="l">
                         <a:lnSpc>
                           <a:spcPct val="100000"/>
                         </a:lnSpc>
@@ -5709,7 +5848,7 @@
                         <a:buNone/>
                       </a:pPr>
                       <a:r>
-                        <a:rPr cap="none" sz="1100" i="0" b="0" u="none" strike="noStrike">
+                        <a:rPr sz="1100" b="0" i="0" u="none" strike="noStrike" cap="none">
                           <a:solidFill>
                             <a:srgbClr val="000000">
                               <a:alpha val="100000"/>
@@ -5717,15 +5856,14 @@
                           </a:solidFill>
                           <a:latin typeface="Helvetica"/>
                           <a:cs typeface="Helvetica"/>
-                          <a:ea typeface="Helvetica"/>
                           <a:sym typeface="Helvetica"/>
                         </a:rPr>
                         <a:t>10</a:t>
                       </a:r>
                     </a:p>
                   </a:txBody>
-                  <a:tcPr anchor="ctr" marB="50800" marT="50800" marR="0" marL="0">
-                    <a:lnL algn="ctr" cmpd="sng" cap="flat" w="9525">
+                  <a:tcPr marL="0" marR="0" marT="50800" marB="50800" anchor="ctr">
+                    <a:lnL w="9525" cap="flat" cmpd="sng" algn="ctr">
                       <a:solidFill>
                         <a:srgbClr val="666666">
                           <a:alpha val="100000"/>
@@ -5733,7 +5871,7 @@
                       </a:solidFill>
                       <a:prstDash val="solid"/>
                     </a:lnL>
-                    <a:lnR algn="ctr" cmpd="sng" cap="flat" w="9525">
+                    <a:lnR w="9525" cap="flat" cmpd="sng" algn="ctr">
                       <a:solidFill>
                         <a:srgbClr val="666666">
                           <a:alpha val="100000"/>
@@ -5741,11 +5879,16 @@
                       </a:solidFill>
                       <a:prstDash val="solid"/>
                     </a:lnR>
-                    <a:lnT algn="ctr" cmpd="sng" cap="flat" w="0">
-                      <a:noFill/>
-                      <a:prstDash val="solid"/>
+                    <a:lnT w="9525" cap="flat" cmpd="sng" algn="ctr">
+                      <a:solidFill>
+                        <a:srgbClr val="666666"/>
+                      </a:solidFill>
+                      <a:prstDash val="solid"/>
+                      <a:round/>
+                      <a:headEnd type="none" w="med" len="med"/>
+                      <a:tailEnd type="none" w="med" len="med"/>
                     </a:lnT>
-                    <a:lnB algn="ctr" cmpd="sng" cap="flat" w="9525">
+                    <a:lnB w="9525" cap="flat" cmpd="sng" algn="ctr">
                       <a:solidFill>
                         <a:srgbClr val="666666">
                           <a:alpha val="100000"/>
@@ -5760,6 +5903,11 @@
                     </a:solidFill>
                   </a:tcPr>
                 </a:tc>
+                <a:extLst>
+                  <a:ext uri="{0D108BD9-81ED-4DB2-BD59-A6C34878D82A}">
+                    <a16:rowId xmlns:a16="http://schemas.microsoft.com/office/drawing/2014/main" val="10001"/>
+                  </a:ext>
+                </a:extLst>
               </a:tr>
               <a:tr h="330249">
                 <a:tc>
@@ -5767,7 +5915,7 @@
                     <a:bodyPr/>
                     <a:lstStyle/>
                     <a:p>
-                      <a:pPr algn="l" marL="50800" marR="50800">
+                      <a:pPr marL="50800" marR="50800" algn="l">
                         <a:lnSpc>
                           <a:spcPct val="100000"/>
                         </a:lnSpc>
@@ -5780,7 +5928,7 @@
                         <a:buNone/>
                       </a:pPr>
                       <a:r>
-                        <a:rPr cap="none" sz="1100" i="0" b="0" u="none" strike="noStrike">
+                        <a:rPr sz="1100" b="0" i="0" u="none" strike="noStrike" cap="none">
                           <a:solidFill>
                             <a:srgbClr val="000000">
                               <a:alpha val="100000"/>
@@ -5788,15 +5936,14 @@
                           </a:solidFill>
                           <a:latin typeface="Helvetica"/>
                           <a:cs typeface="Helvetica"/>
-                          <a:ea typeface="Helvetica"/>
                           <a:sym typeface="Helvetica"/>
                         </a:rPr>
                         <a:t>Tables</a:t>
                       </a:r>
                     </a:p>
                   </a:txBody>
-                  <a:tcPr anchor="ctr" marB="50800" marT="50800" marR="0" marL="0">
-                    <a:lnL algn="ctr" cmpd="sng" cap="flat" w="9525">
+                  <a:tcPr marL="0" marR="0" marT="50800" marB="50800" anchor="ctr">
+                    <a:lnL w="9525" cap="flat" cmpd="sng" algn="ctr">
                       <a:solidFill>
                         <a:srgbClr val="666666">
                           <a:alpha val="100000"/>
@@ -5804,7 +5951,7 @@
                       </a:solidFill>
                       <a:prstDash val="solid"/>
                     </a:lnL>
-                    <a:lnR algn="ctr" cmpd="sng" cap="flat" w="9525">
+                    <a:lnR w="9525" cap="flat" cmpd="sng" algn="ctr">
                       <a:solidFill>
                         <a:srgbClr val="666666">
                           <a:alpha val="100000"/>
@@ -5812,7 +5959,7 @@
                       </a:solidFill>
                       <a:prstDash val="solid"/>
                     </a:lnR>
-                    <a:lnT algn="ctr" cmpd="sng" cap="flat" w="9525">
+                    <a:lnT w="9525" cap="flat" cmpd="sng" algn="ctr">
                       <a:solidFill>
                         <a:srgbClr val="666666">
                           <a:alpha val="100000"/>
@@ -5820,7 +5967,7 @@
                       </a:solidFill>
                       <a:prstDash val="solid"/>
                     </a:lnT>
-                    <a:lnB algn="ctr" cmpd="sng" cap="flat" w="9525">
+                    <a:lnB w="9525" cap="flat" cmpd="sng" algn="ctr">
                       <a:solidFill>
                         <a:srgbClr val="666666">
                           <a:alpha val="100000"/>
@@ -5840,7 +5987,7 @@
                     <a:bodyPr/>
                     <a:lstStyle/>
                     <a:p>
-                      <a:pPr algn="l" marL="50800" marR="50800">
+                      <a:pPr marL="50800" marR="50800" algn="l">
                         <a:lnSpc>
                           <a:spcPct val="100000"/>
                         </a:lnSpc>
@@ -5853,7 +6000,7 @@
                         <a:buNone/>
                       </a:pPr>
                       <a:r>
-                        <a:rPr cap="none" sz="1100" i="0" b="0" u="none" strike="noStrike">
+                        <a:rPr sz="1100" b="0" i="0" u="none" strike="noStrike" cap="none">
                           <a:solidFill>
                             <a:srgbClr val="000000">
                               <a:alpha val="100000"/>
@@ -5861,15 +6008,14 @@
                           </a:solidFill>
                           <a:latin typeface="Helvetica"/>
                           <a:cs typeface="Helvetica"/>
-                          <a:ea typeface="Helvetica"/>
                           <a:sym typeface="Helvetica"/>
                         </a:rPr>
                         <a:t>44</a:t>
                       </a:r>
                     </a:p>
                   </a:txBody>
-                  <a:tcPr anchor="ctr" marB="50800" marT="50800" marR="0" marL="0">
-                    <a:lnL algn="ctr" cmpd="sng" cap="flat" w="9525">
+                  <a:tcPr marL="0" marR="0" marT="50800" marB="50800" anchor="ctr">
+                    <a:lnL w="9525" cap="flat" cmpd="sng" algn="ctr">
                       <a:solidFill>
                         <a:srgbClr val="666666">
                           <a:alpha val="100000"/>
@@ -5877,7 +6023,7 @@
                       </a:solidFill>
                       <a:prstDash val="solid"/>
                     </a:lnL>
-                    <a:lnR algn="ctr" cmpd="sng" cap="flat" w="9525">
+                    <a:lnR w="9525" cap="flat" cmpd="sng" algn="ctr">
                       <a:solidFill>
                         <a:srgbClr val="666666">
                           <a:alpha val="100000"/>
@@ -5885,7 +6031,7 @@
                       </a:solidFill>
                       <a:prstDash val="solid"/>
                     </a:lnR>
-                    <a:lnT algn="ctr" cmpd="sng" cap="flat" w="9525">
+                    <a:lnT w="9525" cap="flat" cmpd="sng" algn="ctr">
                       <a:solidFill>
                         <a:srgbClr val="666666">
                           <a:alpha val="100000"/>
@@ -5893,7 +6039,7 @@
                       </a:solidFill>
                       <a:prstDash val="solid"/>
                     </a:lnT>
-                    <a:lnB algn="ctr" cmpd="sng" cap="flat" w="9525">
+                    <a:lnB w="9525" cap="flat" cmpd="sng" algn="ctr">
                       <a:solidFill>
                         <a:srgbClr val="666666">
                           <a:alpha val="100000"/>
@@ -5908,6 +6054,11 @@
                     </a:solidFill>
                   </a:tcPr>
                 </a:tc>
+                <a:extLst>
+                  <a:ext uri="{0D108BD9-81ED-4DB2-BD59-A6C34878D82A}">
+                    <a16:rowId xmlns:a16="http://schemas.microsoft.com/office/drawing/2014/main" val="10002"/>
+                  </a:ext>
+                </a:extLst>
               </a:tr>
               <a:tr h="345597">
                 <a:tc>
@@ -5915,7 +6066,7 @@
                     <a:bodyPr/>
                     <a:lstStyle/>
                     <a:p>
-                      <a:pPr algn="l" marL="50800" marR="50800">
+                      <a:pPr marL="50800" marR="50800" algn="l">
                         <a:lnSpc>
                           <a:spcPct val="100000"/>
                         </a:lnSpc>
@@ -5928,7 +6079,7 @@
                         <a:buNone/>
                       </a:pPr>
                       <a:r>
-                        <a:rPr cap="none" sz="1100" i="0" b="0" u="none" strike="noStrike">
+                        <a:rPr sz="1100" b="0" i="0" u="none" strike="noStrike" cap="none">
                           <a:solidFill>
                             <a:srgbClr val="000000">
                               <a:alpha val="100000"/>
@@ -5936,15 +6087,14 @@
                           </a:solidFill>
                           <a:latin typeface="Helvetica"/>
                           <a:cs typeface="Helvetica"/>
-                          <a:ea typeface="Helvetica"/>
                           <a:sym typeface="Helvetica"/>
                         </a:rPr>
                         <a:t>Records</a:t>
                       </a:r>
                     </a:p>
                   </a:txBody>
-                  <a:tcPr anchor="ctr" marB="50800" marT="50800" marR="0" marL="0">
-                    <a:lnL algn="ctr" cmpd="sng" cap="flat" w="9525">
+                  <a:tcPr marL="0" marR="0" marT="50800" marB="50800" anchor="ctr">
+                    <a:lnL w="9525" cap="flat" cmpd="sng" algn="ctr">
                       <a:solidFill>
                         <a:srgbClr val="666666">
                           <a:alpha val="100000"/>
@@ -5952,7 +6102,7 @@
                       </a:solidFill>
                       <a:prstDash val="solid"/>
                     </a:lnL>
-                    <a:lnR algn="ctr" cmpd="sng" cap="flat" w="9525">
+                    <a:lnR w="9525" cap="flat" cmpd="sng" algn="ctr">
                       <a:solidFill>
                         <a:srgbClr val="666666">
                           <a:alpha val="100000"/>
@@ -5960,7 +6110,7 @@
                       </a:solidFill>
                       <a:prstDash val="solid"/>
                     </a:lnR>
-                    <a:lnT algn="ctr" cmpd="sng" cap="flat" w="9525">
+                    <a:lnT w="9525" cap="flat" cmpd="sng" algn="ctr">
                       <a:solidFill>
                         <a:srgbClr val="666666">
                           <a:alpha val="100000"/>
@@ -5968,7 +6118,7 @@
                       </a:solidFill>
                       <a:prstDash val="solid"/>
                     </a:lnT>
-                    <a:lnB algn="ctr" cmpd="sng" cap="flat" w="9525">
+                    <a:lnB w="9525" cap="flat" cmpd="sng" algn="ctr">
                       <a:solidFill>
                         <a:srgbClr val="666666">
                           <a:alpha val="100000"/>
@@ -5988,7 +6138,7 @@
                     <a:bodyPr/>
                     <a:lstStyle/>
                     <a:p>
-                      <a:pPr algn="l" marL="50800" marR="50800">
+                      <a:pPr marL="50800" marR="50800" algn="l">
                         <a:lnSpc>
                           <a:spcPct val="100000"/>
                         </a:lnSpc>
@@ -6001,7 +6151,7 @@
                         <a:buNone/>
                       </a:pPr>
                       <a:r>
-                        <a:rPr cap="none" sz="1100" i="0" b="0" u="none" strike="noStrike">
+                        <a:rPr sz="1100" b="0" i="0" u="none" strike="noStrike" cap="none">
                           <a:solidFill>
                             <a:srgbClr val="000000">
                               <a:alpha val="100000"/>
@@ -6009,15 +6159,14 @@
                           </a:solidFill>
                           <a:latin typeface="Helvetica"/>
                           <a:cs typeface="Helvetica"/>
-                          <a:ea typeface="Helvetica"/>
                           <a:sym typeface="Helvetica"/>
                         </a:rPr>
                         <a:t>133,807,311</a:t>
                       </a:r>
                     </a:p>
                   </a:txBody>
-                  <a:tcPr anchor="ctr" marB="50800" marT="50800" marR="0" marL="0">
-                    <a:lnL algn="ctr" cmpd="sng" cap="flat" w="9525">
+                  <a:tcPr marL="0" marR="0" marT="50800" marB="50800" anchor="ctr">
+                    <a:lnL w="9525" cap="flat" cmpd="sng" algn="ctr">
                       <a:solidFill>
                         <a:srgbClr val="666666">
                           <a:alpha val="100000"/>
@@ -6025,7 +6174,7 @@
                       </a:solidFill>
                       <a:prstDash val="solid"/>
                     </a:lnL>
-                    <a:lnR algn="ctr" cmpd="sng" cap="flat" w="9525">
+                    <a:lnR w="9525" cap="flat" cmpd="sng" algn="ctr">
                       <a:solidFill>
                         <a:srgbClr val="666666">
                           <a:alpha val="100000"/>
@@ -6033,7 +6182,7 @@
                       </a:solidFill>
                       <a:prstDash val="solid"/>
                     </a:lnR>
-                    <a:lnT algn="ctr" cmpd="sng" cap="flat" w="9525">
+                    <a:lnT w="9525" cap="flat" cmpd="sng" algn="ctr">
                       <a:solidFill>
                         <a:srgbClr val="666666">
                           <a:alpha val="100000"/>
@@ -6041,7 +6190,7 @@
                       </a:solidFill>
                       <a:prstDash val="solid"/>
                     </a:lnT>
-                    <a:lnB algn="ctr" cmpd="sng" cap="flat" w="9525">
+                    <a:lnB w="9525" cap="flat" cmpd="sng" algn="ctr">
                       <a:solidFill>
                         <a:srgbClr val="666666">
                           <a:alpha val="100000"/>
@@ -6056,6 +6205,11 @@
                     </a:solidFill>
                   </a:tcPr>
                 </a:tc>
+                <a:extLst>
+                  <a:ext uri="{0D108BD9-81ED-4DB2-BD59-A6C34878D82A}">
+                    <a16:rowId xmlns:a16="http://schemas.microsoft.com/office/drawing/2014/main" val="10003"/>
+                  </a:ext>
+                </a:extLst>
               </a:tr>
               <a:tr h="358967">
                 <a:tc>
@@ -6063,7 +6217,7 @@
                     <a:bodyPr/>
                     <a:lstStyle/>
                     <a:p>
-                      <a:pPr algn="l" marL="50800" marR="50800">
+                      <a:pPr marL="50800" marR="50800" algn="l">
                         <a:lnSpc>
                           <a:spcPct val="100000"/>
                         </a:lnSpc>
@@ -6076,7 +6230,7 @@
                         <a:buNone/>
                       </a:pPr>
                       <a:r>
-                        <a:rPr cap="none" sz="1100" i="0" b="0" u="none" strike="noStrike">
+                        <a:rPr sz="1100" b="0" i="0" u="none" strike="noStrike" cap="none">
                           <a:solidFill>
                             <a:srgbClr val="000000">
                               <a:alpha val="100000"/>
@@ -6084,15 +6238,14 @@
                           </a:solidFill>
                           <a:latin typeface="Helvetica"/>
                           <a:cs typeface="Helvetica"/>
-                          <a:ea typeface="Helvetica"/>
                           <a:sym typeface="Helvetica"/>
                         </a:rPr>
                         <a:t>Frozen size (Parquet/GCS)</a:t>
                       </a:r>
                     </a:p>
                   </a:txBody>
-                  <a:tcPr anchor="ctr" marB="50800" marT="50800" marR="0" marL="0">
-                    <a:lnL algn="ctr" cmpd="sng" cap="flat" w="9525">
+                  <a:tcPr marL="0" marR="0" marT="50800" marB="50800" anchor="ctr">
+                    <a:lnL w="9525" cap="flat" cmpd="sng" algn="ctr">
                       <a:solidFill>
                         <a:srgbClr val="666666">
                           <a:alpha val="100000"/>
@@ -6100,7 +6253,7 @@
                       </a:solidFill>
                       <a:prstDash val="solid"/>
                     </a:lnL>
-                    <a:lnR algn="ctr" cmpd="sng" cap="flat" w="9525">
+                    <a:lnR w="9525" cap="flat" cmpd="sng" algn="ctr">
                       <a:solidFill>
                         <a:srgbClr val="666666">
                           <a:alpha val="100000"/>
@@ -6108,7 +6261,7 @@
                       </a:solidFill>
                       <a:prstDash val="solid"/>
                     </a:lnR>
-                    <a:lnT algn="ctr" cmpd="sng" cap="flat" w="9525">
+                    <a:lnT w="9525" cap="flat" cmpd="sng" algn="ctr">
                       <a:solidFill>
                         <a:srgbClr val="666666">
                           <a:alpha val="100000"/>
@@ -6116,7 +6269,7 @@
                       </a:solidFill>
                       <a:prstDash val="solid"/>
                     </a:lnT>
-                    <a:lnB algn="ctr" cmpd="sng" cap="flat" w="9525">
+                    <a:lnB w="9525" cap="flat" cmpd="sng" algn="ctr">
                       <a:solidFill>
                         <a:srgbClr val="666666">
                           <a:alpha val="100000"/>
@@ -6136,7 +6289,7 @@
                     <a:bodyPr/>
                     <a:lstStyle/>
                     <a:p>
-                      <a:pPr algn="l" marL="50800" marR="50800">
+                      <a:pPr marL="50800" marR="50800" algn="l">
                         <a:lnSpc>
                           <a:spcPct val="100000"/>
                         </a:lnSpc>
@@ -6149,7 +6302,7 @@
                         <a:buNone/>
                       </a:pPr>
                       <a:r>
-                        <a:rPr cap="none" sz="1100" i="0" b="0" u="none" strike="noStrike">
+                        <a:rPr sz="1100" b="0" i="0" u="none" strike="noStrike" cap="none">
                           <a:solidFill>
                             <a:srgbClr val="000000">
                               <a:alpha val="100000"/>
@@ -6157,15 +6310,14 @@
                           </a:solidFill>
                           <a:latin typeface="Helvetica"/>
                           <a:cs typeface="Helvetica"/>
-                          <a:ea typeface="Helvetica"/>
                           <a:sym typeface="Helvetica"/>
                         </a:rPr>
                         <a:t>3.7 GB</a:t>
                       </a:r>
                     </a:p>
                   </a:txBody>
-                  <a:tcPr anchor="ctr" marB="50800" marT="50800" marR="0" marL="0">
-                    <a:lnL algn="ctr" cmpd="sng" cap="flat" w="9525">
+                  <a:tcPr marL="0" marR="0" marT="50800" marB="50800" anchor="ctr">
+                    <a:lnL w="9525" cap="flat" cmpd="sng" algn="ctr">
                       <a:solidFill>
                         <a:srgbClr val="666666">
                           <a:alpha val="100000"/>
@@ -6173,7 +6325,7 @@
                       </a:solidFill>
                       <a:prstDash val="solid"/>
                     </a:lnL>
-                    <a:lnR algn="ctr" cmpd="sng" cap="flat" w="9525">
+                    <a:lnR w="9525" cap="flat" cmpd="sng" algn="ctr">
                       <a:solidFill>
                         <a:srgbClr val="666666">
                           <a:alpha val="100000"/>
@@ -6181,7 +6333,7 @@
                       </a:solidFill>
                       <a:prstDash val="solid"/>
                     </a:lnR>
-                    <a:lnT algn="ctr" cmpd="sng" cap="flat" w="9525">
+                    <a:lnT w="9525" cap="flat" cmpd="sng" algn="ctr">
                       <a:solidFill>
                         <a:srgbClr val="666666">
                           <a:alpha val="100000"/>
@@ -6189,7 +6341,7 @@
                       </a:solidFill>
                       <a:prstDash val="solid"/>
                     </a:lnT>
-                    <a:lnB algn="ctr" cmpd="sng" cap="flat" w="9525">
+                    <a:lnB w="9525" cap="flat" cmpd="sng" algn="ctr">
                       <a:solidFill>
                         <a:srgbClr val="666666">
                           <a:alpha val="100000"/>
@@ -6204,6 +6356,11 @@
                     </a:solidFill>
                   </a:tcPr>
                 </a:tc>
+                <a:extLst>
+                  <a:ext uri="{0D108BD9-81ED-4DB2-BD59-A6C34878D82A}">
+                    <a16:rowId xmlns:a16="http://schemas.microsoft.com/office/drawing/2014/main" val="10004"/>
+                  </a:ext>
+                </a:extLst>
               </a:tr>
               <a:tr h="360740">
                 <a:tc>
@@ -6211,7 +6368,7 @@
                     <a:bodyPr/>
                     <a:lstStyle/>
                     <a:p>
-                      <a:pPr algn="l" marL="50800" marR="50800">
+                      <a:pPr marL="50800" marR="50800" algn="l">
                         <a:lnSpc>
                           <a:spcPct val="100000"/>
                         </a:lnSpc>
@@ -6224,7 +6381,7 @@
                         <a:buNone/>
                       </a:pPr>
                       <a:r>
-                        <a:rPr cap="none" sz="1100" i="0" b="0" u="none" strike="noStrike">
+                        <a:rPr sz="1100" b="0" i="0" u="none" strike="noStrike" cap="none">
                           <a:solidFill>
                             <a:srgbClr val="000000">
                               <a:alpha val="100000"/>
@@ -6232,15 +6389,14 @@
                           </a:solidFill>
                           <a:latin typeface="Helvetica"/>
                           <a:cs typeface="Helvetica"/>
-                          <a:ea typeface="Helvetica"/>
                           <a:sym typeface="Helvetica"/>
                         </a:rPr>
                         <a:t>ERDDAP datasets served</a:t>
                       </a:r>
                     </a:p>
                   </a:txBody>
-                  <a:tcPr anchor="ctr" marB="50800" marT="50800" marR="0" marL="0">
-                    <a:lnL algn="ctr" cmpd="sng" cap="flat" w="9525">
+                  <a:tcPr marL="0" marR="0" marT="50800" marB="50800" anchor="ctr">
+                    <a:lnL w="9525" cap="flat" cmpd="sng" algn="ctr">
                       <a:solidFill>
                         <a:srgbClr val="666666">
                           <a:alpha val="100000"/>
@@ -6248,7 +6404,7 @@
                       </a:solidFill>
                       <a:prstDash val="solid"/>
                     </a:lnL>
-                    <a:lnR algn="ctr" cmpd="sng" cap="flat" w="9525">
+                    <a:lnR w="9525" cap="flat" cmpd="sng" algn="ctr">
                       <a:solidFill>
                         <a:srgbClr val="666666">
                           <a:alpha val="100000"/>
@@ -6256,7 +6412,7 @@
                       </a:solidFill>
                       <a:prstDash val="solid"/>
                     </a:lnR>
-                    <a:lnT algn="ctr" cmpd="sng" cap="flat" w="9525">
+                    <a:lnT w="9525" cap="flat" cmpd="sng" algn="ctr">
                       <a:solidFill>
                         <a:srgbClr val="666666">
                           <a:alpha val="100000"/>
@@ -6264,7 +6420,7 @@
                       </a:solidFill>
                       <a:prstDash val="solid"/>
                     </a:lnT>
-                    <a:lnB algn="ctr" cmpd="sng" cap="flat" w="9525">
+                    <a:lnB w="9525" cap="flat" cmpd="sng" algn="ctr">
                       <a:solidFill>
                         <a:srgbClr val="666666">
                           <a:alpha val="100000"/>
@@ -6284,7 +6440,7 @@
                     <a:bodyPr/>
                     <a:lstStyle/>
                     <a:p>
-                      <a:pPr algn="l" marL="50800" marR="50800">
+                      <a:pPr marL="50800" marR="50800" algn="l">
                         <a:lnSpc>
                           <a:spcPct val="100000"/>
                         </a:lnSpc>
@@ -6297,7 +6453,7 @@
                         <a:buNone/>
                       </a:pPr>
                       <a:r>
-                        <a:rPr cap="none" sz="1100" i="0" b="0" u="none" strike="noStrike">
+                        <a:rPr sz="1100" b="0" i="0" u="none" strike="noStrike" cap="none">
                           <a:solidFill>
                             <a:srgbClr val="000000">
                               <a:alpha val="100000"/>
@@ -6305,15 +6461,14 @@
                           </a:solidFill>
                           <a:latin typeface="Helvetica"/>
                           <a:cs typeface="Helvetica"/>
-                          <a:ea typeface="Helvetica"/>
                           <a:sym typeface="Helvetica"/>
                         </a:rPr>
                         <a:t>6 (5 live, CTD syncing)</a:t>
                       </a:r>
                     </a:p>
                   </a:txBody>
-                  <a:tcPr anchor="ctr" marB="50800" marT="50800" marR="0" marL="0">
-                    <a:lnL algn="ctr" cmpd="sng" cap="flat" w="9525">
+                  <a:tcPr marL="0" marR="0" marT="50800" marB="50800" anchor="ctr">
+                    <a:lnL w="9525" cap="flat" cmpd="sng" algn="ctr">
                       <a:solidFill>
                         <a:srgbClr val="666666">
                           <a:alpha val="100000"/>
@@ -6321,7 +6476,7 @@
                       </a:solidFill>
                       <a:prstDash val="solid"/>
                     </a:lnL>
-                    <a:lnR algn="ctr" cmpd="sng" cap="flat" w="9525">
+                    <a:lnR w="9525" cap="flat" cmpd="sng" algn="ctr">
                       <a:solidFill>
                         <a:srgbClr val="666666">
                           <a:alpha val="100000"/>
@@ -6329,7 +6484,7 @@
                       </a:solidFill>
                       <a:prstDash val="solid"/>
                     </a:lnR>
-                    <a:lnT algn="ctr" cmpd="sng" cap="flat" w="9525">
+                    <a:lnT w="9525" cap="flat" cmpd="sng" algn="ctr">
                       <a:solidFill>
                         <a:srgbClr val="666666">
                           <a:alpha val="100000"/>
@@ -6337,7 +6492,7 @@
                       </a:solidFill>
                       <a:prstDash val="solid"/>
                     </a:lnT>
-                    <a:lnB algn="ctr" cmpd="sng" cap="flat" w="9525">
+                    <a:lnB w="9525" cap="flat" cmpd="sng" algn="ctr">
                       <a:solidFill>
                         <a:srgbClr val="666666">
                           <a:alpha val="100000"/>
@@ -6352,6 +6507,11 @@
                     </a:solidFill>
                   </a:tcPr>
                 </a:tc>
+                <a:extLst>
+                  <a:ext uri="{0D108BD9-81ED-4DB2-BD59-A6C34878D82A}">
+                    <a16:rowId xmlns:a16="http://schemas.microsoft.com/office/drawing/2014/main" val="10005"/>
+                  </a:ext>
+                </a:extLst>
               </a:tr>
               <a:tr h="356238">
                 <a:tc>
@@ -6359,7 +6519,7 @@
                     <a:bodyPr/>
                     <a:lstStyle/>
                     <a:p>
-                      <a:pPr algn="l" marL="50800" marR="50800">
+                      <a:pPr marL="50800" marR="50800" algn="l">
                         <a:lnSpc>
                           <a:spcPct val="100000"/>
                         </a:lnSpc>
@@ -6372,7 +6532,7 @@
                         <a:buNone/>
                       </a:pPr>
                       <a:r>
-                        <a:rPr cap="none" sz="1100" i="0" b="0" u="none" strike="noStrike">
+                        <a:rPr sz="1100" b="0" i="0" u="none" strike="noStrike" cap="none">
                           <a:solidFill>
                             <a:srgbClr val="000000">
                               <a:alpha val="100000"/>
@@ -6380,15 +6540,14 @@
                           </a:solidFill>
                           <a:latin typeface="Helvetica"/>
                           <a:cs typeface="Helvetica"/>
-                          <a:ea typeface="Helvetica"/>
                           <a:sym typeface="Helvetica"/>
                         </a:rPr>
                         <a:t>Apps</a:t>
                       </a:r>
                     </a:p>
                   </a:txBody>
-                  <a:tcPr anchor="ctr" marB="50800" marT="50800" marR="0" marL="0">
-                    <a:lnL algn="ctr" cmpd="sng" cap="flat" w="9525">
+                  <a:tcPr marL="0" marR="0" marT="50800" marB="50800" anchor="ctr">
+                    <a:lnL w="9525" cap="flat" cmpd="sng" algn="ctr">
                       <a:solidFill>
                         <a:srgbClr val="666666">
                           <a:alpha val="100000"/>
@@ -6396,7 +6555,7 @@
                       </a:solidFill>
                       <a:prstDash val="solid"/>
                     </a:lnL>
-                    <a:lnR algn="ctr" cmpd="sng" cap="flat" w="9525">
+                    <a:lnR w="9525" cap="flat" cmpd="sng" algn="ctr">
                       <a:solidFill>
                         <a:srgbClr val="666666">
                           <a:alpha val="100000"/>
@@ -6404,7 +6563,7 @@
                       </a:solidFill>
                       <a:prstDash val="solid"/>
                     </a:lnR>
-                    <a:lnT algn="ctr" cmpd="sng" cap="flat" w="9525">
+                    <a:lnT w="9525" cap="flat" cmpd="sng" algn="ctr">
                       <a:solidFill>
                         <a:srgbClr val="666666">
                           <a:alpha val="100000"/>
@@ -6412,7 +6571,7 @@
                       </a:solidFill>
                       <a:prstDash val="solid"/>
                     </a:lnT>
-                    <a:lnB algn="ctr" cmpd="sng" cap="flat" w="9525">
+                    <a:lnB w="9525" cap="flat" cmpd="sng" algn="ctr">
                       <a:solidFill>
                         <a:srgbClr val="666666">
                           <a:alpha val="100000"/>
@@ -6432,7 +6591,7 @@
                     <a:bodyPr/>
                     <a:lstStyle/>
                     <a:p>
-                      <a:pPr algn="l" marL="50800" marR="50800">
+                      <a:pPr marL="50800" marR="50800" algn="l">
                         <a:lnSpc>
                           <a:spcPct val="100000"/>
                         </a:lnSpc>
@@ -6445,7 +6604,7 @@
                         <a:buNone/>
                       </a:pPr>
                       <a:r>
-                        <a:rPr cap="none" sz="1100" i="0" b="0" u="none" strike="noStrike">
+                        <a:rPr sz="1100" b="0" i="0" u="none" strike="noStrike" cap="none">
                           <a:solidFill>
                             <a:srgbClr val="000000">
                               <a:alpha val="100000"/>
@@ -6453,15 +6612,14 @@
                           </a:solidFill>
                           <a:latin typeface="Helvetica"/>
                           <a:cs typeface="Helvetica"/>
-                          <a:ea typeface="Helvetica"/>
                           <a:sym typeface="Helvetica"/>
                         </a:rPr>
                         <a:t>schema site · ctd-viz · datacheck</a:t>
                       </a:r>
                     </a:p>
                   </a:txBody>
-                  <a:tcPr anchor="ctr" marB="50800" marT="50800" marR="0" marL="0">
-                    <a:lnL algn="ctr" cmpd="sng" cap="flat" w="9525">
+                  <a:tcPr marL="0" marR="0" marT="50800" marB="50800" anchor="ctr">
+                    <a:lnL w="9525" cap="flat" cmpd="sng" algn="ctr">
                       <a:solidFill>
                         <a:srgbClr val="666666">
                           <a:alpha val="100000"/>
@@ -6469,7 +6627,7 @@
                       </a:solidFill>
                       <a:prstDash val="solid"/>
                     </a:lnL>
-                    <a:lnR algn="ctr" cmpd="sng" cap="flat" w="9525">
+                    <a:lnR w="9525" cap="flat" cmpd="sng" algn="ctr">
                       <a:solidFill>
                         <a:srgbClr val="666666">
                           <a:alpha val="100000"/>
@@ -6477,7 +6635,7 @@
                       </a:solidFill>
                       <a:prstDash val="solid"/>
                     </a:lnR>
-                    <a:lnT algn="ctr" cmpd="sng" cap="flat" w="9525">
+                    <a:lnT w="9525" cap="flat" cmpd="sng" algn="ctr">
                       <a:solidFill>
                         <a:srgbClr val="666666">
                           <a:alpha val="100000"/>
@@ -6485,7 +6643,7 @@
                       </a:solidFill>
                       <a:prstDash val="solid"/>
                     </a:lnT>
-                    <a:lnB algn="ctr" cmpd="sng" cap="flat" w="9525">
+                    <a:lnB w="9525" cap="flat" cmpd="sng" algn="ctr">
                       <a:solidFill>
                         <a:srgbClr val="666666">
                           <a:alpha val="100000"/>
@@ -6500,6 +6658,11 @@
                     </a:solidFill>
                   </a:tcPr>
                 </a:tc>
+                <a:extLst>
+                  <a:ext uri="{0D108BD9-81ED-4DB2-BD59-A6C34878D82A}">
+                    <a16:rowId xmlns:a16="http://schemas.microsoft.com/office/drawing/2014/main" val="10006"/>
+                  </a:ext>
+                </a:extLst>
               </a:tr>
               <a:tr h="331341">
                 <a:tc>
@@ -6507,7 +6670,7 @@
                     <a:bodyPr/>
                     <a:lstStyle/>
                     <a:p>
-                      <a:pPr algn="l" marL="50800" marR="50800">
+                      <a:pPr marL="50800" marR="50800" algn="l">
                         <a:lnSpc>
                           <a:spcPct val="100000"/>
                         </a:lnSpc>
@@ -6520,7 +6683,7 @@
                         <a:buNone/>
                       </a:pPr>
                       <a:r>
-                        <a:rPr cap="none" sz="1100" i="0" b="0" u="none" strike="noStrike">
+                        <a:rPr sz="1100" b="0" i="0" u="none" strike="noStrike" cap="none">
                           <a:solidFill>
                             <a:srgbClr val="000000">
                               <a:alpha val="100000"/>
@@ -6528,15 +6691,14 @@
                           </a:solidFill>
                           <a:latin typeface="Helvetica"/>
                           <a:cs typeface="Helvetica"/>
-                          <a:ea typeface="Helvetica"/>
                           <a:sym typeface="Helvetica"/>
                         </a:rPr>
                         <a:t>Workflow commits since Dec 2025</a:t>
                       </a:r>
                     </a:p>
                   </a:txBody>
-                  <a:tcPr anchor="ctr" marB="50800" marT="50800" marR="0" marL="0">
-                    <a:lnL algn="ctr" cmpd="sng" cap="flat" w="9525">
+                  <a:tcPr marL="0" marR="0" marT="50800" marB="50800" anchor="ctr">
+                    <a:lnL w="9525" cap="flat" cmpd="sng" algn="ctr">
                       <a:solidFill>
                         <a:srgbClr val="666666">
                           <a:alpha val="100000"/>
@@ -6544,7 +6706,7 @@
                       </a:solidFill>
                       <a:prstDash val="solid"/>
                     </a:lnL>
-                    <a:lnR algn="ctr" cmpd="sng" cap="flat" w="9525">
+                    <a:lnR w="9525" cap="flat" cmpd="sng" algn="ctr">
                       <a:solidFill>
                         <a:srgbClr val="666666">
                           <a:alpha val="100000"/>
@@ -6552,7 +6714,7 @@
                       </a:solidFill>
                       <a:prstDash val="solid"/>
                     </a:lnR>
-                    <a:lnT algn="ctr" cmpd="sng" cap="flat" w="9525">
+                    <a:lnT w="9525" cap="flat" cmpd="sng" algn="ctr">
                       <a:solidFill>
                         <a:srgbClr val="666666">
                           <a:alpha val="100000"/>
@@ -6560,7 +6722,7 @@
                       </a:solidFill>
                       <a:prstDash val="solid"/>
                     </a:lnT>
-                    <a:lnB algn="ctr" cmpd="sng" cap="flat" w="9525">
+                    <a:lnB w="9525" cap="flat" cmpd="sng" algn="ctr">
                       <a:solidFill>
                         <a:srgbClr val="666666">
                           <a:alpha val="100000"/>
@@ -6580,7 +6742,7 @@
                     <a:bodyPr/>
                     <a:lstStyle/>
                     <a:p>
-                      <a:pPr algn="l" marL="50800" marR="50800">
+                      <a:pPr marL="50800" marR="50800" algn="l">
                         <a:lnSpc>
                           <a:spcPct val="100000"/>
                         </a:lnSpc>
@@ -6593,7 +6755,7 @@
                         <a:buNone/>
                       </a:pPr>
                       <a:r>
-                        <a:rPr cap="none" sz="1100" i="0" b="0" u="none" strike="noStrike">
+                        <a:rPr sz="1100" b="0" i="0" u="none" strike="noStrike" cap="none">
                           <a:solidFill>
                             <a:srgbClr val="000000">
                               <a:alpha val="100000"/>
@@ -6601,15 +6763,14 @@
                           </a:solidFill>
                           <a:latin typeface="Helvetica"/>
                           <a:cs typeface="Helvetica"/>
-                          <a:ea typeface="Helvetica"/>
                           <a:sym typeface="Helvetica"/>
                         </a:rPr>
                         <a:t>81</a:t>
                       </a:r>
                     </a:p>
                   </a:txBody>
-                  <a:tcPr anchor="ctr" marB="50800" marT="50800" marR="0" marL="0">
-                    <a:lnL algn="ctr" cmpd="sng" cap="flat" w="9525">
+                  <a:tcPr marL="0" marR="0" marT="50800" marB="50800" anchor="ctr">
+                    <a:lnL w="9525" cap="flat" cmpd="sng" algn="ctr">
                       <a:solidFill>
                         <a:srgbClr val="666666">
                           <a:alpha val="100000"/>
@@ -6617,7 +6778,7 @@
                       </a:solidFill>
                       <a:prstDash val="solid"/>
                     </a:lnL>
-                    <a:lnR algn="ctr" cmpd="sng" cap="flat" w="9525">
+                    <a:lnR w="9525" cap="flat" cmpd="sng" algn="ctr">
                       <a:solidFill>
                         <a:srgbClr val="666666">
                           <a:alpha val="100000"/>
@@ -6625,7 +6786,7 @@
                       </a:solidFill>
                       <a:prstDash val="solid"/>
                     </a:lnR>
-                    <a:lnT algn="ctr" cmpd="sng" cap="flat" w="9525">
+                    <a:lnT w="9525" cap="flat" cmpd="sng" algn="ctr">
                       <a:solidFill>
                         <a:srgbClr val="666666">
                           <a:alpha val="100000"/>
@@ -6633,7 +6794,7 @@
                       </a:solidFill>
                       <a:prstDash val="solid"/>
                     </a:lnT>
-                    <a:lnB algn="ctr" cmpd="sng" cap="flat" w="9525">
+                    <a:lnB w="9525" cap="flat" cmpd="sng" algn="ctr">
                       <a:solidFill>
                         <a:srgbClr val="666666">
                           <a:alpha val="100000"/>
@@ -6648,6 +6809,11 @@
                     </a:solidFill>
                   </a:tcPr>
                 </a:tc>
+                <a:extLst>
+                  <a:ext uri="{0D108BD9-81ED-4DB2-BD59-A6C34878D82A}">
+                    <a16:rowId xmlns:a16="http://schemas.microsoft.com/office/drawing/2014/main" val="10007"/>
+                  </a:ext>
+                </a:extLst>
               </a:tr>
             </a:tbl>
           </a:graphicData>
@@ -6698,7 +6864,7 @@
           <a:bodyPr/>
           <a:lstStyle/>
           <a:p>
-            <a:pPr algn="l" marL="0" marR="0">
+            <a:pPr marL="0" marR="0" algn="l">
               <a:lnSpc>
                 <a:spcPct val="100000"/>
               </a:lnSpc>
@@ -6711,7 +6877,7 @@
               <a:buNone/>
             </a:pPr>
             <a:r>
-              <a:rPr cap="none" sz="4000" i="0" b="1" u="none" strike="noStrike">
+              <a:rPr sz="4000" b="1" i="0" u="none" strike="noStrike" cap="none">
                 <a:solidFill>
                   <a:srgbClr val="0A3D62">
                     <a:alpha val="100000"/>
@@ -6719,7 +6885,6 @@
                 </a:solidFill>
                 <a:latin typeface="Arial"/>
                 <a:cs typeface="Arial"/>
-                <a:ea typeface="Arial"/>
                 <a:sym typeface="Arial"/>
               </a:rPr>
               <a:t>① INGEST</a:t>
@@ -6747,7 +6912,7 @@
           <a:bodyPr/>
           <a:lstStyle/>
           <a:p>
-            <a:pPr algn="l" marL="0" marR="0">
+            <a:pPr marL="0" marR="0" algn="l">
               <a:lnSpc>
                 <a:spcPct val="100000"/>
               </a:lnSpc>
@@ -6760,7 +6925,7 @@
               <a:buNone/>
             </a:pPr>
             <a:r>
-              <a:rPr cap="none" sz="1800" i="0" b="1" u="none" strike="noStrike">
+              <a:rPr sz="1800" b="1" i="0" u="none" strike="noStrike" cap="none">
                 <a:solidFill>
                   <a:srgbClr val="F58518">
                     <a:alpha val="100000"/>
@@ -6768,7 +6933,6 @@
                 </a:solidFill>
                 <a:latin typeface="Arial"/>
                 <a:cs typeface="Arial"/>
-                <a:ea typeface="Arial"/>
                 <a:sym typeface="Arial"/>
               </a:rPr>
               <a:t>Component 1 of 3</a:t>
@@ -6821,7 +6985,7 @@
           <a:bodyPr/>
           <a:lstStyle/>
           <a:p>
-            <a:pPr algn="l" marL="0" marR="0">
+            <a:pPr marL="0" marR="0" algn="l">
               <a:lnSpc>
                 <a:spcPct val="100000"/>
               </a:lnSpc>
@@ -6834,7 +6998,7 @@
               <a:buNone/>
             </a:pPr>
             <a:r>
-              <a:rPr cap="none" sz="2600" i="0" b="1" u="none" strike="noStrike">
+              <a:rPr sz="2600" b="1" i="0" u="none" strike="noStrike" cap="none">
                 <a:solidFill>
                   <a:srgbClr val="0A3D62">
                     <a:alpha val="100000"/>
@@ -6842,7 +7006,6 @@
                 </a:solidFill>
                 <a:latin typeface="Arial"/>
                 <a:cs typeface="Arial"/>
-                <a:ea typeface="Arial"/>
                 <a:sym typeface="Arial"/>
               </a:rPr>
               <a:t>Datasets ingested into the integrated database</a:t>
@@ -6854,22 +7017,40 @@
         <p:nvGraphicFramePr>
           <p:cNvPr id="3" name="Content Placeholder 2"/>
           <p:cNvGraphicFramePr>
-            <a:graphicFrameLocks noGrp="true"/>
+            <a:graphicFrameLocks noGrp="1"/>
           </p:cNvGraphicFramePr>
           <p:nvPr/>
         </p:nvGraphicFramePr>
-        <p:xfrm rot="0">
+        <p:xfrm>
           <a:off x="457200" y="1600200"/>
-          <a:ext cx="8229600" cy="4525963"/>
+          <a:ext cx="5451870" cy="3901965"/>
         </p:xfrm>
         <a:graphic>
           <a:graphicData uri="http://schemas.openxmlformats.org/drawingml/2006/table">
             <a:tbl>
               <a:tblPr/>
               <a:tblGrid>
-                <a:gridCol w="2191574"/>
-                <a:gridCol w="2005012"/>
-                <a:gridCol w="1255284"/>
+                <a:gridCol w="2191574">
+                  <a:extLst>
+                    <a:ext uri="{9D8B030D-6E8A-4147-A177-3AD203B41FA5}">
+                      <a16:colId xmlns:a16="http://schemas.microsoft.com/office/drawing/2014/main" val="20000"/>
+                    </a:ext>
+                  </a:extLst>
+                </a:gridCol>
+                <a:gridCol w="2005012">
+                  <a:extLst>
+                    <a:ext uri="{9D8B030D-6E8A-4147-A177-3AD203B41FA5}">
+                      <a16:colId xmlns:a16="http://schemas.microsoft.com/office/drawing/2014/main" val="20001"/>
+                    </a:ext>
+                  </a:extLst>
+                </a:gridCol>
+                <a:gridCol w="1255284">
+                  <a:extLst>
+                    <a:ext uri="{9D8B030D-6E8A-4147-A177-3AD203B41FA5}">
+                      <a16:colId xmlns:a16="http://schemas.microsoft.com/office/drawing/2014/main" val="20002"/>
+                    </a:ext>
+                  </a:extLst>
+                </a:gridCol>
               </a:tblGrid>
               <a:tr h="342993">
                 <a:tc>
@@ -6877,7 +7058,7 @@
                     <a:bodyPr/>
                     <a:lstStyle/>
                     <a:p>
-                      <a:pPr algn="l" marL="50800" marR="50800">
+                      <a:pPr marL="50800" marR="50800" algn="l">
                         <a:lnSpc>
                           <a:spcPct val="100000"/>
                         </a:lnSpc>
@@ -6890,7 +7071,7 @@
                         <a:buNone/>
                       </a:pPr>
                       <a:r>
-                        <a:rPr cap="none" sz="1200" i="0" b="1" u="none" strike="noStrike">
+                        <a:rPr sz="1200" b="1" i="0" u="none" strike="noStrike" cap="none">
                           <a:solidFill>
                             <a:srgbClr val="FFFFFF">
                               <a:alpha val="100000"/>
@@ -6898,15 +7079,14 @@
                           </a:solidFill>
                           <a:latin typeface="Helvetica"/>
                           <a:cs typeface="Helvetica"/>
-                          <a:ea typeface="Helvetica"/>
                           <a:sym typeface="Helvetica"/>
                         </a:rPr>
                         <a:t>Dataset</a:t>
                       </a:r>
                     </a:p>
                   </a:txBody>
-                  <a:tcPr anchor="ctr" marB="50800" marT="50800" marR="0" marL="0">
-                    <a:lnL algn="ctr" cmpd="sng" cap="flat" w="9525">
+                  <a:tcPr marL="0" marR="0" marT="50800" marB="50800" anchor="ctr">
+                    <a:lnL w="9525" cap="flat" cmpd="sng" algn="ctr">
                       <a:solidFill>
                         <a:srgbClr val="666666">
                           <a:alpha val="100000"/>
@@ -6914,7 +7094,7 @@
                       </a:solidFill>
                       <a:prstDash val="solid"/>
                     </a:lnL>
-                    <a:lnR algn="ctr" cmpd="sng" cap="flat" w="9525">
+                    <a:lnR w="9525" cap="flat" cmpd="sng" algn="ctr">
                       <a:solidFill>
                         <a:srgbClr val="666666">
                           <a:alpha val="100000"/>
@@ -6922,7 +7102,7 @@
                       </a:solidFill>
                       <a:prstDash val="solid"/>
                     </a:lnR>
-                    <a:lnT algn="ctr" cmpd="sng" cap="flat" w="9525">
+                    <a:lnT w="9525" cap="flat" cmpd="sng" algn="ctr">
                       <a:solidFill>
                         <a:srgbClr val="666666">
                           <a:alpha val="100000"/>
@@ -6930,7 +7110,7 @@
                       </a:solidFill>
                       <a:prstDash val="solid"/>
                     </a:lnT>
-                    <a:lnB algn="ctr" cmpd="sng" cap="flat" w="9525">
+                    <a:lnB w="9525" cap="flat" cmpd="sng" algn="ctr">
                       <a:solidFill>
                         <a:srgbClr val="666666">
                           <a:alpha val="100000"/>
@@ -6950,7 +7130,7 @@
                     <a:bodyPr/>
                     <a:lstStyle/>
                     <a:p>
-                      <a:pPr algn="l" marL="50800" marR="50800">
+                      <a:pPr marL="50800" marR="50800" algn="l">
                         <a:lnSpc>
                           <a:spcPct val="100000"/>
                         </a:lnSpc>
@@ -6963,7 +7143,7 @@
                         <a:buNone/>
                       </a:pPr>
                       <a:r>
-                        <a:rPr cap="none" sz="1200" i="0" b="1" u="none" strike="noStrike">
+                        <a:rPr sz="1200" b="1" i="0" u="none" strike="noStrike" cap="none">
                           <a:solidFill>
                             <a:srgbClr val="FFFFFF">
                               <a:alpha val="100000"/>
@@ -6971,15 +7151,14 @@
                           </a:solidFill>
                           <a:latin typeface="Helvetica"/>
                           <a:cs typeface="Helvetica"/>
-                          <a:ea typeface="Helvetica"/>
                           <a:sym typeface="Helvetica"/>
                         </a:rPr>
                         <a:t>Headline</a:t>
                       </a:r>
                     </a:p>
                   </a:txBody>
-                  <a:tcPr anchor="ctr" marB="50800" marT="50800" marR="0" marL="0">
-                    <a:lnL algn="ctr" cmpd="sng" cap="flat" w="9525">
+                  <a:tcPr marL="0" marR="0" marT="50800" marB="50800" anchor="ctr">
+                    <a:lnL w="9525" cap="flat" cmpd="sng" algn="ctr">
                       <a:solidFill>
                         <a:srgbClr val="666666">
                           <a:alpha val="100000"/>
@@ -6987,7 +7166,7 @@
                       </a:solidFill>
                       <a:prstDash val="solid"/>
                     </a:lnL>
-                    <a:lnR algn="ctr" cmpd="sng" cap="flat" w="9525">
+                    <a:lnR w="9525" cap="flat" cmpd="sng" algn="ctr">
                       <a:solidFill>
                         <a:srgbClr val="666666">
                           <a:alpha val="100000"/>
@@ -6995,7 +7174,7 @@
                       </a:solidFill>
                       <a:prstDash val="solid"/>
                     </a:lnR>
-                    <a:lnT algn="ctr" cmpd="sng" cap="flat" w="9525">
+                    <a:lnT w="9525" cap="flat" cmpd="sng" algn="ctr">
                       <a:solidFill>
                         <a:srgbClr val="666666">
                           <a:alpha val="100000"/>
@@ -7003,7 +7182,7 @@
                       </a:solidFill>
                       <a:prstDash val="solid"/>
                     </a:lnT>
-                    <a:lnB algn="ctr" cmpd="sng" cap="flat" w="9525">
+                    <a:lnB w="9525" cap="flat" cmpd="sng" algn="ctr">
                       <a:solidFill>
                         <a:srgbClr val="666666">
                           <a:alpha val="100000"/>
@@ -7023,7 +7202,7 @@
                     <a:bodyPr/>
                     <a:lstStyle/>
                     <a:p>
-                      <a:pPr algn="l" marL="50800" marR="50800">
+                      <a:pPr marL="50800" marR="50800" algn="l">
                         <a:lnSpc>
                           <a:spcPct val="100000"/>
                         </a:lnSpc>
@@ -7036,7 +7215,7 @@
                         <a:buNone/>
                       </a:pPr>
                       <a:r>
-                        <a:rPr cap="none" sz="1200" i="0" b="1" u="none" strike="noStrike">
+                        <a:rPr sz="1200" b="1" i="0" u="none" strike="noStrike" cap="none">
                           <a:solidFill>
                             <a:srgbClr val="FFFFFF">
                               <a:alpha val="100000"/>
@@ -7044,15 +7223,14 @@
                           </a:solidFill>
                           <a:latin typeface="Helvetica"/>
                           <a:cs typeface="Helvetica"/>
-                          <a:ea typeface="Helvetica"/>
                           <a:sym typeface="Helvetica"/>
                         </a:rPr>
                         <a:t>SOW</a:t>
                       </a:r>
                     </a:p>
                   </a:txBody>
-                  <a:tcPr anchor="ctr" marB="50800" marT="50800" marR="0" marL="0">
-                    <a:lnL algn="ctr" cmpd="sng" cap="flat" w="9525">
+                  <a:tcPr marL="0" marR="0" marT="50800" marB="50800" anchor="ctr">
+                    <a:lnL w="9525" cap="flat" cmpd="sng" algn="ctr">
                       <a:solidFill>
                         <a:srgbClr val="666666">
                           <a:alpha val="100000"/>
@@ -7060,7 +7238,7 @@
                       </a:solidFill>
                       <a:prstDash val="solid"/>
                     </a:lnL>
-                    <a:lnR algn="ctr" cmpd="sng" cap="flat" w="9525">
+                    <a:lnR w="9525" cap="flat" cmpd="sng" algn="ctr">
                       <a:solidFill>
                         <a:srgbClr val="666666">
                           <a:alpha val="100000"/>
@@ -7068,7 +7246,7 @@
                       </a:solidFill>
                       <a:prstDash val="solid"/>
                     </a:lnR>
-                    <a:lnT algn="ctr" cmpd="sng" cap="flat" w="9525">
+                    <a:lnT w="9525" cap="flat" cmpd="sng" algn="ctr">
                       <a:solidFill>
                         <a:srgbClr val="666666">
                           <a:alpha val="100000"/>
@@ -7076,7 +7254,7 @@
                       </a:solidFill>
                       <a:prstDash val="solid"/>
                     </a:lnT>
-                    <a:lnB algn="ctr" cmpd="sng" cap="flat" w="9525">
+                    <a:lnB w="9525" cap="flat" cmpd="sng" algn="ctr">
                       <a:solidFill>
                         <a:srgbClr val="666666">
                           <a:alpha val="100000"/>
@@ -7091,6 +7269,11 @@
                     </a:solidFill>
                   </a:tcPr>
                 </a:tc>
+                <a:extLst>
+                  <a:ext uri="{0D108BD9-81ED-4DB2-BD59-A6C34878D82A}">
+                    <a16:rowId xmlns:a16="http://schemas.microsoft.com/office/drawing/2014/main" val="10000"/>
+                  </a:ext>
+                </a:extLst>
               </a:tr>
               <a:tr h="359649">
                 <a:tc>
@@ -7098,7 +7281,7 @@
                     <a:bodyPr/>
                     <a:lstStyle/>
                     <a:p>
-                      <a:pPr algn="l" marL="50800" marR="50800">
+                      <a:pPr marL="50800" marR="50800" algn="l">
                         <a:lnSpc>
                           <a:spcPct val="100000"/>
                         </a:lnSpc>
@@ -7111,7 +7294,7 @@
                         <a:buNone/>
                       </a:pPr>
                       <a:r>
-                        <a:rPr cap="none" sz="1100" i="0" b="0" u="none" strike="noStrike">
+                        <a:rPr sz="1100" b="0" i="0" u="none" strike="noStrike" cap="none">
                           <a:solidFill>
                             <a:srgbClr val="000000">
                               <a:alpha val="100000"/>
@@ -7119,15 +7302,14 @@
                           </a:solidFill>
                           <a:latin typeface="Helvetica"/>
                           <a:cs typeface="Helvetica"/>
-                          <a:ea typeface="Helvetica"/>
                           <a:sym typeface="Helvetica"/>
                         </a:rPr>
                         <a:t>Ichthyoplankton (eggs &amp; larvae)</a:t>
                       </a:r>
                     </a:p>
                   </a:txBody>
-                  <a:tcPr anchor="ctr" marB="50800" marT="50800" marR="0" marL="0">
-                    <a:lnL algn="ctr" cmpd="sng" cap="flat" w="9525">
+                  <a:tcPr marL="0" marR="0" marT="50800" marB="50800" anchor="ctr">
+                    <a:lnL w="9525" cap="flat" cmpd="sng" algn="ctr">
                       <a:solidFill>
                         <a:srgbClr val="666666">
                           <a:alpha val="100000"/>
@@ -7135,7 +7317,7 @@
                       </a:solidFill>
                       <a:prstDash val="solid"/>
                     </a:lnL>
-                    <a:lnR algn="ctr" cmpd="sng" cap="flat" w="9525">
+                    <a:lnR w="9525" cap="flat" cmpd="sng" algn="ctr">
                       <a:solidFill>
                         <a:srgbClr val="666666">
                           <a:alpha val="100000"/>
@@ -7143,11 +7325,16 @@
                       </a:solidFill>
                       <a:prstDash val="solid"/>
                     </a:lnR>
-                    <a:lnT algn="ctr" cmpd="sng" cap="flat" w="0">
-                      <a:noFill/>
-                      <a:prstDash val="solid"/>
+                    <a:lnT w="9525" cap="flat" cmpd="sng" algn="ctr">
+                      <a:solidFill>
+                        <a:srgbClr val="666666"/>
+                      </a:solidFill>
+                      <a:prstDash val="solid"/>
+                      <a:round/>
+                      <a:headEnd type="none" w="med" len="med"/>
+                      <a:tailEnd type="none" w="med" len="med"/>
                     </a:lnT>
-                    <a:lnB algn="ctr" cmpd="sng" cap="flat" w="9525">
+                    <a:lnB w="9525" cap="flat" cmpd="sng" algn="ctr">
                       <a:solidFill>
                         <a:srgbClr val="666666">
                           <a:alpha val="100000"/>
@@ -7167,7 +7354,7 @@
                     <a:bodyPr/>
                     <a:lstStyle/>
                     <a:p>
-                      <a:pPr algn="l" marL="50800" marR="50800">
+                      <a:pPr marL="50800" marR="50800" algn="l">
                         <a:lnSpc>
                           <a:spcPct val="100000"/>
                         </a:lnSpc>
@@ -7180,7 +7367,7 @@
                         <a:buNone/>
                       </a:pPr>
                       <a:r>
-                        <a:rPr cap="none" sz="1100" i="0" b="0" u="none" strike="noStrike">
+                        <a:rPr sz="1100" b="0" i="0" u="none" strike="noStrike" cap="none">
                           <a:solidFill>
                             <a:srgbClr val="000000">
                               <a:alpha val="100000"/>
@@ -7188,15 +7375,14 @@
                           </a:solidFill>
                           <a:latin typeface="Helvetica"/>
                           <a:cs typeface="Helvetica"/>
-                          <a:ea typeface="Helvetica"/>
                           <a:sym typeface="Helvetica"/>
                         </a:rPr>
                         <a:t>830K+ records</a:t>
                       </a:r>
                     </a:p>
                   </a:txBody>
-                  <a:tcPr anchor="ctr" marB="50800" marT="50800" marR="0" marL="0">
-                    <a:lnL algn="ctr" cmpd="sng" cap="flat" w="9525">
+                  <a:tcPr marL="0" marR="0" marT="50800" marB="50800" anchor="ctr">
+                    <a:lnL w="9525" cap="flat" cmpd="sng" algn="ctr">
                       <a:solidFill>
                         <a:srgbClr val="666666">
                           <a:alpha val="100000"/>
@@ -7204,7 +7390,7 @@
                       </a:solidFill>
                       <a:prstDash val="solid"/>
                     </a:lnL>
-                    <a:lnR algn="ctr" cmpd="sng" cap="flat" w="9525">
+                    <a:lnR w="9525" cap="flat" cmpd="sng" algn="ctr">
                       <a:solidFill>
                         <a:srgbClr val="666666">
                           <a:alpha val="100000"/>
@@ -7212,11 +7398,16 @@
                       </a:solidFill>
                       <a:prstDash val="solid"/>
                     </a:lnR>
-                    <a:lnT algn="ctr" cmpd="sng" cap="flat" w="0">
-                      <a:noFill/>
-                      <a:prstDash val="solid"/>
+                    <a:lnT w="9525" cap="flat" cmpd="sng" algn="ctr">
+                      <a:solidFill>
+                        <a:srgbClr val="666666"/>
+                      </a:solidFill>
+                      <a:prstDash val="solid"/>
+                      <a:round/>
+                      <a:headEnd type="none" w="med" len="med"/>
+                      <a:tailEnd type="none" w="med" len="med"/>
                     </a:lnT>
-                    <a:lnB algn="ctr" cmpd="sng" cap="flat" w="9525">
+                    <a:lnB w="9525" cap="flat" cmpd="sng" algn="ctr">
                       <a:solidFill>
                         <a:srgbClr val="666666">
                           <a:alpha val="100000"/>
@@ -7236,7 +7427,7 @@
                     <a:bodyPr/>
                     <a:lstStyle/>
                     <a:p>
-                      <a:pPr algn="l" marL="50800" marR="50800">
+                      <a:pPr marL="50800" marR="50800" algn="l">
                         <a:lnSpc>
                           <a:spcPct val="100000"/>
                         </a:lnSpc>
@@ -7249,7 +7440,7 @@
                         <a:buNone/>
                       </a:pPr>
                       <a:r>
-                        <a:rPr cap="none" sz="1100" i="0" b="0" u="none" strike="noStrike">
+                        <a:rPr sz="1100" b="0" i="0" u="none" strike="noStrike" cap="none">
                           <a:solidFill>
                             <a:srgbClr val="000000">
                               <a:alpha val="100000"/>
@@ -7257,15 +7448,14 @@
                           </a:solidFill>
                           <a:latin typeface="Helvetica"/>
                           <a:cs typeface="Helvetica"/>
-                          <a:ea typeface="Helvetica"/>
                           <a:sym typeface="Helvetica"/>
                         </a:rPr>
                         <a:t>must ✓</a:t>
                       </a:r>
                     </a:p>
                   </a:txBody>
-                  <a:tcPr anchor="ctr" marB="50800" marT="50800" marR="0" marL="0">
-                    <a:lnL algn="ctr" cmpd="sng" cap="flat" w="9525">
+                  <a:tcPr marL="0" marR="0" marT="50800" marB="50800" anchor="ctr">
+                    <a:lnL w="9525" cap="flat" cmpd="sng" algn="ctr">
                       <a:solidFill>
                         <a:srgbClr val="666666">
                           <a:alpha val="100000"/>
@@ -7273,7 +7463,7 @@
                       </a:solidFill>
                       <a:prstDash val="solid"/>
                     </a:lnL>
-                    <a:lnR algn="ctr" cmpd="sng" cap="flat" w="9525">
+                    <a:lnR w="9525" cap="flat" cmpd="sng" algn="ctr">
                       <a:solidFill>
                         <a:srgbClr val="666666">
                           <a:alpha val="100000"/>
@@ -7281,11 +7471,16 @@
                       </a:solidFill>
                       <a:prstDash val="solid"/>
                     </a:lnR>
-                    <a:lnT algn="ctr" cmpd="sng" cap="flat" w="0">
-                      <a:noFill/>
-                      <a:prstDash val="solid"/>
+                    <a:lnT w="9525" cap="flat" cmpd="sng" algn="ctr">
+                      <a:solidFill>
+                        <a:srgbClr val="666666"/>
+                      </a:solidFill>
+                      <a:prstDash val="solid"/>
+                      <a:round/>
+                      <a:headEnd type="none" w="med" len="med"/>
+                      <a:tailEnd type="none" w="med" len="med"/>
                     </a:lnT>
-                    <a:lnB algn="ctr" cmpd="sng" cap="flat" w="9525">
+                    <a:lnB w="9525" cap="flat" cmpd="sng" algn="ctr">
                       <a:solidFill>
                         <a:srgbClr val="666666">
                           <a:alpha val="100000"/>
@@ -7300,6 +7495,11 @@
                     </a:solidFill>
                   </a:tcPr>
                 </a:tc>
+                <a:extLst>
+                  <a:ext uri="{0D108BD9-81ED-4DB2-BD59-A6C34878D82A}">
+                    <a16:rowId xmlns:a16="http://schemas.microsoft.com/office/drawing/2014/main" val="10001"/>
+                  </a:ext>
+                </a:extLst>
               </a:tr>
               <a:tr h="358694">
                 <a:tc>
@@ -7307,7 +7507,7 @@
                     <a:bodyPr/>
                     <a:lstStyle/>
                     <a:p>
-                      <a:pPr algn="l" marL="50800" marR="50800">
+                      <a:pPr marL="50800" marR="50800" algn="l">
                         <a:lnSpc>
                           <a:spcPct val="100000"/>
                         </a:lnSpc>
@@ -7320,7 +7520,7 @@
                         <a:buNone/>
                       </a:pPr>
                       <a:r>
-                        <a:rPr cap="none" sz="1100" i="0" b="0" u="none" strike="noStrike">
+                        <a:rPr sz="1100" b="0" i="0" u="none" strike="noStrike" cap="none">
                           <a:solidFill>
                             <a:srgbClr val="000000">
                               <a:alpha val="100000"/>
@@ -7328,15 +7528,14 @@
                           </a:solidFill>
                           <a:latin typeface="Helvetica"/>
                           <a:cs typeface="Helvetica"/>
-                          <a:ea typeface="Helvetica"/>
                           <a:sym typeface="Helvetica"/>
                         </a:rPr>
                         <a:t>Bottle (hydro chemistry)</a:t>
                       </a:r>
                     </a:p>
                   </a:txBody>
-                  <a:tcPr anchor="ctr" marB="50800" marT="50800" marR="0" marL="0">
-                    <a:lnL algn="ctr" cmpd="sng" cap="flat" w="9525">
+                  <a:tcPr marL="0" marR="0" marT="50800" marB="50800" anchor="ctr">
+                    <a:lnL w="9525" cap="flat" cmpd="sng" algn="ctr">
                       <a:solidFill>
                         <a:srgbClr val="666666">
                           <a:alpha val="100000"/>
@@ -7344,7 +7543,7 @@
                       </a:solidFill>
                       <a:prstDash val="solid"/>
                     </a:lnL>
-                    <a:lnR algn="ctr" cmpd="sng" cap="flat" w="9525">
+                    <a:lnR w="9525" cap="flat" cmpd="sng" algn="ctr">
                       <a:solidFill>
                         <a:srgbClr val="666666">
                           <a:alpha val="100000"/>
@@ -7352,7 +7551,7 @@
                       </a:solidFill>
                       <a:prstDash val="solid"/>
                     </a:lnR>
-                    <a:lnT algn="ctr" cmpd="sng" cap="flat" w="9525">
+                    <a:lnT w="9525" cap="flat" cmpd="sng" algn="ctr">
                       <a:solidFill>
                         <a:srgbClr val="666666">
                           <a:alpha val="100000"/>
@@ -7360,7 +7559,7 @@
                       </a:solidFill>
                       <a:prstDash val="solid"/>
                     </a:lnT>
-                    <a:lnB algn="ctr" cmpd="sng" cap="flat" w="9525">
+                    <a:lnB w="9525" cap="flat" cmpd="sng" algn="ctr">
                       <a:solidFill>
                         <a:srgbClr val="666666">
                           <a:alpha val="100000"/>
@@ -7380,7 +7579,7 @@
                     <a:bodyPr/>
                     <a:lstStyle/>
                     <a:p>
-                      <a:pPr algn="l" marL="50800" marR="50800">
+                      <a:pPr marL="50800" marR="50800" algn="l">
                         <a:lnSpc>
                           <a:spcPct val="100000"/>
                         </a:lnSpc>
@@ -7393,7 +7592,7 @@
                         <a:buNone/>
                       </a:pPr>
                       <a:r>
-                        <a:rPr cap="none" sz="1100" i="0" b="0" u="none" strike="noStrike">
+                        <a:rPr sz="1100" b="0" i="0" u="none" strike="noStrike" cap="none">
                           <a:solidFill>
                             <a:srgbClr val="000000">
                               <a:alpha val="100000"/>
@@ -7401,15 +7600,14 @@
                           </a:solidFill>
                           <a:latin typeface="Helvetica"/>
                           <a:cs typeface="Helvetica"/>
-                          <a:ea typeface="Helvetica"/>
                           <a:sym typeface="Helvetica"/>
                         </a:rPr>
                         <a:t>11M+ measurements</a:t>
                       </a:r>
                     </a:p>
                   </a:txBody>
-                  <a:tcPr anchor="ctr" marB="50800" marT="50800" marR="0" marL="0">
-                    <a:lnL algn="ctr" cmpd="sng" cap="flat" w="9525">
+                  <a:tcPr marL="0" marR="0" marT="50800" marB="50800" anchor="ctr">
+                    <a:lnL w="9525" cap="flat" cmpd="sng" algn="ctr">
                       <a:solidFill>
                         <a:srgbClr val="666666">
                           <a:alpha val="100000"/>
@@ -7417,7 +7615,7 @@
                       </a:solidFill>
                       <a:prstDash val="solid"/>
                     </a:lnL>
-                    <a:lnR algn="ctr" cmpd="sng" cap="flat" w="9525">
+                    <a:lnR w="9525" cap="flat" cmpd="sng" algn="ctr">
                       <a:solidFill>
                         <a:srgbClr val="666666">
                           <a:alpha val="100000"/>
@@ -7425,7 +7623,7 @@
                       </a:solidFill>
                       <a:prstDash val="solid"/>
                     </a:lnR>
-                    <a:lnT algn="ctr" cmpd="sng" cap="flat" w="9525">
+                    <a:lnT w="9525" cap="flat" cmpd="sng" algn="ctr">
                       <a:solidFill>
                         <a:srgbClr val="666666">
                           <a:alpha val="100000"/>
@@ -7433,7 +7631,7 @@
                       </a:solidFill>
                       <a:prstDash val="solid"/>
                     </a:lnT>
-                    <a:lnB algn="ctr" cmpd="sng" cap="flat" w="9525">
+                    <a:lnB w="9525" cap="flat" cmpd="sng" algn="ctr">
                       <a:solidFill>
                         <a:srgbClr val="666666">
                           <a:alpha val="100000"/>
@@ -7453,7 +7651,7 @@
                     <a:bodyPr/>
                     <a:lstStyle/>
                     <a:p>
-                      <a:pPr algn="l" marL="50800" marR="50800">
+                      <a:pPr marL="50800" marR="50800" algn="l">
                         <a:lnSpc>
                           <a:spcPct val="100000"/>
                         </a:lnSpc>
@@ -7466,7 +7664,7 @@
                         <a:buNone/>
                       </a:pPr>
                       <a:r>
-                        <a:rPr cap="none" sz="1100" i="0" b="0" u="none" strike="noStrike">
+                        <a:rPr sz="1100" b="0" i="0" u="none" strike="noStrike" cap="none">
                           <a:solidFill>
                             <a:srgbClr val="000000">
                               <a:alpha val="100000"/>
@@ -7474,15 +7672,14 @@
                           </a:solidFill>
                           <a:latin typeface="Helvetica"/>
                           <a:cs typeface="Helvetica"/>
-                          <a:ea typeface="Helvetica"/>
                           <a:sym typeface="Helvetica"/>
                         </a:rPr>
                         <a:t>must ✓</a:t>
                       </a:r>
                     </a:p>
                   </a:txBody>
-                  <a:tcPr anchor="ctr" marB="50800" marT="50800" marR="0" marL="0">
-                    <a:lnL algn="ctr" cmpd="sng" cap="flat" w="9525">
+                  <a:tcPr marL="0" marR="0" marT="50800" marB="50800" anchor="ctr">
+                    <a:lnL w="9525" cap="flat" cmpd="sng" algn="ctr">
                       <a:solidFill>
                         <a:srgbClr val="666666">
                           <a:alpha val="100000"/>
@@ -7490,7 +7687,7 @@
                       </a:solidFill>
                       <a:prstDash val="solid"/>
                     </a:lnL>
-                    <a:lnR algn="ctr" cmpd="sng" cap="flat" w="9525">
+                    <a:lnR w="9525" cap="flat" cmpd="sng" algn="ctr">
                       <a:solidFill>
                         <a:srgbClr val="666666">
                           <a:alpha val="100000"/>
@@ -7498,7 +7695,7 @@
                       </a:solidFill>
                       <a:prstDash val="solid"/>
                     </a:lnR>
-                    <a:lnT algn="ctr" cmpd="sng" cap="flat" w="9525">
+                    <a:lnT w="9525" cap="flat" cmpd="sng" algn="ctr">
                       <a:solidFill>
                         <a:srgbClr val="666666">
                           <a:alpha val="100000"/>
@@ -7506,7 +7703,7 @@
                       </a:solidFill>
                       <a:prstDash val="solid"/>
                     </a:lnT>
-                    <a:lnB algn="ctr" cmpd="sng" cap="flat" w="9525">
+                    <a:lnB w="9525" cap="flat" cmpd="sng" algn="ctr">
                       <a:solidFill>
                         <a:srgbClr val="666666">
                           <a:alpha val="100000"/>
@@ -7521,6 +7718,11 @@
                     </a:solidFill>
                   </a:tcPr>
                 </a:tc>
+                <a:extLst>
+                  <a:ext uri="{0D108BD9-81ED-4DB2-BD59-A6C34878D82A}">
+                    <a16:rowId xmlns:a16="http://schemas.microsoft.com/office/drawing/2014/main" val="10002"/>
+                  </a:ext>
+                </a:extLst>
               </a:tr>
               <a:tr h="357262">
                 <a:tc>
@@ -7528,7 +7730,7 @@
                     <a:bodyPr/>
                     <a:lstStyle/>
                     <a:p>
-                      <a:pPr algn="l" marL="50800" marR="50800">
+                      <a:pPr marL="50800" marR="50800" algn="l">
                         <a:lnSpc>
                           <a:spcPct val="100000"/>
                         </a:lnSpc>
@@ -7541,7 +7743,7 @@
                         <a:buNone/>
                       </a:pPr>
                       <a:r>
-                        <a:rPr cap="none" sz="1100" i="0" b="0" u="none" strike="noStrike">
+                        <a:rPr sz="1100" b="0" i="0" u="none" strike="noStrike" cap="none">
                           <a:solidFill>
                             <a:srgbClr val="000000">
                               <a:alpha val="100000"/>
@@ -7549,15 +7751,14 @@
                           </a:solidFill>
                           <a:latin typeface="Helvetica"/>
                           <a:cs typeface="Helvetica"/>
-                          <a:ea typeface="Helvetica"/>
                           <a:sym typeface="Helvetica"/>
                         </a:rPr>
                         <a:t>CTD casts</a:t>
                       </a:r>
                     </a:p>
                   </a:txBody>
-                  <a:tcPr anchor="ctr" marB="50800" marT="50800" marR="0" marL="0">
-                    <a:lnL algn="ctr" cmpd="sng" cap="flat" w="9525">
+                  <a:tcPr marL="0" marR="0" marT="50800" marB="50800" anchor="ctr">
+                    <a:lnL w="9525" cap="flat" cmpd="sng" algn="ctr">
                       <a:solidFill>
                         <a:srgbClr val="666666">
                           <a:alpha val="100000"/>
@@ -7565,7 +7766,7 @@
                       </a:solidFill>
                       <a:prstDash val="solid"/>
                     </a:lnL>
-                    <a:lnR algn="ctr" cmpd="sng" cap="flat" w="9525">
+                    <a:lnR w="9525" cap="flat" cmpd="sng" algn="ctr">
                       <a:solidFill>
                         <a:srgbClr val="666666">
                           <a:alpha val="100000"/>
@@ -7573,7 +7774,7 @@
                       </a:solidFill>
                       <a:prstDash val="solid"/>
                     </a:lnR>
-                    <a:lnT algn="ctr" cmpd="sng" cap="flat" w="9525">
+                    <a:lnT w="9525" cap="flat" cmpd="sng" algn="ctr">
                       <a:solidFill>
                         <a:srgbClr val="666666">
                           <a:alpha val="100000"/>
@@ -7581,7 +7782,7 @@
                       </a:solidFill>
                       <a:prstDash val="solid"/>
                     </a:lnT>
-                    <a:lnB algn="ctr" cmpd="sng" cap="flat" w="9525">
+                    <a:lnB w="9525" cap="flat" cmpd="sng" algn="ctr">
                       <a:solidFill>
                         <a:srgbClr val="666666">
                           <a:alpha val="100000"/>
@@ -7601,7 +7802,7 @@
                     <a:bodyPr/>
                     <a:lstStyle/>
                     <a:p>
-                      <a:pPr algn="l" marL="50800" marR="50800">
+                      <a:pPr marL="50800" marR="50800" algn="l">
                         <a:lnSpc>
                           <a:spcPct val="100000"/>
                         </a:lnSpc>
@@ -7614,7 +7815,7 @@
                         <a:buNone/>
                       </a:pPr>
                       <a:r>
-                        <a:rPr cap="none" sz="1100" i="0" b="0" u="none" strike="noStrike">
+                        <a:rPr sz="1100" b="0" i="0" u="none" strike="noStrike" cap="none">
                           <a:solidFill>
                             <a:srgbClr val="000000">
                               <a:alpha val="100000"/>
@@ -7622,15 +7823,14 @@
                           </a:solidFill>
                           <a:latin typeface="Helvetica"/>
                           <a:cs typeface="Helvetica"/>
-                          <a:ea typeface="Helvetica"/>
                           <a:sym typeface="Helvetica"/>
                         </a:rPr>
                         <a:t>ctd_thin 5.5M (234M source)</a:t>
                       </a:r>
                     </a:p>
                   </a:txBody>
-                  <a:tcPr anchor="ctr" marB="50800" marT="50800" marR="0" marL="0">
-                    <a:lnL algn="ctr" cmpd="sng" cap="flat" w="9525">
+                  <a:tcPr marL="0" marR="0" marT="50800" marB="50800" anchor="ctr">
+                    <a:lnL w="9525" cap="flat" cmpd="sng" algn="ctr">
                       <a:solidFill>
                         <a:srgbClr val="666666">
                           <a:alpha val="100000"/>
@@ -7638,7 +7838,7 @@
                       </a:solidFill>
                       <a:prstDash val="solid"/>
                     </a:lnL>
-                    <a:lnR algn="ctr" cmpd="sng" cap="flat" w="9525">
+                    <a:lnR w="9525" cap="flat" cmpd="sng" algn="ctr">
                       <a:solidFill>
                         <a:srgbClr val="666666">
                           <a:alpha val="100000"/>
@@ -7646,7 +7846,7 @@
                       </a:solidFill>
                       <a:prstDash val="solid"/>
                     </a:lnR>
-                    <a:lnT algn="ctr" cmpd="sng" cap="flat" w="9525">
+                    <a:lnT w="9525" cap="flat" cmpd="sng" algn="ctr">
                       <a:solidFill>
                         <a:srgbClr val="666666">
                           <a:alpha val="100000"/>
@@ -7654,7 +7854,7 @@
                       </a:solidFill>
                       <a:prstDash val="solid"/>
                     </a:lnT>
-                    <a:lnB algn="ctr" cmpd="sng" cap="flat" w="9525">
+                    <a:lnB w="9525" cap="flat" cmpd="sng" algn="ctr">
                       <a:solidFill>
                         <a:srgbClr val="666666">
                           <a:alpha val="100000"/>
@@ -7674,7 +7874,7 @@
                     <a:bodyPr/>
                     <a:lstStyle/>
                     <a:p>
-                      <a:pPr algn="l" marL="50800" marR="50800">
+                      <a:pPr marL="50800" marR="50800" algn="l">
                         <a:lnSpc>
                           <a:spcPct val="100000"/>
                         </a:lnSpc>
@@ -7687,7 +7887,7 @@
                         <a:buNone/>
                       </a:pPr>
                       <a:r>
-                        <a:rPr cap="none" sz="1100" i="0" b="0" u="none" strike="noStrike">
+                        <a:rPr sz="1100" b="0" i="0" u="none" strike="noStrike" cap="none">
                           <a:solidFill>
                             <a:srgbClr val="000000">
                               <a:alpha val="100000"/>
@@ -7695,15 +7895,14 @@
                           </a:solidFill>
                           <a:latin typeface="Helvetica"/>
                           <a:cs typeface="Helvetica"/>
-                          <a:ea typeface="Helvetica"/>
                           <a:sym typeface="Helvetica"/>
                         </a:rPr>
                         <a:t>must ✓</a:t>
                       </a:r>
                     </a:p>
                   </a:txBody>
-                  <a:tcPr anchor="ctr" marB="50800" marT="50800" marR="0" marL="0">
-                    <a:lnL algn="ctr" cmpd="sng" cap="flat" w="9525">
+                  <a:tcPr marL="0" marR="0" marT="50800" marB="50800" anchor="ctr">
+                    <a:lnL w="9525" cap="flat" cmpd="sng" algn="ctr">
                       <a:solidFill>
                         <a:srgbClr val="666666">
                           <a:alpha val="100000"/>
@@ -7711,7 +7910,7 @@
                       </a:solidFill>
                       <a:prstDash val="solid"/>
                     </a:lnL>
-                    <a:lnR algn="ctr" cmpd="sng" cap="flat" w="9525">
+                    <a:lnR w="9525" cap="flat" cmpd="sng" algn="ctr">
                       <a:solidFill>
                         <a:srgbClr val="666666">
                           <a:alpha val="100000"/>
@@ -7719,7 +7918,7 @@
                       </a:solidFill>
                       <a:prstDash val="solid"/>
                     </a:lnR>
-                    <a:lnT algn="ctr" cmpd="sng" cap="flat" w="9525">
+                    <a:lnT w="9525" cap="flat" cmpd="sng" algn="ctr">
                       <a:solidFill>
                         <a:srgbClr val="666666">
                           <a:alpha val="100000"/>
@@ -7727,7 +7926,7 @@
                       </a:solidFill>
                       <a:prstDash val="solid"/>
                     </a:lnT>
-                    <a:lnB algn="ctr" cmpd="sng" cap="flat" w="9525">
+                    <a:lnB w="9525" cap="flat" cmpd="sng" algn="ctr">
                       <a:solidFill>
                         <a:srgbClr val="666666">
                           <a:alpha val="100000"/>
@@ -7742,6 +7941,11 @@
                     </a:solidFill>
                   </a:tcPr>
                 </a:tc>
+                <a:extLst>
+                  <a:ext uri="{0D108BD9-81ED-4DB2-BD59-A6C34878D82A}">
+                    <a16:rowId xmlns:a16="http://schemas.microsoft.com/office/drawing/2014/main" val="10003"/>
+                  </a:ext>
+                </a:extLst>
               </a:tr>
               <a:tr h="359785">
                 <a:tc>
@@ -7749,7 +7953,7 @@
                     <a:bodyPr/>
                     <a:lstStyle/>
                     <a:p>
-                      <a:pPr algn="l" marL="50800" marR="50800">
+                      <a:pPr marL="50800" marR="50800" algn="l">
                         <a:lnSpc>
                           <a:spcPct val="100000"/>
                         </a:lnSpc>
@@ -7762,7 +7966,7 @@
                         <a:buNone/>
                       </a:pPr>
                       <a:r>
-                        <a:rPr cap="none" sz="1100" i="0" b="0" u="none" strike="noStrike">
+                        <a:rPr sz="1100" b="0" i="0" u="none" strike="noStrike" cap="none">
                           <a:solidFill>
                             <a:srgbClr val="000000">
                               <a:alpha val="100000"/>
@@ -7770,15 +7974,14 @@
                           </a:solidFill>
                           <a:latin typeface="Helvetica"/>
                           <a:cs typeface="Helvetica"/>
-                          <a:ea typeface="Helvetica"/>
                           <a:sym typeface="Helvetica"/>
                         </a:rPr>
                         <a:t>DIC / carbonate chemistry</a:t>
                       </a:r>
                     </a:p>
                   </a:txBody>
-                  <a:tcPr anchor="ctr" marB="50800" marT="50800" marR="0" marL="0">
-                    <a:lnL algn="ctr" cmpd="sng" cap="flat" w="9525">
+                  <a:tcPr marL="0" marR="0" marT="50800" marB="50800" anchor="ctr">
+                    <a:lnL w="9525" cap="flat" cmpd="sng" algn="ctr">
                       <a:solidFill>
                         <a:srgbClr val="666666">
                           <a:alpha val="100000"/>
@@ -7786,7 +7989,7 @@
                       </a:solidFill>
                       <a:prstDash val="solid"/>
                     </a:lnL>
-                    <a:lnR algn="ctr" cmpd="sng" cap="flat" w="9525">
+                    <a:lnR w="9525" cap="flat" cmpd="sng" algn="ctr">
                       <a:solidFill>
                         <a:srgbClr val="666666">
                           <a:alpha val="100000"/>
@@ -7794,7 +7997,7 @@
                       </a:solidFill>
                       <a:prstDash val="solid"/>
                     </a:lnR>
-                    <a:lnT algn="ctr" cmpd="sng" cap="flat" w="9525">
+                    <a:lnT w="9525" cap="flat" cmpd="sng" algn="ctr">
                       <a:solidFill>
                         <a:srgbClr val="666666">
                           <a:alpha val="100000"/>
@@ -7802,7 +8005,7 @@
                       </a:solidFill>
                       <a:prstDash val="solid"/>
                     </a:lnT>
-                    <a:lnB algn="ctr" cmpd="sng" cap="flat" w="9525">
+                    <a:lnB w="9525" cap="flat" cmpd="sng" algn="ctr">
                       <a:solidFill>
                         <a:srgbClr val="666666">
                           <a:alpha val="100000"/>
@@ -7822,7 +8025,7 @@
                     <a:bodyPr/>
                     <a:lstStyle/>
                     <a:p>
-                      <a:pPr algn="l" marL="50800" marR="50800">
+                      <a:pPr marL="50800" marR="50800" algn="l">
                         <a:lnSpc>
                           <a:spcPct val="100000"/>
                         </a:lnSpc>
@@ -7835,7 +8038,7 @@
                         <a:buNone/>
                       </a:pPr>
                       <a:r>
-                        <a:rPr cap="none" sz="1100" i="0" b="0" u="none" strike="noStrike">
+                        <a:rPr sz="1100" b="0" i="0" u="none" strike="noStrike" cap="none">
                           <a:solidFill>
                             <a:srgbClr val="000000">
                               <a:alpha val="100000"/>
@@ -7843,15 +8046,14 @@
                           </a:solidFill>
                           <a:latin typeface="Helvetica"/>
                           <a:cs typeface="Helvetica"/>
-                          <a:ea typeface="Helvetica"/>
                           <a:sym typeface="Helvetica"/>
                         </a:rPr>
                         <a:t>8.3K measurements</a:t>
                       </a:r>
                     </a:p>
                   </a:txBody>
-                  <a:tcPr anchor="ctr" marB="50800" marT="50800" marR="0" marL="0">
-                    <a:lnL algn="ctr" cmpd="sng" cap="flat" w="9525">
+                  <a:tcPr marL="0" marR="0" marT="50800" marB="50800" anchor="ctr">
+                    <a:lnL w="9525" cap="flat" cmpd="sng" algn="ctr">
                       <a:solidFill>
                         <a:srgbClr val="666666">
                           <a:alpha val="100000"/>
@@ -7859,7 +8061,7 @@
                       </a:solidFill>
                       <a:prstDash val="solid"/>
                     </a:lnL>
-                    <a:lnR algn="ctr" cmpd="sng" cap="flat" w="9525">
+                    <a:lnR w="9525" cap="flat" cmpd="sng" algn="ctr">
                       <a:solidFill>
                         <a:srgbClr val="666666">
                           <a:alpha val="100000"/>
@@ -7867,7 +8069,7 @@
                       </a:solidFill>
                       <a:prstDash val="solid"/>
                     </a:lnR>
-                    <a:lnT algn="ctr" cmpd="sng" cap="flat" w="9525">
+                    <a:lnT w="9525" cap="flat" cmpd="sng" algn="ctr">
                       <a:solidFill>
                         <a:srgbClr val="666666">
                           <a:alpha val="100000"/>
@@ -7875,7 +8077,7 @@
                       </a:solidFill>
                       <a:prstDash val="solid"/>
                     </a:lnT>
-                    <a:lnB algn="ctr" cmpd="sng" cap="flat" w="9525">
+                    <a:lnB w="9525" cap="flat" cmpd="sng" algn="ctr">
                       <a:solidFill>
                         <a:srgbClr val="666666">
                           <a:alpha val="100000"/>
@@ -7895,7 +8097,7 @@
                     <a:bodyPr/>
                     <a:lstStyle/>
                     <a:p>
-                      <a:pPr algn="l" marL="50800" marR="50800">
+                      <a:pPr marL="50800" marR="50800" algn="l">
                         <a:lnSpc>
                           <a:spcPct val="100000"/>
                         </a:lnSpc>
@@ -7908,7 +8110,7 @@
                         <a:buNone/>
                       </a:pPr>
                       <a:r>
-                        <a:rPr cap="none" sz="1100" i="0" b="0" u="none" strike="noStrike">
+                        <a:rPr sz="1100" b="0" i="0" u="none" strike="noStrike" cap="none">
                           <a:solidFill>
                             <a:srgbClr val="000000">
                               <a:alpha val="100000"/>
@@ -7916,15 +8118,14 @@
                           </a:solidFill>
                           <a:latin typeface="Helvetica"/>
                           <a:cs typeface="Helvetica"/>
-                          <a:ea typeface="Helvetica"/>
                           <a:sym typeface="Helvetica"/>
                         </a:rPr>
                         <a:t>must ✓</a:t>
                       </a:r>
                     </a:p>
                   </a:txBody>
-                  <a:tcPr anchor="ctr" marB="50800" marT="50800" marR="0" marL="0">
-                    <a:lnL algn="ctr" cmpd="sng" cap="flat" w="9525">
+                  <a:tcPr marL="0" marR="0" marT="50800" marB="50800" anchor="ctr">
+                    <a:lnL w="9525" cap="flat" cmpd="sng" algn="ctr">
                       <a:solidFill>
                         <a:srgbClr val="666666">
                           <a:alpha val="100000"/>
@@ -7932,7 +8133,7 @@
                       </a:solidFill>
                       <a:prstDash val="solid"/>
                     </a:lnL>
-                    <a:lnR algn="ctr" cmpd="sng" cap="flat" w="9525">
+                    <a:lnR w="9525" cap="flat" cmpd="sng" algn="ctr">
                       <a:solidFill>
                         <a:srgbClr val="666666">
                           <a:alpha val="100000"/>
@@ -7940,7 +8141,7 @@
                       </a:solidFill>
                       <a:prstDash val="solid"/>
                     </a:lnR>
-                    <a:lnT algn="ctr" cmpd="sng" cap="flat" w="9525">
+                    <a:lnT w="9525" cap="flat" cmpd="sng" algn="ctr">
                       <a:solidFill>
                         <a:srgbClr val="666666">
                           <a:alpha val="100000"/>
@@ -7948,7 +8149,7 @@
                       </a:solidFill>
                       <a:prstDash val="solid"/>
                     </a:lnT>
-                    <a:lnB algn="ctr" cmpd="sng" cap="flat" w="9525">
+                    <a:lnB w="9525" cap="flat" cmpd="sng" algn="ctr">
                       <a:solidFill>
                         <a:srgbClr val="666666">
                           <a:alpha val="100000"/>
@@ -7963,6 +8164,11 @@
                     </a:solidFill>
                   </a:tcPr>
                 </a:tc>
+                <a:extLst>
+                  <a:ext uri="{0D108BD9-81ED-4DB2-BD59-A6C34878D82A}">
+                    <a16:rowId xmlns:a16="http://schemas.microsoft.com/office/drawing/2014/main" val="10004"/>
+                  </a:ext>
+                </a:extLst>
               </a:tr>
               <a:tr h="356579">
                 <a:tc>
@@ -7970,7 +8176,7 @@
                     <a:bodyPr/>
                     <a:lstStyle/>
                     <a:p>
-                      <a:pPr algn="l" marL="50800" marR="50800">
+                      <a:pPr marL="50800" marR="50800" algn="l">
                         <a:lnSpc>
                           <a:spcPct val="100000"/>
                         </a:lnSpc>
@@ -7983,7 +8189,7 @@
                         <a:buNone/>
                       </a:pPr>
                       <a:r>
-                        <a:rPr cap="none" sz="1100" i="0" b="0" u="none" strike="noStrike">
+                        <a:rPr sz="1100" b="0" i="0" u="none" strike="noStrike" cap="none">
                           <a:solidFill>
                             <a:srgbClr val="000000">
                               <a:alpha val="100000"/>
@@ -7991,15 +8197,14 @@
                           </a:solidFill>
                           <a:latin typeface="Helvetica"/>
                           <a:cs typeface="Helvetica"/>
-                          <a:ea typeface="Helvetica"/>
                           <a:sym typeface="Helvetica"/>
                         </a:rPr>
                         <a:t>Krill / euphausiids</a:t>
                       </a:r>
                     </a:p>
                   </a:txBody>
-                  <a:tcPr anchor="ctr" marB="50800" marT="50800" marR="0" marL="0">
-                    <a:lnL algn="ctr" cmpd="sng" cap="flat" w="9525">
+                  <a:tcPr marL="0" marR="0" marT="50800" marB="50800" anchor="ctr">
+                    <a:lnL w="9525" cap="flat" cmpd="sng" algn="ctr">
                       <a:solidFill>
                         <a:srgbClr val="666666">
                           <a:alpha val="100000"/>
@@ -8007,7 +8212,7 @@
                       </a:solidFill>
                       <a:prstDash val="solid"/>
                     </a:lnL>
-                    <a:lnR algn="ctr" cmpd="sng" cap="flat" w="9525">
+                    <a:lnR w="9525" cap="flat" cmpd="sng" algn="ctr">
                       <a:solidFill>
                         <a:srgbClr val="666666">
                           <a:alpha val="100000"/>
@@ -8015,7 +8220,7 @@
                       </a:solidFill>
                       <a:prstDash val="solid"/>
                     </a:lnR>
-                    <a:lnT algn="ctr" cmpd="sng" cap="flat" w="9525">
+                    <a:lnT w="9525" cap="flat" cmpd="sng" algn="ctr">
                       <a:solidFill>
                         <a:srgbClr val="666666">
                           <a:alpha val="100000"/>
@@ -8023,7 +8228,7 @@
                       </a:solidFill>
                       <a:prstDash val="solid"/>
                     </a:lnT>
-                    <a:lnB algn="ctr" cmpd="sng" cap="flat" w="9525">
+                    <a:lnB w="9525" cap="flat" cmpd="sng" algn="ctr">
                       <a:solidFill>
                         <a:srgbClr val="666666">
                           <a:alpha val="100000"/>
@@ -8043,7 +8248,7 @@
                     <a:bodyPr/>
                     <a:lstStyle/>
                     <a:p>
-                      <a:pPr algn="l" marL="50800" marR="50800">
+                      <a:pPr marL="50800" marR="50800" algn="l">
                         <a:lnSpc>
                           <a:spcPct val="100000"/>
                         </a:lnSpc>
@@ -8056,7 +8261,7 @@
                         <a:buNone/>
                       </a:pPr>
                       <a:r>
-                        <a:rPr cap="none" sz="1100" i="0" b="0" u="none" strike="noStrike">
+                        <a:rPr sz="1100" b="0" i="0" u="none" strike="noStrike" cap="none">
                           <a:solidFill>
                             <a:srgbClr val="000000">
                               <a:alpha val="100000"/>
@@ -8064,15 +8269,14 @@
                           </a:solidFill>
                           <a:latin typeface="Helvetica"/>
                           <a:cs typeface="Helvetica"/>
-                          <a:ea typeface="Helvetica"/>
                           <a:sym typeface="Helvetica"/>
                         </a:rPr>
                         <a:t>10K tows</a:t>
                       </a:r>
                     </a:p>
                   </a:txBody>
-                  <a:tcPr anchor="ctr" marB="50800" marT="50800" marR="0" marL="0">
-                    <a:lnL algn="ctr" cmpd="sng" cap="flat" w="9525">
+                  <a:tcPr marL="0" marR="0" marT="50800" marB="50800" anchor="ctr">
+                    <a:lnL w="9525" cap="flat" cmpd="sng" algn="ctr">
                       <a:solidFill>
                         <a:srgbClr val="666666">
                           <a:alpha val="100000"/>
@@ -8080,7 +8284,7 @@
                       </a:solidFill>
                       <a:prstDash val="solid"/>
                     </a:lnL>
-                    <a:lnR algn="ctr" cmpd="sng" cap="flat" w="9525">
+                    <a:lnR w="9525" cap="flat" cmpd="sng" algn="ctr">
                       <a:solidFill>
                         <a:srgbClr val="666666">
                           <a:alpha val="100000"/>
@@ -8088,7 +8292,7 @@
                       </a:solidFill>
                       <a:prstDash val="solid"/>
                     </a:lnR>
-                    <a:lnT algn="ctr" cmpd="sng" cap="flat" w="9525">
+                    <a:lnT w="9525" cap="flat" cmpd="sng" algn="ctr">
                       <a:solidFill>
                         <a:srgbClr val="666666">
                           <a:alpha val="100000"/>
@@ -8096,7 +8300,7 @@
                       </a:solidFill>
                       <a:prstDash val="solid"/>
                     </a:lnT>
-                    <a:lnB algn="ctr" cmpd="sng" cap="flat" w="9525">
+                    <a:lnB w="9525" cap="flat" cmpd="sng" algn="ctr">
                       <a:solidFill>
                         <a:srgbClr val="666666">
                           <a:alpha val="100000"/>
@@ -8116,7 +8320,7 @@
                     <a:bodyPr/>
                     <a:lstStyle/>
                     <a:p>
-                      <a:pPr algn="l" marL="50800" marR="50800">
+                      <a:pPr marL="50800" marR="50800" algn="l">
                         <a:lnSpc>
                           <a:spcPct val="100000"/>
                         </a:lnSpc>
@@ -8129,7 +8333,7 @@
                         <a:buNone/>
                       </a:pPr>
                       <a:r>
-                        <a:rPr cap="none" sz="1100" i="0" b="0" u="none" strike="noStrike">
+                        <a:rPr sz="1100" b="0" i="0" u="none" strike="noStrike" cap="none">
                           <a:solidFill>
                             <a:srgbClr val="000000">
                               <a:alpha val="100000"/>
@@ -8137,15 +8341,14 @@
                           </a:solidFill>
                           <a:latin typeface="Helvetica"/>
                           <a:cs typeface="Helvetica"/>
-                          <a:ea typeface="Helvetica"/>
                           <a:sym typeface="Helvetica"/>
                         </a:rPr>
                         <a:t>must ✓</a:t>
                       </a:r>
                     </a:p>
                   </a:txBody>
-                  <a:tcPr anchor="ctr" marB="50800" marT="50800" marR="0" marL="0">
-                    <a:lnL algn="ctr" cmpd="sng" cap="flat" w="9525">
+                  <a:tcPr marL="0" marR="0" marT="50800" marB="50800" anchor="ctr">
+                    <a:lnL w="9525" cap="flat" cmpd="sng" algn="ctr">
                       <a:solidFill>
                         <a:srgbClr val="666666">
                           <a:alpha val="100000"/>
@@ -8153,7 +8356,7 @@
                       </a:solidFill>
                       <a:prstDash val="solid"/>
                     </a:lnL>
-                    <a:lnR algn="ctr" cmpd="sng" cap="flat" w="9525">
+                    <a:lnR w="9525" cap="flat" cmpd="sng" algn="ctr">
                       <a:solidFill>
                         <a:srgbClr val="666666">
                           <a:alpha val="100000"/>
@@ -8161,7 +8364,7 @@
                       </a:solidFill>
                       <a:prstDash val="solid"/>
                     </a:lnR>
-                    <a:lnT algn="ctr" cmpd="sng" cap="flat" w="9525">
+                    <a:lnT w="9525" cap="flat" cmpd="sng" algn="ctr">
                       <a:solidFill>
                         <a:srgbClr val="666666">
                           <a:alpha val="100000"/>
@@ -8169,7 +8372,7 @@
                       </a:solidFill>
                       <a:prstDash val="solid"/>
                     </a:lnT>
-                    <a:lnB algn="ctr" cmpd="sng" cap="flat" w="9525">
+                    <a:lnB w="9525" cap="flat" cmpd="sng" algn="ctr">
                       <a:solidFill>
                         <a:srgbClr val="666666">
                           <a:alpha val="100000"/>
@@ -8184,6 +8387,11 @@
                     </a:solidFill>
                   </a:tcPr>
                 </a:tc>
+                <a:extLst>
+                  <a:ext uri="{0D108BD9-81ED-4DB2-BD59-A6C34878D82A}">
+                    <a16:rowId xmlns:a16="http://schemas.microsoft.com/office/drawing/2014/main" val="10005"/>
+                  </a:ext>
+                </a:extLst>
               </a:tr>
               <a:tr h="358353">
                 <a:tc>
@@ -8191,7 +8399,7 @@
                     <a:bodyPr/>
                     <a:lstStyle/>
                     <a:p>
-                      <a:pPr algn="l" marL="50800" marR="50800">
+                      <a:pPr marL="50800" marR="50800" algn="l">
                         <a:lnSpc>
                           <a:spcPct val="100000"/>
                         </a:lnSpc>
@@ -8204,7 +8412,7 @@
                         <a:buNone/>
                       </a:pPr>
                       <a:r>
-                        <a:rPr cap="none" sz="1100" i="0" b="0" u="none" strike="noStrike">
+                        <a:rPr sz="1100" b="0" i="0" u="none" strike="noStrike" cap="none">
                           <a:solidFill>
                             <a:srgbClr val="000000">
                               <a:alpha val="100000"/>
@@ -8212,15 +8420,14 @@
                           </a:solidFill>
                           <a:latin typeface="Helvetica"/>
                           <a:cs typeface="Helvetica"/>
-                          <a:ea typeface="Helvetica"/>
                           <a:sym typeface="Helvetica"/>
                         </a:rPr>
                         <a:t>Zooplankton tows</a:t>
                       </a:r>
                     </a:p>
                   </a:txBody>
-                  <a:tcPr anchor="ctr" marB="50800" marT="50800" marR="0" marL="0">
-                    <a:lnL algn="ctr" cmpd="sng" cap="flat" w="9525">
+                  <a:tcPr marL="0" marR="0" marT="50800" marB="50800" anchor="ctr">
+                    <a:lnL w="9525" cap="flat" cmpd="sng" algn="ctr">
                       <a:solidFill>
                         <a:srgbClr val="666666">
                           <a:alpha val="100000"/>
@@ -8228,7 +8435,7 @@
                       </a:solidFill>
                       <a:prstDash val="solid"/>
                     </a:lnL>
-                    <a:lnR algn="ctr" cmpd="sng" cap="flat" w="9525">
+                    <a:lnR w="9525" cap="flat" cmpd="sng" algn="ctr">
                       <a:solidFill>
                         <a:srgbClr val="666666">
                           <a:alpha val="100000"/>
@@ -8236,7 +8443,7 @@
                       </a:solidFill>
                       <a:prstDash val="solid"/>
                     </a:lnR>
-                    <a:lnT algn="ctr" cmpd="sng" cap="flat" w="9525">
+                    <a:lnT w="9525" cap="flat" cmpd="sng" algn="ctr">
                       <a:solidFill>
                         <a:srgbClr val="666666">
                           <a:alpha val="100000"/>
@@ -8244,7 +8451,7 @@
                       </a:solidFill>
                       <a:prstDash val="solid"/>
                     </a:lnT>
-                    <a:lnB algn="ctr" cmpd="sng" cap="flat" w="9525">
+                    <a:lnB w="9525" cap="flat" cmpd="sng" algn="ctr">
                       <a:solidFill>
                         <a:srgbClr val="666666">
                           <a:alpha val="100000"/>
@@ -8264,7 +8471,7 @@
                     <a:bodyPr/>
                     <a:lstStyle/>
                     <a:p>
-                      <a:pPr algn="l" marL="50800" marR="50800">
+                      <a:pPr marL="50800" marR="50800" algn="l">
                         <a:lnSpc>
                           <a:spcPct val="100000"/>
                         </a:lnSpc>
@@ -8277,7 +8484,7 @@
                         <a:buNone/>
                       </a:pPr>
                       <a:r>
-                        <a:rPr cap="none" sz="1100" i="0" b="0" u="none" strike="noStrike">
+                        <a:rPr sz="1100" b="0" i="0" u="none" strike="noStrike" cap="none">
                           <a:solidFill>
                             <a:srgbClr val="000000">
                               <a:alpha val="100000"/>
@@ -8285,15 +8492,14 @@
                           </a:solidFill>
                           <a:latin typeface="Helvetica"/>
                           <a:cs typeface="Helvetica"/>
-                          <a:ea typeface="Helvetica"/>
                           <a:sym typeface="Helvetica"/>
                         </a:rPr>
                         <a:t>99.5K tows</a:t>
                       </a:r>
                     </a:p>
                   </a:txBody>
-                  <a:tcPr anchor="ctr" marB="50800" marT="50800" marR="0" marL="0">
-                    <a:lnL algn="ctr" cmpd="sng" cap="flat" w="9525">
+                  <a:tcPr marL="0" marR="0" marT="50800" marB="50800" anchor="ctr">
+                    <a:lnL w="9525" cap="flat" cmpd="sng" algn="ctr">
                       <a:solidFill>
                         <a:srgbClr val="666666">
                           <a:alpha val="100000"/>
@@ -8301,7 +8507,7 @@
                       </a:solidFill>
                       <a:prstDash val="solid"/>
                     </a:lnL>
-                    <a:lnR algn="ctr" cmpd="sng" cap="flat" w="9525">
+                    <a:lnR w="9525" cap="flat" cmpd="sng" algn="ctr">
                       <a:solidFill>
                         <a:srgbClr val="666666">
                           <a:alpha val="100000"/>
@@ -8309,7 +8515,7 @@
                       </a:solidFill>
                       <a:prstDash val="solid"/>
                     </a:lnR>
-                    <a:lnT algn="ctr" cmpd="sng" cap="flat" w="9525">
+                    <a:lnT w="9525" cap="flat" cmpd="sng" algn="ctr">
                       <a:solidFill>
                         <a:srgbClr val="666666">
                           <a:alpha val="100000"/>
@@ -8317,7 +8523,7 @@
                       </a:solidFill>
                       <a:prstDash val="solid"/>
                     </a:lnT>
-                    <a:lnB algn="ctr" cmpd="sng" cap="flat" w="9525">
+                    <a:lnB w="9525" cap="flat" cmpd="sng" algn="ctr">
                       <a:solidFill>
                         <a:srgbClr val="666666">
                           <a:alpha val="100000"/>
@@ -8337,7 +8543,7 @@
                     <a:bodyPr/>
                     <a:lstStyle/>
                     <a:p>
-                      <a:pPr algn="l" marL="50800" marR="50800">
+                      <a:pPr marL="50800" marR="50800" algn="l">
                         <a:lnSpc>
                           <a:spcPct val="100000"/>
                         </a:lnSpc>
@@ -8350,7 +8556,7 @@
                         <a:buNone/>
                       </a:pPr>
                       <a:r>
-                        <a:rPr cap="none" sz="1100" i="0" b="0" u="none" strike="noStrike">
+                        <a:rPr sz="1100" b="0" i="0" u="none" strike="noStrike" cap="none">
                           <a:solidFill>
                             <a:srgbClr val="000000">
                               <a:alpha val="100000"/>
@@ -8358,15 +8564,14 @@
                           </a:solidFill>
                           <a:latin typeface="Helvetica"/>
                           <a:cs typeface="Helvetica"/>
-                          <a:ea typeface="Helvetica"/>
                           <a:sym typeface="Helvetica"/>
                         </a:rPr>
                         <a:t>◑ biovol pending</a:t>
                       </a:r>
                     </a:p>
                   </a:txBody>
-                  <a:tcPr anchor="ctr" marB="50800" marT="50800" marR="0" marL="0">
-                    <a:lnL algn="ctr" cmpd="sng" cap="flat" w="9525">
+                  <a:tcPr marL="0" marR="0" marT="50800" marB="50800" anchor="ctr">
+                    <a:lnL w="9525" cap="flat" cmpd="sng" algn="ctr">
                       <a:solidFill>
                         <a:srgbClr val="666666">
                           <a:alpha val="100000"/>
@@ -8374,7 +8579,7 @@
                       </a:solidFill>
                       <a:prstDash val="solid"/>
                     </a:lnL>
-                    <a:lnR algn="ctr" cmpd="sng" cap="flat" w="9525">
+                    <a:lnR w="9525" cap="flat" cmpd="sng" algn="ctr">
                       <a:solidFill>
                         <a:srgbClr val="666666">
                           <a:alpha val="100000"/>
@@ -8382,7 +8587,7 @@
                       </a:solidFill>
                       <a:prstDash val="solid"/>
                     </a:lnR>
-                    <a:lnT algn="ctr" cmpd="sng" cap="flat" w="9525">
+                    <a:lnT w="9525" cap="flat" cmpd="sng" algn="ctr">
                       <a:solidFill>
                         <a:srgbClr val="666666">
                           <a:alpha val="100000"/>
@@ -8390,7 +8595,7 @@
                       </a:solidFill>
                       <a:prstDash val="solid"/>
                     </a:lnT>
-                    <a:lnB algn="ctr" cmpd="sng" cap="flat" w="9525">
+                    <a:lnB w="9525" cap="flat" cmpd="sng" algn="ctr">
                       <a:solidFill>
                         <a:srgbClr val="666666">
                           <a:alpha val="100000"/>
@@ -8405,6 +8610,11 @@
                     </a:solidFill>
                   </a:tcPr>
                 </a:tc>
+                <a:extLst>
+                  <a:ext uri="{0D108BD9-81ED-4DB2-BD59-A6C34878D82A}">
+                    <a16:rowId xmlns:a16="http://schemas.microsoft.com/office/drawing/2014/main" val="10006"/>
+                  </a:ext>
+                </a:extLst>
               </a:tr>
               <a:tr h="359785">
                 <a:tc>
@@ -8412,7 +8622,7 @@
                     <a:bodyPr/>
                     <a:lstStyle/>
                     <a:p>
-                      <a:pPr algn="l" marL="50800" marR="50800">
+                      <a:pPr marL="50800" marR="50800" algn="l">
                         <a:lnSpc>
                           <a:spcPct val="100000"/>
                         </a:lnSpc>
@@ -8425,7 +8635,7 @@
                         <a:buNone/>
                       </a:pPr>
                       <a:r>
-                        <a:rPr cap="none" sz="1100" i="0" b="0" u="none" strike="noStrike">
+                        <a:rPr sz="1100" b="0" i="0" u="none" strike="noStrike" cap="none">
                           <a:solidFill>
                             <a:srgbClr val="000000">
                               <a:alpha val="100000"/>
@@ -8433,15 +8643,14 @@
                           </a:solidFill>
                           <a:latin typeface="Helvetica"/>
                           <a:cs typeface="Helvetica"/>
-                          <a:ea typeface="Helvetica"/>
                           <a:sym typeface="Helvetica"/>
                         </a:rPr>
                         <a:t>Underway CUFES</a:t>
                       </a:r>
                     </a:p>
                   </a:txBody>
-                  <a:tcPr anchor="ctr" marB="50800" marT="50800" marR="0" marL="0">
-                    <a:lnL algn="ctr" cmpd="sng" cap="flat" w="9525">
+                  <a:tcPr marL="0" marR="0" marT="50800" marB="50800" anchor="ctr">
+                    <a:lnL w="9525" cap="flat" cmpd="sng" algn="ctr">
                       <a:solidFill>
                         <a:srgbClr val="666666">
                           <a:alpha val="100000"/>
@@ -8449,7 +8658,7 @@
                       </a:solidFill>
                       <a:prstDash val="solid"/>
                     </a:lnL>
-                    <a:lnR algn="ctr" cmpd="sng" cap="flat" w="9525">
+                    <a:lnR w="9525" cap="flat" cmpd="sng" algn="ctr">
                       <a:solidFill>
                         <a:srgbClr val="666666">
                           <a:alpha val="100000"/>
@@ -8457,7 +8666,7 @@
                       </a:solidFill>
                       <a:prstDash val="solid"/>
                     </a:lnR>
-                    <a:lnT algn="ctr" cmpd="sng" cap="flat" w="9525">
+                    <a:lnT w="9525" cap="flat" cmpd="sng" algn="ctr">
                       <a:solidFill>
                         <a:srgbClr val="666666">
                           <a:alpha val="100000"/>
@@ -8465,7 +8674,7 @@
                       </a:solidFill>
                       <a:prstDash val="solid"/>
                     </a:lnT>
-                    <a:lnB algn="ctr" cmpd="sng" cap="flat" w="9525">
+                    <a:lnB w="9525" cap="flat" cmpd="sng" algn="ctr">
                       <a:solidFill>
                         <a:srgbClr val="666666">
                           <a:alpha val="100000"/>
@@ -8485,7 +8694,7 @@
                     <a:bodyPr/>
                     <a:lstStyle/>
                     <a:p>
-                      <a:pPr algn="l" marL="50800" marR="50800">
+                      <a:pPr marL="50800" marR="50800" algn="l">
                         <a:lnSpc>
                           <a:spcPct val="100000"/>
                         </a:lnSpc>
@@ -8498,7 +8707,7 @@
                         <a:buNone/>
                       </a:pPr>
                       <a:r>
-                        <a:rPr cap="none" sz="1100" i="0" b="0" u="none" strike="noStrike">
+                        <a:rPr sz="1100" b="0" i="0" u="none" strike="noStrike" cap="none">
                           <a:solidFill>
                             <a:srgbClr val="000000">
                               <a:alpha val="100000"/>
@@ -8506,15 +8715,14 @@
                           </a:solidFill>
                           <a:latin typeface="Helvetica"/>
                           <a:cs typeface="Helvetica"/>
-                          <a:ea typeface="Helvetica"/>
                           <a:sym typeface="Helvetica"/>
                         </a:rPr>
                         <a:t>49.5K samples</a:t>
                       </a:r>
                     </a:p>
                   </a:txBody>
-                  <a:tcPr anchor="ctr" marB="50800" marT="50800" marR="0" marL="0">
-                    <a:lnL algn="ctr" cmpd="sng" cap="flat" w="9525">
+                  <a:tcPr marL="0" marR="0" marT="50800" marB="50800" anchor="ctr">
+                    <a:lnL w="9525" cap="flat" cmpd="sng" algn="ctr">
                       <a:solidFill>
                         <a:srgbClr val="666666">
                           <a:alpha val="100000"/>
@@ -8522,7 +8730,7 @@
                       </a:solidFill>
                       <a:prstDash val="solid"/>
                     </a:lnL>
-                    <a:lnR algn="ctr" cmpd="sng" cap="flat" w="9525">
+                    <a:lnR w="9525" cap="flat" cmpd="sng" algn="ctr">
                       <a:solidFill>
                         <a:srgbClr val="666666">
                           <a:alpha val="100000"/>
@@ -8530,7 +8738,7 @@
                       </a:solidFill>
                       <a:prstDash val="solid"/>
                     </a:lnR>
-                    <a:lnT algn="ctr" cmpd="sng" cap="flat" w="9525">
+                    <a:lnT w="9525" cap="flat" cmpd="sng" algn="ctr">
                       <a:solidFill>
                         <a:srgbClr val="666666">
                           <a:alpha val="100000"/>
@@ -8538,7 +8746,7 @@
                       </a:solidFill>
                       <a:prstDash val="solid"/>
                     </a:lnT>
-                    <a:lnB algn="ctr" cmpd="sng" cap="flat" w="9525">
+                    <a:lnB w="9525" cap="flat" cmpd="sng" algn="ctr">
                       <a:solidFill>
                         <a:srgbClr val="666666">
                           <a:alpha val="100000"/>
@@ -8558,7 +8766,7 @@
                     <a:bodyPr/>
                     <a:lstStyle/>
                     <a:p>
-                      <a:pPr algn="l" marL="50800" marR="50800">
+                      <a:pPr marL="50800" marR="50800" algn="l">
                         <a:lnSpc>
                           <a:spcPct val="100000"/>
                         </a:lnSpc>
@@ -8571,7 +8779,7 @@
                         <a:buNone/>
                       </a:pPr>
                       <a:r>
-                        <a:rPr cap="none" sz="1100" i="0" b="0" u="none" strike="noStrike">
+                        <a:rPr sz="1100" b="0" i="0" u="none" strike="noStrike" cap="none">
                           <a:solidFill>
                             <a:srgbClr val="000000">
                               <a:alpha val="100000"/>
@@ -8579,15 +8787,14 @@
                           </a:solidFill>
                           <a:latin typeface="Helvetica"/>
                           <a:cs typeface="Helvetica"/>
-                          <a:ea typeface="Helvetica"/>
                           <a:sym typeface="Helvetica"/>
                         </a:rPr>
                         <a:t>✓</a:t>
                       </a:r>
                     </a:p>
                   </a:txBody>
-                  <a:tcPr anchor="ctr" marB="50800" marT="50800" marR="0" marL="0">
-                    <a:lnL algn="ctr" cmpd="sng" cap="flat" w="9525">
+                  <a:tcPr marL="0" marR="0" marT="50800" marB="50800" anchor="ctr">
+                    <a:lnL w="9525" cap="flat" cmpd="sng" algn="ctr">
                       <a:solidFill>
                         <a:srgbClr val="666666">
                           <a:alpha val="100000"/>
@@ -8595,7 +8802,7 @@
                       </a:solidFill>
                       <a:prstDash val="solid"/>
                     </a:lnL>
-                    <a:lnR algn="ctr" cmpd="sng" cap="flat" w="9525">
+                    <a:lnR w="9525" cap="flat" cmpd="sng" algn="ctr">
                       <a:solidFill>
                         <a:srgbClr val="666666">
                           <a:alpha val="100000"/>
@@ -8603,7 +8810,7 @@
                       </a:solidFill>
                       <a:prstDash val="solid"/>
                     </a:lnR>
-                    <a:lnT algn="ctr" cmpd="sng" cap="flat" w="9525">
+                    <a:lnT w="9525" cap="flat" cmpd="sng" algn="ctr">
                       <a:solidFill>
                         <a:srgbClr val="666666">
                           <a:alpha val="100000"/>
@@ -8611,7 +8818,7 @@
                       </a:solidFill>
                       <a:prstDash val="solid"/>
                     </a:lnT>
-                    <a:lnB algn="ctr" cmpd="sng" cap="flat" w="9525">
+                    <a:lnB w="9525" cap="flat" cmpd="sng" algn="ctr">
                       <a:solidFill>
                         <a:srgbClr val="666666">
                           <a:alpha val="100000"/>
@@ -8626,6 +8833,11 @@
                     </a:solidFill>
                   </a:tcPr>
                 </a:tc>
+                <a:extLst>
+                  <a:ext uri="{0D108BD9-81ED-4DB2-BD59-A6C34878D82A}">
+                    <a16:rowId xmlns:a16="http://schemas.microsoft.com/office/drawing/2014/main" val="10007"/>
+                  </a:ext>
+                </a:extLst>
               </a:tr>
               <a:tr h="357398">
                 <a:tc>
@@ -8633,7 +8845,7 @@
                     <a:bodyPr/>
                     <a:lstStyle/>
                     <a:p>
-                      <a:pPr algn="l" marL="50800" marR="50800">
+                      <a:pPr marL="50800" marR="50800" algn="l">
                         <a:lnSpc>
                           <a:spcPct val="100000"/>
                         </a:lnSpc>
@@ -8646,7 +8858,7 @@
                         <a:buNone/>
                       </a:pPr>
                       <a:r>
-                        <a:rPr cap="none" sz="1100" i="0" b="0" u="none" strike="noStrike">
+                        <a:rPr sz="1100" b="0" i="0" u="none" strike="noStrike" cap="none">
                           <a:solidFill>
                             <a:srgbClr val="000000">
                               <a:alpha val="100000"/>
@@ -8654,15 +8866,14 @@
                           </a:solidFill>
                           <a:latin typeface="Helvetica"/>
                           <a:cs typeface="Helvetica"/>
-                          <a:ea typeface="Helvetica"/>
                           <a:sym typeface="Helvetica"/>
                         </a:rPr>
                         <a:t>Lobster phyllosoma</a:t>
                       </a:r>
                     </a:p>
                   </a:txBody>
-                  <a:tcPr anchor="ctr" marB="50800" marT="50800" marR="0" marL="0">
-                    <a:lnL algn="ctr" cmpd="sng" cap="flat" w="9525">
+                  <a:tcPr marL="0" marR="0" marT="50800" marB="50800" anchor="ctr">
+                    <a:lnL w="9525" cap="flat" cmpd="sng" algn="ctr">
                       <a:solidFill>
                         <a:srgbClr val="666666">
                           <a:alpha val="100000"/>
@@ -8670,7 +8881,7 @@
                       </a:solidFill>
                       <a:prstDash val="solid"/>
                     </a:lnL>
-                    <a:lnR algn="ctr" cmpd="sng" cap="flat" w="9525">
+                    <a:lnR w="9525" cap="flat" cmpd="sng" algn="ctr">
                       <a:solidFill>
                         <a:srgbClr val="666666">
                           <a:alpha val="100000"/>
@@ -8678,7 +8889,7 @@
                       </a:solidFill>
                       <a:prstDash val="solid"/>
                     </a:lnR>
-                    <a:lnT algn="ctr" cmpd="sng" cap="flat" w="9525">
+                    <a:lnT w="9525" cap="flat" cmpd="sng" algn="ctr">
                       <a:solidFill>
                         <a:srgbClr val="666666">
                           <a:alpha val="100000"/>
@@ -8686,7 +8897,7 @@
                       </a:solidFill>
                       <a:prstDash val="solid"/>
                     </a:lnT>
-                    <a:lnB algn="ctr" cmpd="sng" cap="flat" w="9525">
+                    <a:lnB w="9525" cap="flat" cmpd="sng" algn="ctr">
                       <a:solidFill>
                         <a:srgbClr val="666666">
                           <a:alpha val="100000"/>
@@ -8706,7 +8917,7 @@
                     <a:bodyPr/>
                     <a:lstStyle/>
                     <a:p>
-                      <a:pPr algn="l" marL="50800" marR="50800">
+                      <a:pPr marL="50800" marR="50800" algn="l">
                         <a:lnSpc>
                           <a:spcPct val="100000"/>
                         </a:lnSpc>
@@ -8719,7 +8930,7 @@
                         <a:buNone/>
                       </a:pPr>
                       <a:r>
-                        <a:rPr cap="none" sz="1100" i="0" b="0" u="none" strike="noStrike">
+                        <a:rPr sz="1100" b="0" i="0" u="none" strike="noStrike" cap="none">
                           <a:solidFill>
                             <a:srgbClr val="000000">
                               <a:alpha val="100000"/>
@@ -8727,15 +8938,14 @@
                           </a:solidFill>
                           <a:latin typeface="Helvetica"/>
                           <a:cs typeface="Helvetica"/>
-                          <a:ea typeface="Helvetica"/>
                           <a:sym typeface="Helvetica"/>
                         </a:rPr>
                         <a:t>1.9K tows</a:t>
                       </a:r>
                     </a:p>
                   </a:txBody>
-                  <a:tcPr anchor="ctr" marB="50800" marT="50800" marR="0" marL="0">
-                    <a:lnL algn="ctr" cmpd="sng" cap="flat" w="9525">
+                  <a:tcPr marL="0" marR="0" marT="50800" marB="50800" anchor="ctr">
+                    <a:lnL w="9525" cap="flat" cmpd="sng" algn="ctr">
                       <a:solidFill>
                         <a:srgbClr val="666666">
                           <a:alpha val="100000"/>
@@ -8743,7 +8953,7 @@
                       </a:solidFill>
                       <a:prstDash val="solid"/>
                     </a:lnL>
-                    <a:lnR algn="ctr" cmpd="sng" cap="flat" w="9525">
+                    <a:lnR w="9525" cap="flat" cmpd="sng" algn="ctr">
                       <a:solidFill>
                         <a:srgbClr val="666666">
                           <a:alpha val="100000"/>
@@ -8751,7 +8961,7 @@
                       </a:solidFill>
                       <a:prstDash val="solid"/>
                     </a:lnR>
-                    <a:lnT algn="ctr" cmpd="sng" cap="flat" w="9525">
+                    <a:lnT w="9525" cap="flat" cmpd="sng" algn="ctr">
                       <a:solidFill>
                         <a:srgbClr val="666666">
                           <a:alpha val="100000"/>
@@ -8759,7 +8969,7 @@
                       </a:solidFill>
                       <a:prstDash val="solid"/>
                     </a:lnT>
-                    <a:lnB algn="ctr" cmpd="sng" cap="flat" w="9525">
+                    <a:lnB w="9525" cap="flat" cmpd="sng" algn="ctr">
                       <a:solidFill>
                         <a:srgbClr val="666666">
                           <a:alpha val="100000"/>
@@ -8779,7 +8989,7 @@
                     <a:bodyPr/>
                     <a:lstStyle/>
                     <a:p>
-                      <a:pPr algn="l" marL="50800" marR="50800">
+                      <a:pPr marL="50800" marR="50800" algn="l">
                         <a:lnSpc>
                           <a:spcPct val="100000"/>
                         </a:lnSpc>
@@ -8792,7 +9002,7 @@
                         <a:buNone/>
                       </a:pPr>
                       <a:r>
-                        <a:rPr cap="none" sz="1100" i="0" b="0" u="none" strike="noStrike">
+                        <a:rPr sz="1100" b="0" i="0" u="none" strike="noStrike" cap="none">
                           <a:solidFill>
                             <a:srgbClr val="000000">
                               <a:alpha val="100000"/>
@@ -8800,15 +9010,14 @@
                           </a:solidFill>
                           <a:latin typeface="Helvetica"/>
                           <a:cs typeface="Helvetica"/>
-                          <a:ea typeface="Helvetica"/>
                           <a:sym typeface="Helvetica"/>
                         </a:rPr>
                         <a:t>must ✓</a:t>
                       </a:r>
                     </a:p>
                   </a:txBody>
-                  <a:tcPr anchor="ctr" marB="50800" marT="50800" marR="0" marL="0">
-                    <a:lnL algn="ctr" cmpd="sng" cap="flat" w="9525">
+                  <a:tcPr marL="0" marR="0" marT="50800" marB="50800" anchor="ctr">
+                    <a:lnL w="9525" cap="flat" cmpd="sng" algn="ctr">
                       <a:solidFill>
                         <a:srgbClr val="666666">
                           <a:alpha val="100000"/>
@@ -8816,7 +9025,7 @@
                       </a:solidFill>
                       <a:prstDash val="solid"/>
                     </a:lnL>
-                    <a:lnR algn="ctr" cmpd="sng" cap="flat" w="9525">
+                    <a:lnR w="9525" cap="flat" cmpd="sng" algn="ctr">
                       <a:solidFill>
                         <a:srgbClr val="666666">
                           <a:alpha val="100000"/>
@@ -8824,7 +9033,7 @@
                       </a:solidFill>
                       <a:prstDash val="solid"/>
                     </a:lnR>
-                    <a:lnT algn="ctr" cmpd="sng" cap="flat" w="9525">
+                    <a:lnT w="9525" cap="flat" cmpd="sng" algn="ctr">
                       <a:solidFill>
                         <a:srgbClr val="666666">
                           <a:alpha val="100000"/>
@@ -8832,7 +9041,7 @@
                       </a:solidFill>
                       <a:prstDash val="solid"/>
                     </a:lnT>
-                    <a:lnB algn="ctr" cmpd="sng" cap="flat" w="9525">
+                    <a:lnB w="9525" cap="flat" cmpd="sng" algn="ctr">
                       <a:solidFill>
                         <a:srgbClr val="666666">
                           <a:alpha val="100000"/>
@@ -8847,6 +9056,11 @@
                     </a:solidFill>
                   </a:tcPr>
                 </a:tc>
+                <a:extLst>
+                  <a:ext uri="{0D108BD9-81ED-4DB2-BD59-A6C34878D82A}">
+                    <a16:rowId xmlns:a16="http://schemas.microsoft.com/office/drawing/2014/main" val="10008"/>
+                  </a:ext>
+                </a:extLst>
               </a:tr>
               <a:tr h="332773">
                 <a:tc>
@@ -8854,7 +9068,7 @@
                     <a:bodyPr/>
                     <a:lstStyle/>
                     <a:p>
-                      <a:pPr algn="l" marL="50800" marR="50800">
+                      <a:pPr marL="50800" marR="50800" algn="l">
                         <a:lnSpc>
                           <a:spcPct val="100000"/>
                         </a:lnSpc>
@@ -8867,7 +9081,7 @@
                         <a:buNone/>
                       </a:pPr>
                       <a:r>
-                        <a:rPr cap="none" sz="1100" i="0" b="0" u="none" strike="noStrike">
+                        <a:rPr sz="1100" b="0" i="0" u="none" strike="noStrike" cap="none">
                           <a:solidFill>
                             <a:srgbClr val="000000">
                               <a:alpha val="100000"/>
@@ -8875,15 +9089,14 @@
                           </a:solidFill>
                           <a:latin typeface="Helvetica"/>
                           <a:cs typeface="Helvetica"/>
-                          <a:ea typeface="Helvetica"/>
                           <a:sym typeface="Helvetica"/>
                         </a:rPr>
                         <a:t>Seabird &amp; mammal census</a:t>
                       </a:r>
                     </a:p>
                   </a:txBody>
-                  <a:tcPr anchor="ctr" marB="50800" marT="50800" marR="0" marL="0">
-                    <a:lnL algn="ctr" cmpd="sng" cap="flat" w="9525">
+                  <a:tcPr marL="0" marR="0" marT="50800" marB="50800" anchor="ctr">
+                    <a:lnL w="9525" cap="flat" cmpd="sng" algn="ctr">
                       <a:solidFill>
                         <a:srgbClr val="666666">
                           <a:alpha val="100000"/>
@@ -8891,7 +9104,7 @@
                       </a:solidFill>
                       <a:prstDash val="solid"/>
                     </a:lnL>
-                    <a:lnR algn="ctr" cmpd="sng" cap="flat" w="9525">
+                    <a:lnR w="9525" cap="flat" cmpd="sng" algn="ctr">
                       <a:solidFill>
                         <a:srgbClr val="666666">
                           <a:alpha val="100000"/>
@@ -8899,7 +9112,7 @@
                       </a:solidFill>
                       <a:prstDash val="solid"/>
                     </a:lnR>
-                    <a:lnT algn="ctr" cmpd="sng" cap="flat" w="9525">
+                    <a:lnT w="9525" cap="flat" cmpd="sng" algn="ctr">
                       <a:solidFill>
                         <a:srgbClr val="666666">
                           <a:alpha val="100000"/>
@@ -8907,7 +9120,7 @@
                       </a:solidFill>
                       <a:prstDash val="solid"/>
                     </a:lnT>
-                    <a:lnB algn="ctr" cmpd="sng" cap="flat" w="9525">
+                    <a:lnB w="9525" cap="flat" cmpd="sng" algn="ctr">
                       <a:solidFill>
                         <a:srgbClr val="666666">
                           <a:alpha val="100000"/>
@@ -8927,7 +9140,7 @@
                     <a:bodyPr/>
                     <a:lstStyle/>
                     <a:p>
-                      <a:pPr algn="l" marL="50800" marR="50800">
+                      <a:pPr marL="50800" marR="50800" algn="l">
                         <a:lnSpc>
                           <a:spcPct val="100000"/>
                         </a:lnSpc>
@@ -8940,7 +9153,7 @@
                         <a:buNone/>
                       </a:pPr>
                       <a:r>
-                        <a:rPr cap="none" sz="1100" i="0" b="0" u="none" strike="noStrike">
+                        <a:rPr sz="1100" b="0" i="0" u="none" strike="noStrike" cap="none">
                           <a:solidFill>
                             <a:srgbClr val="000000">
                               <a:alpha val="100000"/>
@@ -8948,15 +9161,14 @@
                           </a:solidFill>
                           <a:latin typeface="Helvetica"/>
                           <a:cs typeface="Helvetica"/>
-                          <a:ea typeface="Helvetica"/>
                           <a:sym typeface="Helvetica"/>
                         </a:rPr>
                         <a:t>60.7K observations</a:t>
                       </a:r>
                     </a:p>
                   </a:txBody>
-                  <a:tcPr anchor="ctr" marB="50800" marT="50800" marR="0" marL="0">
-                    <a:lnL algn="ctr" cmpd="sng" cap="flat" w="9525">
+                  <a:tcPr marL="0" marR="0" marT="50800" marB="50800" anchor="ctr">
+                    <a:lnL w="9525" cap="flat" cmpd="sng" algn="ctr">
                       <a:solidFill>
                         <a:srgbClr val="666666">
                           <a:alpha val="100000"/>
@@ -8964,7 +9176,7 @@
                       </a:solidFill>
                       <a:prstDash val="solid"/>
                     </a:lnL>
-                    <a:lnR algn="ctr" cmpd="sng" cap="flat" w="9525">
+                    <a:lnR w="9525" cap="flat" cmpd="sng" algn="ctr">
                       <a:solidFill>
                         <a:srgbClr val="666666">
                           <a:alpha val="100000"/>
@@ -8972,7 +9184,7 @@
                       </a:solidFill>
                       <a:prstDash val="solid"/>
                     </a:lnR>
-                    <a:lnT algn="ctr" cmpd="sng" cap="flat" w="9525">
+                    <a:lnT w="9525" cap="flat" cmpd="sng" algn="ctr">
                       <a:solidFill>
                         <a:srgbClr val="666666">
                           <a:alpha val="100000"/>
@@ -8980,7 +9192,7 @@
                       </a:solidFill>
                       <a:prstDash val="solid"/>
                     </a:lnT>
-                    <a:lnB algn="ctr" cmpd="sng" cap="flat" w="9525">
+                    <a:lnB w="9525" cap="flat" cmpd="sng" algn="ctr">
                       <a:solidFill>
                         <a:srgbClr val="666666">
                           <a:alpha val="100000"/>
@@ -9000,7 +9212,7 @@
                     <a:bodyPr/>
                     <a:lstStyle/>
                     <a:p>
-                      <a:pPr algn="l" marL="50800" marR="50800">
+                      <a:pPr marL="50800" marR="50800" algn="l">
                         <a:lnSpc>
                           <a:spcPct val="100000"/>
                         </a:lnSpc>
@@ -9013,7 +9225,7 @@
                         <a:buNone/>
                       </a:pPr>
                       <a:r>
-                        <a:rPr cap="none" sz="1100" i="0" b="0" u="none" strike="noStrike">
+                        <a:rPr sz="1100" b="0" i="0" u="none" strike="noStrike" cap="none">
                           <a:solidFill>
                             <a:srgbClr val="000000">
                               <a:alpha val="100000"/>
@@ -9021,15 +9233,14 @@
                           </a:solidFill>
                           <a:latin typeface="Helvetica"/>
                           <a:cs typeface="Helvetica"/>
-                          <a:ea typeface="Helvetica"/>
                           <a:sym typeface="Helvetica"/>
                         </a:rPr>
                         <a:t>✓</a:t>
                       </a:r>
                     </a:p>
                   </a:txBody>
-                  <a:tcPr anchor="ctr" marB="50800" marT="50800" marR="0" marL="0">
-                    <a:lnL algn="ctr" cmpd="sng" cap="flat" w="9525">
+                  <a:tcPr marL="0" marR="0" marT="50800" marB="50800" anchor="ctr">
+                    <a:lnL w="9525" cap="flat" cmpd="sng" algn="ctr">
                       <a:solidFill>
                         <a:srgbClr val="666666">
                           <a:alpha val="100000"/>
@@ -9037,7 +9248,7 @@
                       </a:solidFill>
                       <a:prstDash val="solid"/>
                     </a:lnL>
-                    <a:lnR algn="ctr" cmpd="sng" cap="flat" w="9525">
+                    <a:lnR w="9525" cap="flat" cmpd="sng" algn="ctr">
                       <a:solidFill>
                         <a:srgbClr val="666666">
                           <a:alpha val="100000"/>
@@ -9045,7 +9256,7 @@
                       </a:solidFill>
                       <a:prstDash val="solid"/>
                     </a:lnR>
-                    <a:lnT algn="ctr" cmpd="sng" cap="flat" w="9525">
+                    <a:lnT w="9525" cap="flat" cmpd="sng" algn="ctr">
                       <a:solidFill>
                         <a:srgbClr val="666666">
                           <a:alpha val="100000"/>
@@ -9053,7 +9264,7 @@
                       </a:solidFill>
                       <a:prstDash val="solid"/>
                     </a:lnT>
-                    <a:lnB algn="ctr" cmpd="sng" cap="flat" w="9525">
+                    <a:lnB w="9525" cap="flat" cmpd="sng" algn="ctr">
                       <a:solidFill>
                         <a:srgbClr val="666666">
                           <a:alpha val="100000"/>
@@ -9068,6 +9279,11 @@
                     </a:solidFill>
                   </a:tcPr>
                 </a:tc>
+                <a:extLst>
+                  <a:ext uri="{0D108BD9-81ED-4DB2-BD59-A6C34878D82A}">
+                    <a16:rowId xmlns:a16="http://schemas.microsoft.com/office/drawing/2014/main" val="10009"/>
+                  </a:ext>
+                </a:extLst>
               </a:tr>
               <a:tr h="358694">
                 <a:tc>
@@ -9075,7 +9291,7 @@
                     <a:bodyPr/>
                     <a:lstStyle/>
                     <a:p>
-                      <a:pPr algn="l" marL="50800" marR="50800">
+                      <a:pPr marL="50800" marR="50800" algn="l">
                         <a:lnSpc>
                           <a:spcPct val="100000"/>
                         </a:lnSpc>
@@ -9088,7 +9304,7 @@
                         <a:buNone/>
                       </a:pPr>
                       <a:r>
-                        <a:rPr cap="none" sz="1100" i="0" b="0" u="none" strike="noStrike">
+                        <a:rPr sz="1100" b="0" i="0" u="none" strike="noStrike" cap="none">
                           <a:solidFill>
                             <a:srgbClr val="000000">
                               <a:alpha val="100000"/>
@@ -9096,15 +9312,14 @@
                           </a:solidFill>
                           <a:latin typeface="Helvetica"/>
                           <a:cs typeface="Helvetica"/>
-                          <a:ea typeface="Helvetica"/>
                           <a:sym typeface="Helvetica"/>
                         </a:rPr>
                         <a:t>Phytoplankton (Venrick)</a:t>
                       </a:r>
                     </a:p>
                   </a:txBody>
-                  <a:tcPr anchor="ctr" marB="50800" marT="50800" marR="0" marL="0">
-                    <a:lnL algn="ctr" cmpd="sng" cap="flat" w="9525">
+                  <a:tcPr marL="0" marR="0" marT="50800" marB="50800" anchor="ctr">
+                    <a:lnL w="9525" cap="flat" cmpd="sng" algn="ctr">
                       <a:solidFill>
                         <a:srgbClr val="666666">
                           <a:alpha val="100000"/>
@@ -9112,7 +9327,7 @@
                       </a:solidFill>
                       <a:prstDash val="solid"/>
                     </a:lnL>
-                    <a:lnR algn="ctr" cmpd="sng" cap="flat" w="9525">
+                    <a:lnR w="9525" cap="flat" cmpd="sng" algn="ctr">
                       <a:solidFill>
                         <a:srgbClr val="666666">
                           <a:alpha val="100000"/>
@@ -9120,7 +9335,7 @@
                       </a:solidFill>
                       <a:prstDash val="solid"/>
                     </a:lnR>
-                    <a:lnT algn="ctr" cmpd="sng" cap="flat" w="9525">
+                    <a:lnT w="9525" cap="flat" cmpd="sng" algn="ctr">
                       <a:solidFill>
                         <a:srgbClr val="666666">
                           <a:alpha val="100000"/>
@@ -9128,7 +9343,7 @@
                       </a:solidFill>
                       <a:prstDash val="solid"/>
                     </a:lnT>
-                    <a:lnB algn="ctr" cmpd="sng" cap="flat" w="9525">
+                    <a:lnB w="9525" cap="flat" cmpd="sng" algn="ctr">
                       <a:solidFill>
                         <a:srgbClr val="666666">
                           <a:alpha val="100000"/>
@@ -9148,7 +9363,7 @@
                     <a:bodyPr/>
                     <a:lstStyle/>
                     <a:p>
-                      <a:pPr algn="l" marL="50800" marR="50800">
+                      <a:pPr marL="50800" marR="50800" algn="l">
                         <a:lnSpc>
                           <a:spcPct val="100000"/>
                         </a:lnSpc>
@@ -9161,7 +9376,7 @@
                         <a:buNone/>
                       </a:pPr>
                       <a:r>
-                        <a:rPr cap="none" sz="1100" i="0" b="0" u="none" strike="noStrike">
+                        <a:rPr sz="1100" b="0" i="0" u="none" strike="noStrike" cap="none">
                           <a:solidFill>
                             <a:srgbClr val="000000">
                               <a:alpha val="100000"/>
@@ -9169,15 +9384,14 @@
                           </a:solidFill>
                           <a:latin typeface="Helvetica"/>
                           <a:cs typeface="Helvetica"/>
-                          <a:ea typeface="Helvetica"/>
                           <a:sym typeface="Helvetica"/>
                         </a:rPr>
                         <a:t>159.8K measurements</a:t>
                       </a:r>
                     </a:p>
                   </a:txBody>
-                  <a:tcPr anchor="ctr" marB="50800" marT="50800" marR="0" marL="0">
-                    <a:lnL algn="ctr" cmpd="sng" cap="flat" w="9525">
+                  <a:tcPr marL="0" marR="0" marT="50800" marB="50800" anchor="ctr">
+                    <a:lnL w="9525" cap="flat" cmpd="sng" algn="ctr">
                       <a:solidFill>
                         <a:srgbClr val="666666">
                           <a:alpha val="100000"/>
@@ -9185,7 +9399,7 @@
                       </a:solidFill>
                       <a:prstDash val="solid"/>
                     </a:lnL>
-                    <a:lnR algn="ctr" cmpd="sng" cap="flat" w="9525">
+                    <a:lnR w="9525" cap="flat" cmpd="sng" algn="ctr">
                       <a:solidFill>
                         <a:srgbClr val="666666">
                           <a:alpha val="100000"/>
@@ -9193,7 +9407,7 @@
                       </a:solidFill>
                       <a:prstDash val="solid"/>
                     </a:lnR>
-                    <a:lnT algn="ctr" cmpd="sng" cap="flat" w="9525">
+                    <a:lnT w="9525" cap="flat" cmpd="sng" algn="ctr">
                       <a:solidFill>
                         <a:srgbClr val="666666">
                           <a:alpha val="100000"/>
@@ -9201,7 +9415,7 @@
                       </a:solidFill>
                       <a:prstDash val="solid"/>
                     </a:lnT>
-                    <a:lnB algn="ctr" cmpd="sng" cap="flat" w="9525">
+                    <a:lnB w="9525" cap="flat" cmpd="sng" algn="ctr">
                       <a:solidFill>
                         <a:srgbClr val="666666">
                           <a:alpha val="100000"/>
@@ -9221,7 +9435,7 @@
                     <a:bodyPr/>
                     <a:lstStyle/>
                     <a:p>
-                      <a:pPr algn="l" marL="50800" marR="50800">
+                      <a:pPr marL="50800" marR="50800" algn="l">
                         <a:lnSpc>
                           <a:spcPct val="100000"/>
                         </a:lnSpc>
@@ -9234,7 +9448,7 @@
                         <a:buNone/>
                       </a:pPr>
                       <a:r>
-                        <a:rPr cap="none" sz="1100" i="0" b="0" u="none" strike="noStrike">
+                        <a:rPr sz="1100" b="0" i="0" u="none" strike="noStrike" cap="none">
                           <a:solidFill>
                             <a:srgbClr val="000000">
                               <a:alpha val="100000"/>
@@ -9242,15 +9456,14 @@
                           </a:solidFill>
                           <a:latin typeface="Helvetica"/>
                           <a:cs typeface="Helvetica"/>
-                          <a:ea typeface="Helvetica"/>
                           <a:sym typeface="Helvetica"/>
                         </a:rPr>
                         <a:t>must ✓</a:t>
                       </a:r>
                     </a:p>
                   </a:txBody>
-                  <a:tcPr anchor="ctr" marB="50800" marT="50800" marR="0" marL="0">
-                    <a:lnL algn="ctr" cmpd="sng" cap="flat" w="9525">
+                  <a:tcPr marL="0" marR="0" marT="50800" marB="50800" anchor="ctr">
+                    <a:lnL w="9525" cap="flat" cmpd="sng" algn="ctr">
                       <a:solidFill>
                         <a:srgbClr val="666666">
                           <a:alpha val="100000"/>
@@ -9258,7 +9471,7 @@
                       </a:solidFill>
                       <a:prstDash val="solid"/>
                     </a:lnL>
-                    <a:lnR algn="ctr" cmpd="sng" cap="flat" w="9525">
+                    <a:lnR w="9525" cap="flat" cmpd="sng" algn="ctr">
                       <a:solidFill>
                         <a:srgbClr val="666666">
                           <a:alpha val="100000"/>
@@ -9266,7 +9479,7 @@
                       </a:solidFill>
                       <a:prstDash val="solid"/>
                     </a:lnR>
-                    <a:lnT algn="ctr" cmpd="sng" cap="flat" w="9525">
+                    <a:lnT w="9525" cap="flat" cmpd="sng" algn="ctr">
                       <a:solidFill>
                         <a:srgbClr val="666666">
                           <a:alpha val="100000"/>
@@ -9274,7 +9487,7 @@
                       </a:solidFill>
                       <a:prstDash val="solid"/>
                     </a:lnT>
-                    <a:lnB algn="ctr" cmpd="sng" cap="flat" w="9525">
+                    <a:lnB w="9525" cap="flat" cmpd="sng" algn="ctr">
                       <a:solidFill>
                         <a:srgbClr val="666666">
                           <a:alpha val="100000"/>
@@ -9289,6 +9502,11 @@
                     </a:solidFill>
                   </a:tcPr>
                 </a:tc>
+                <a:extLst>
+                  <a:ext uri="{0D108BD9-81ED-4DB2-BD59-A6C34878D82A}">
+                    <a16:rowId xmlns:a16="http://schemas.microsoft.com/office/drawing/2014/main" val="10010"/>
+                  </a:ext>
+                </a:extLst>
               </a:tr>
             </a:tbl>
           </a:graphicData>
@@ -9339,7 +9557,7 @@
           <a:bodyPr/>
           <a:lstStyle/>
           <a:p>
-            <a:pPr algn="l" marL="0" marR="0">
+            <a:pPr marL="0" marR="0" algn="l">
               <a:lnSpc>
                 <a:spcPct val="100000"/>
               </a:lnSpc>
@@ -9352,7 +9570,7 @@
               <a:buNone/>
             </a:pPr>
             <a:r>
-              <a:rPr cap="none" sz="2600" i="0" b="1" u="none" strike="noStrike">
+              <a:rPr sz="2600" b="1" i="0" u="none" strike="noStrike" cap="none">
                 <a:solidFill>
                   <a:srgbClr val="0A3D62">
                     <a:alpha val="100000"/>
@@ -9360,7 +9578,6 @@
                 </a:solidFill>
                 <a:latin typeface="Arial"/>
                 <a:cs typeface="Arial"/>
-                <a:ea typeface="Arial"/>
                 <a:sym typeface="Arial"/>
               </a:rPr>
               <a:t>Ingest — engineering highlights</a:t>
@@ -9388,7 +9605,7 @@
           <a:bodyPr/>
           <a:lstStyle/>
           <a:p>
-            <a:pPr algn="l" marL="0" marR="0">
+            <a:pPr marL="0" marR="0" algn="l">
               <a:lnSpc>
                 <a:spcPct val="100000"/>
               </a:lnSpc>
@@ -9401,7 +9618,7 @@
               <a:buNone/>
             </a:pPr>
             <a:r>
-              <a:rPr cap="none" sz="1600" i="0" b="0" u="none" strike="noStrike">
+              <a:rPr sz="1600" b="0" i="0" u="none" strike="noStrike" cap="none">
                 <a:solidFill>
                   <a:srgbClr val="222222">
                     <a:alpha val="100000"/>
@@ -9409,14 +9626,13 @@
                 </a:solidFill>
                 <a:latin typeface="Arial"/>
                 <a:cs typeface="Arial"/>
-                <a:ea typeface="Arial"/>
                 <a:sym typeface="Arial"/>
               </a:rPr>
               <a:t>Prescriptive schema: a canonical field dictionary + schema-lint enforce names/types/units across datasets.</a:t>
             </a:r>
           </a:p>
           <a:p>
-            <a:pPr algn="l" marL="0" marR="0">
+            <a:pPr marL="0" marR="0" algn="l">
               <a:lnSpc>
                 <a:spcPct val="100000"/>
               </a:lnSpc>
@@ -9429,7 +9645,7 @@
               <a:buNone/>
             </a:pPr>
             <a:r>
-              <a:rPr cap="none" sz="1600" i="0" b="0" u="none" strike="noStrike">
+              <a:rPr sz="1600" b="0" i="0" u="none" strike="noStrike" cap="none">
                 <a:solidFill>
                   <a:srgbClr val="222222">
                     <a:alpha val="100000"/>
@@ -9437,14 +9653,13 @@
                 </a:solidFill>
                 <a:latin typeface="Arial"/>
                 <a:cs typeface="Arial"/>
-                <a:ea typeface="Arial"/>
                 <a:sym typeface="Arial"/>
               </a:rPr>
               <a:t>UUID-first primary keys minted at sea (stable through QA/QC); natural keys (cruise_key) where appropriate.</a:t>
             </a:r>
           </a:p>
           <a:p>
-            <a:pPr algn="l" marL="0" marR="0">
+            <a:pPr marL="0" marR="0" algn="l">
               <a:lnSpc>
                 <a:spcPct val="100000"/>
               </a:lnSpc>
@@ -9457,7 +9672,7 @@
               <a:buNone/>
             </a:pPr>
             <a:r>
-              <a:rPr cap="none" sz="1600" i="0" b="0" u="none" strike="noStrike">
+              <a:rPr sz="1600" b="0" i="0" u="none" strike="noStrike" cap="none">
                 <a:solidFill>
                   <a:srgbClr val="222222">
                     <a:alpha val="100000"/>
@@ -9465,14 +9680,13 @@
                 </a:solidFill>
                 <a:latin typeface="Arial"/>
                 <a:cs typeface="Arial"/>
-                <a:ea typeface="Arial"/>
                 <a:sym typeface="Arial"/>
               </a:rPr>
               <a:t>Cross-dataset relationships registry — every dataset links to the shared cruise / ship / grid tables.</a:t>
             </a:r>
           </a:p>
           <a:p>
-            <a:pPr algn="l" marL="0" marR="0">
+            <a:pPr marL="0" marR="0" algn="l">
               <a:lnSpc>
                 <a:spcPct val="100000"/>
               </a:lnSpc>
@@ -9485,7 +9699,7 @@
               <a:buNone/>
             </a:pPr>
             <a:r>
-              <a:rPr cap="none" sz="1600" i="0" b="0" u="none" strike="noStrike">
+              <a:rPr sz="1600" b="0" i="0" u="none" strike="noStrike" cap="none">
                 <a:solidFill>
                   <a:srgbClr val="222222">
                     <a:alpha val="100000"/>
@@ -9493,14 +9707,13 @@
                 </a:solidFill>
                 <a:latin typeface="Arial"/>
                 <a:cs typeface="Arial"/>
-                <a:ea typeface="Arial"/>
                 <a:sym typeface="Arial"/>
               </a:rPr>
               <a:t>CTD adaptive thinning (Douglas–Peucker): 15+ GB → 258 MB while preserving every profile inflection.</a:t>
             </a:r>
           </a:p>
           <a:p>
-            <a:pPr algn="l" marL="0" marR="0">
+            <a:pPr marL="0" marR="0" algn="l">
               <a:lnSpc>
                 <a:spcPct val="100000"/>
               </a:lnSpc>
@@ -9513,7 +9726,7 @@
               <a:buNone/>
             </a:pPr>
             <a:r>
-              <a:rPr cap="none" sz="1600" i="0" b="0" u="none" strike="noStrike">
+              <a:rPr sz="1600" b="0" i="0" u="none" strike="noStrike" cap="none">
                 <a:solidFill>
                   <a:srgbClr val="222222">
                     <a:alpha val="100000"/>
@@ -9521,14 +9734,13 @@
                 </a:solidFill>
                 <a:latin typeface="Arial"/>
                 <a:cs typeface="Arial"/>
-                <a:ea typeface="Arial"/>
                 <a:sym typeface="Arial"/>
               </a:rPr>
               <a:t>Hardest ingest — phytoplankton: region-pooled grain (no per-station position), cross-tab Excel, WoRMS taxonomy.</a:t>
             </a:r>
           </a:p>
           <a:p>
-            <a:pPr algn="l" marL="0" marR="0">
+            <a:pPr marL="0" marR="0" algn="l">
               <a:lnSpc>
                 <a:spcPct val="100000"/>
               </a:lnSpc>
@@ -9541,7 +9753,7 @@
               <a:buNone/>
             </a:pPr>
             <a:r>
-              <a:rPr cap="none" sz="1600" i="0" b="0" u="none" strike="noStrike">
+              <a:rPr sz="1600" b="0" i="0" u="none" strike="noStrike" cap="none">
                 <a:solidFill>
                   <a:srgbClr val="222222">
                     <a:alpha val="100000"/>
@@ -9549,7 +9761,6 @@
                 </a:solidFill>
                 <a:latin typeface="Arial"/>
                 <a:cs typeface="Arial"/>
-                <a:ea typeface="Arial"/>
                 <a:sym typeface="Arial"/>
               </a:rPr>
               <a:t>Reusable spatial/temporal match helpers resolve cross-dataset joins (site+datetime, nearest-depth).</a:t>
@@ -9602,7 +9813,7 @@
           <a:bodyPr/>
           <a:lstStyle/>
           <a:p>
-            <a:pPr algn="l" marL="0" marR="0">
+            <a:pPr marL="0" marR="0" algn="l">
               <a:lnSpc>
                 <a:spcPct val="100000"/>
               </a:lnSpc>
@@ -9615,7 +9826,7 @@
               <a:buNone/>
             </a:pPr>
             <a:r>
-              <a:rPr cap="none" sz="2600" i="0" b="1" u="none" strike="noStrike">
+              <a:rPr sz="2600" b="1" i="0" u="none" strike="noStrike" cap="none">
                 <a:solidFill>
                   <a:srgbClr val="0A3D62">
                     <a:alpha val="100000"/>
@@ -9623,7 +9834,6 @@
                 </a:solidFill>
                 <a:latin typeface="Arial"/>
                 <a:cs typeface="Arial"/>
-                <a:ea typeface="Arial"/>
                 <a:sym typeface="Arial"/>
               </a:rPr>
               <a:t>A repeatable, self-tracking ingest loop</a:t>
@@ -9651,7 +9861,7 @@
           <a:bodyPr/>
           <a:lstStyle/>
           <a:p>
-            <a:pPr algn="l" marL="0" marR="0">
+            <a:pPr marL="0" marR="0" algn="l">
               <a:lnSpc>
                 <a:spcPct val="100000"/>
               </a:lnSpc>
@@ -9664,7 +9874,7 @@
               <a:buNone/>
             </a:pPr>
             <a:r>
-              <a:rPr cap="none" sz="1600" i="0" b="0" u="none" strike="noStrike">
+              <a:rPr sz="1600" b="0" i="0" u="none" strike="noStrike" cap="none">
                 <a:solidFill>
                   <a:srgbClr val="222222">
                     <a:alpha val="100000"/>
@@ -9672,14 +9882,13 @@
                 </a:solidFill>
                 <a:latin typeface="Arial"/>
                 <a:cs typeface="Arial"/>
-                <a:ea typeface="Arial"/>
                 <a:sym typeface="Arial"/>
               </a:rPr>
               <a:t>Claude Code skills pipeline: explore-dataset → generate-metadata → ingest-new → validate-ingest → publish.</a:t>
             </a:r>
           </a:p>
           <a:p>
-            <a:pPr algn="l" marL="0" marR="0">
+            <a:pPr marL="0" marR="0" algn="l">
               <a:lnSpc>
                 <a:spcPct val="100000"/>
               </a:lnSpc>
@@ -9692,7 +9901,7 @@
               <a:buNone/>
             </a:pPr>
             <a:r>
-              <a:rPr cap="none" sz="1600" i="0" b="0" u="none" strike="noStrike">
+              <a:rPr sz="1600" b="0" i="0" u="none" strike="noStrike" cap="none">
                 <a:solidFill>
                   <a:srgbClr val="222222">
                     <a:alpha val="100000"/>
@@ -9700,14 +9909,13 @@
                 </a:solidFill>
                 <a:latin typeface="Arial"/>
                 <a:cs typeface="Arial"/>
-                <a:ea typeface="Arial"/>
                 <a:sym typeface="Arial"/>
               </a:rPr>
               <a:t>Every workflow records ranked follow-up questions for data providers (per-dataset questions.csv).</a:t>
             </a:r>
           </a:p>
           <a:p>
-            <a:pPr algn="l" marL="0" marR="0">
+            <a:pPr marL="0" marR="0" algn="l">
               <a:lnSpc>
                 <a:spcPct val="100000"/>
               </a:lnSpc>
@@ -9720,7 +9928,7 @@
               <a:buNone/>
             </a:pPr>
             <a:r>
-              <a:rPr cap="none" sz="1600" i="0" b="0" u="none" strike="noStrike">
+              <a:rPr sz="1600" b="0" i="0" u="none" strike="noStrike" cap="none">
                 <a:solidFill>
                   <a:srgbClr val="222222">
                     <a:alpha val="100000"/>
@@ -9728,14 +9936,13 @@
                 </a:solidFill>
                 <a:latin typeface="Arial"/>
                 <a:cs typeface="Arial"/>
-                <a:ea typeface="Arial"/>
                 <a:sym typeface="Arial"/>
               </a:rPr>
               <a:t>A dataset_status tracker + cross-dataset relationship registry make the pipeline auditable.</a:t>
             </a:r>
           </a:p>
           <a:p>
-            <a:pPr algn="l" marL="0" marR="0">
+            <a:pPr marL="0" marR="0" algn="l">
               <a:lnSpc>
                 <a:spcPct val="100000"/>
               </a:lnSpc>
@@ -9748,7 +9955,7 @@
               <a:buNone/>
             </a:pPr>
             <a:r>
-              <a:rPr cap="none" sz="1600" i="0" b="0" u="none" strike="noStrike">
+              <a:rPr sz="1600" b="0" i="0" u="none" strike="noStrike" cap="none">
                 <a:solidFill>
                   <a:srgbClr val="222222">
                     <a:alpha val="100000"/>
@@ -9756,14 +9963,13 @@
                 </a:solidFill>
                 <a:latin typeface="Arial"/>
                 <a:cs typeface="Arial"/>
-                <a:ea typeface="Arial"/>
                 <a:sym typeface="Arial"/>
               </a:rPr>
               <a:t>Each new dataset auto-discovers into the release — no manual wiring.</a:t>
             </a:r>
           </a:p>
           <a:p>
-            <a:pPr algn="l" marL="0" marR="0">
+            <a:pPr marL="0" marR="0" algn="l">
               <a:lnSpc>
                 <a:spcPct val="100000"/>
               </a:lnSpc>
@@ -9776,7 +9982,7 @@
               <a:buNone/>
             </a:pPr>
             <a:r>
-              <a:rPr cap="none" sz="1600" i="0" b="0" u="none" strike="noStrike">
+              <a:rPr sz="1600" b="0" i="0" u="none" strike="noStrike" cap="none">
                 <a:solidFill>
                   <a:srgbClr val="222222">
                     <a:alpha val="100000"/>
@@ -9784,7 +9990,6 @@
                 </a:solidFill>
                 <a:latin typeface="Arial"/>
                 <a:cs typeface="Arial"/>
-                <a:ea typeface="Arial"/>
                 <a:sym typeface="Arial"/>
               </a:rPr>
               <a:t>Result: 81 commits since December turning 11 raw sources into one coherent, documented database.</a:t>
@@ -9837,7 +10042,7 @@
           <a:bodyPr/>
           <a:lstStyle/>
           <a:p>
-            <a:pPr algn="l" marL="0" marR="0">
+            <a:pPr marL="0" marR="0" algn="l">
               <a:lnSpc>
                 <a:spcPct val="100000"/>
               </a:lnSpc>
@@ -9850,7 +10055,7 @@
               <a:buNone/>
             </a:pPr>
             <a:r>
-              <a:rPr cap="none" sz="4000" i="0" b="1" u="none" strike="noStrike">
+              <a:rPr sz="4000" b="1" i="0" u="none" strike="noStrike" cap="none">
                 <a:solidFill>
                   <a:srgbClr val="0A3D62">
                     <a:alpha val="100000"/>
@@ -9858,7 +10063,6 @@
                 </a:solidFill>
                 <a:latin typeface="Arial"/>
                 <a:cs typeface="Arial"/>
-                <a:ea typeface="Arial"/>
                 <a:sym typeface="Arial"/>
               </a:rPr>
               <a:t>② VISUALIZE</a:t>
@@ -9886,7 +10090,7 @@
           <a:bodyPr/>
           <a:lstStyle/>
           <a:p>
-            <a:pPr algn="l" marL="0" marR="0">
+            <a:pPr marL="0" marR="0" algn="l">
               <a:lnSpc>
                 <a:spcPct val="100000"/>
               </a:lnSpc>
@@ -9899,7 +10103,7 @@
               <a:buNone/>
             </a:pPr>
             <a:r>
-              <a:rPr cap="none" sz="1800" i="0" b="1" u="none" strike="noStrike">
+              <a:rPr sz="1800" b="1" i="0" u="none" strike="noStrike" cap="none">
                 <a:solidFill>
                   <a:srgbClr val="F58518">
                     <a:alpha val="100000"/>
@@ -9907,7 +10111,6 @@
                 </a:solidFill>
                 <a:latin typeface="Arial"/>
                 <a:cs typeface="Arial"/>
-                <a:ea typeface="Arial"/>
                 <a:sym typeface="Arial"/>
               </a:rPr>
               <a:t>Component 2 of 3</a:t>
